--- a/World-Order/PP5182-2026t27/PP5182-2026.09.28-Mon-G-minus-DQ.pptx
+++ b/World-Order/PP5182-2026t27/PP5182-2026.09.28-Mon-G-minus-DQ.pptx
@@ -4,6 +4,9 @@
   <p:sldMasterIdLst>
     <p:sldMasterId id="2147483648" r:id="rId1"/>
   </p:sldMasterIdLst>
+  <p:notesMasterIdLst>
+    <p:notesMasterId r:id="rId21"/>
+  </p:notesMasterIdLst>
   <p:sldIdLst>
     <p:sldId id="256" r:id="rId2"/>
     <p:sldId id="257" r:id="rId3"/>
@@ -25,9 +28,6 @@
     <p:sldId id="273" r:id="rId19"/>
     <p:sldId id="274" r:id="rId20"/>
   </p:sldIdLst>
-  <p:notesMasterIdLst>
-    <p:notesMasterId r:id="rId21"/>
-  </p:notesMasterIdLst>
   <p:sldSz cx="12192000" cy="6858000"/>
   <p:notesSz cx="6858000" cy="12192000"/>
   <p:defaultTextStyle>
@@ -122,6 +122,11 @@
       </a:defRPr>
     </a:lvl9pPr>
   </p:defaultTextStyle>
+  <p:extLst>
+    <p:ext uri="{EFAFB233-063F-42B5-8137-9DF3F51BA10A}">
+      <p15:sldGuideLst xmlns:p15="http://schemas.microsoft.com/office/powerpoint/2012/main"/>
+    </p:ext>
+  </p:extLst>
 </p:presentation>
 </file>
 
@@ -147,234 +152,10 @@
           <a:chExt cx="0" cy="0"/>
         </a:xfrm>
       </p:grpSpPr>
-      <p:sp>
-        <p:nvSpPr>
-          <p:cNvPr id="2" name="Header Placeholder 1"/>
-          <p:cNvSpPr>
-            <a:spLocks noGrp="1"/>
-          </p:cNvSpPr>
-          <p:nvPr>
-            <p:ph type="hdr" sz="quarter"/>
-          </p:nvPr>
-        </p:nvSpPr>
-        <p:spPr>
-          <a:xfrm>
-            <a:off x="0" y="0"/>
-            <a:ext cx="2971800" cy="458788"/>
-          </a:xfrm>
-          <a:prstGeom prst="rect">
-            <a:avLst/>
-          </a:prstGeom>
-        </p:spPr>
-        <p:txBody>
-          <a:bodyPr vert="horz" lIns="91440" tIns="45720" rIns="91440" bIns="45720" rtlCol="0"/>
-          <a:lstStyle>
-            <a:lvl1pPr algn="l">
-              <a:defRPr sz="1200"/>
-            </a:lvl1pPr>
-          </a:lstStyle>
-          <a:p>
-            <a:endParaRPr lang="en-US"/>
-          </a:p>
-        </p:txBody>
-      </p:sp>
-      <p:sp>
-        <p:nvSpPr>
-          <p:cNvPr id="3" name="Date Placeholder 2"/>
-          <p:cNvSpPr>
-            <a:spLocks noGrp="1"/>
-          </p:cNvSpPr>
-          <p:nvPr>
-            <p:ph type="dt" idx="1"/>
-          </p:nvPr>
-        </p:nvSpPr>
-        <p:spPr>
-          <a:xfrm>
-            <a:off x="3884613" y="0"/>
-            <a:ext cx="2971800" cy="458788"/>
-          </a:xfrm>
-          <a:prstGeom prst="rect">
-            <a:avLst/>
-          </a:prstGeom>
-        </p:spPr>
-        <p:txBody>
-          <a:bodyPr vert="horz" lIns="91440" tIns="45720" rIns="91440" bIns="45720" rtlCol="0"/>
-          <a:lstStyle>
-            <a:lvl1pPr algn="r">
-              <a:defRPr sz="1200"/>
-            </a:lvl1pPr>
-          </a:lstStyle>
-          <a:p>
-            <a:fld id="{5282F153-3F37-0F45-9E97-73ACFA13230C}" type="datetimeFigureOut">
-              <a:rPr lang="en-US"/>
-              <a:t>7/23/19</a:t>
-            </a:fld>
-            <a:endParaRPr lang="en-US"/>
-          </a:p>
-        </p:txBody>
-      </p:sp>
-      <p:sp>
-        <p:nvSpPr>
-          <p:cNvPr id="4" name="Slide Image Placeholder 3"/>
-          <p:cNvSpPr>
-            <a:spLocks noGrp="1" noRot="1" noChangeAspect="1"/>
-          </p:cNvSpPr>
-          <p:nvPr>
-            <p:ph type="sldImg" idx="2"/>
-          </p:nvPr>
-        </p:nvSpPr>
-        <p:spPr>
-          <a:xfrm>
-            <a:off x="685800" y="1143000"/>
-            <a:ext cx="5486400" cy="3086100"/>
-          </a:xfrm>
-          <a:prstGeom prst="rect">
-            <a:avLst/>
-          </a:prstGeom>
-          <a:noFill/>
-          <a:ln w="12700">
-            <a:solidFill>
-              <a:prstClr val="black"/>
-            </a:solidFill>
-          </a:ln>
-        </p:spPr>
-        <p:txBody>
-          <a:bodyPr vert="horz" lIns="91440" tIns="45720" rIns="91440" bIns="45720" rtlCol="0" anchor="ctr"/>
-          <a:lstStyle/>
-          <a:p>
-            <a:endParaRPr lang="en-US"/>
-          </a:p>
-        </p:txBody>
-      </p:sp>
-      <p:sp>
-        <p:nvSpPr>
-          <p:cNvPr id="5" name="Notes Placeholder 4"/>
-          <p:cNvSpPr>
-            <a:spLocks noGrp="1"/>
-          </p:cNvSpPr>
-          <p:nvPr>
-            <p:ph type="body" sz="quarter" idx="3"/>
-          </p:nvPr>
-        </p:nvSpPr>
-        <p:spPr>
-          <a:xfrm>
-            <a:off x="685800" y="4400550"/>
-            <a:ext cx="5486400" cy="3600450"/>
-          </a:xfrm>
-          <a:prstGeom prst="rect">
-            <a:avLst/>
-          </a:prstGeom>
-        </p:spPr>
-        <p:txBody>
-          <a:bodyPr vert="horz" lIns="91440" tIns="45720" rIns="91440" bIns="45720" rtlCol="0"/>
-          <a:lstStyle/>
-          <a:p>
-            <a:pPr lvl="0"/>
-            <a:r>
-              <a:rPr lang="en-US"/>
-              <a:t>Click to edit Master text styles</a:t>
-            </a:r>
-          </a:p>
-          <a:p>
-            <a:pPr lvl="1"/>
-            <a:r>
-              <a:rPr lang="en-US"/>
-              <a:t>Second level</a:t>
-            </a:r>
-          </a:p>
-          <a:p>
-            <a:pPr lvl="2"/>
-            <a:r>
-              <a:rPr lang="en-US"/>
-              <a:t>Third level</a:t>
-            </a:r>
-          </a:p>
-          <a:p>
-            <a:pPr lvl="3"/>
-            <a:r>
-              <a:rPr lang="en-US"/>
-              <a:t>Fourth level</a:t>
-            </a:r>
-          </a:p>
-          <a:p>
-            <a:pPr lvl="4"/>
-            <a:r>
-              <a:rPr lang="en-US"/>
-              <a:t>Fifth level</a:t>
-            </a:r>
-          </a:p>
-        </p:txBody>
-      </p:sp>
-      <p:sp>
-        <p:nvSpPr>
-          <p:cNvPr id="6" name="Footer Placeholder 5"/>
-          <p:cNvSpPr>
-            <a:spLocks noGrp="1"/>
-          </p:cNvSpPr>
-          <p:nvPr>
-            <p:ph type="ftr" sz="quarter" idx="4"/>
-          </p:nvPr>
-        </p:nvSpPr>
-        <p:spPr>
-          <a:xfrm>
-            <a:off x="0" y="8685213"/>
-            <a:ext cx="2971800" cy="458787"/>
-          </a:xfrm>
-          <a:prstGeom prst="rect">
-            <a:avLst/>
-          </a:prstGeom>
-        </p:spPr>
-        <p:txBody>
-          <a:bodyPr vert="horz" lIns="91440" tIns="45720" rIns="91440" bIns="45720" rtlCol="0" anchor="b"/>
-          <a:lstStyle>
-            <a:lvl1pPr algn="l">
-              <a:defRPr sz="1200"/>
-            </a:lvl1pPr>
-          </a:lstStyle>
-          <a:p>
-            <a:endParaRPr lang="en-US"/>
-          </a:p>
-        </p:txBody>
-      </p:sp>
-      <p:sp>
-        <p:nvSpPr>
-          <p:cNvPr id="7" name="Slide Number Placeholder 6"/>
-          <p:cNvSpPr>
-            <a:spLocks noGrp="1"/>
-          </p:cNvSpPr>
-          <p:nvPr>
-            <p:ph type="sldNum" sz="quarter" idx="5"/>
-          </p:nvPr>
-        </p:nvSpPr>
-        <p:spPr>
-          <a:xfrm>
-            <a:off x="3884613" y="8685213"/>
-            <a:ext cx="2971800" cy="458787"/>
-          </a:xfrm>
-          <a:prstGeom prst="rect">
-            <a:avLst/>
-          </a:prstGeom>
-        </p:spPr>
-        <p:txBody>
-          <a:bodyPr vert="horz" lIns="91440" tIns="45720" rIns="91440" bIns="45720" rtlCol="0" anchor="b"/>
-          <a:lstStyle>
-            <a:lvl1pPr algn="r">
-              <a:defRPr sz="1200"/>
-            </a:lvl1pPr>
-          </a:lstStyle>
-          <a:p>
-            <a:fld id="{CE5E9CC1-C706-0F49-92D6-E571CC5EEA8F}" type="slidenum">
-              <a:rPr lang="en-US"/>
-              <a:t>‹#›</a:t>
-            </a:fld>
-            <a:endParaRPr lang="en-US"/>
-          </a:p>
-        </p:txBody>
-      </p:sp>
     </p:spTree>
     <p:extLst>
       <p:ext uri="{BB962C8B-B14F-4D97-AF65-F5344CB8AC3E}">
-        <p14:creationId xmlns:p14="http://schemas.microsoft.com/office/powerpoint/2010/main" val="1024086991"/>
+        <p14:creationId xmlns:p14="http://schemas.microsoft.com/office/powerpoint/2010/main" val="1127359356"/>
       </p:ext>
     </p:extLst>
   </p:cSld>
@@ -523,7 +304,6 @@
               <a:t>Lecture arc: 3As in a G-minus world; Rockefeller survey evidence; then Buzan, Acharya, Snidal, and Trebesch as neighbouring theories.
 </a:t>
             </a:r>
-            <a:endParaRPr lang="en-US" dirty="0"/>
           </a:p>
         </p:txBody>
       </p:sp>
@@ -612,7 +392,6 @@
               <a:t>[Sources]
 - The Rockefeller Foundation and Focaldata (2026), “New Global Poll: Amid Growing Pessimism, Security Tops Priorities for International Cooperation,” 16 Sep 2026.</a:t>
             </a:r>
-            <a:endParaRPr lang="en-US" dirty="0"/>
           </a:p>
         </p:txBody>
       </p:sp>
@@ -702,7 +481,6 @@
 [Sources]
 - The Rockefeller Foundation and Focaldata (2026), Seeking Security and Opportunity in a Stormy World; reported effectiveness and aid-motivation results.</a:t>
             </a:r>
-            <a:endParaRPr lang="en-US" dirty="0"/>
           </a:p>
         </p:txBody>
       </p:sp>
@@ -791,7 +569,6 @@
               <a:t>[Sources]
 - Rockefeller Foundation 2026 survey; transition to theoretical alternatives.</a:t>
             </a:r>
-            <a:endParaRPr lang="en-US" dirty="0"/>
           </a:p>
         </p:txBody>
       </p:sp>
@@ -880,7 +657,6 @@
               <a:t>[Sources]
 - Barry Buzan (2023), “Deep Pluralism as the Emerging Structure of Global Society,” in Pluralism and World Order; catalog reproduced in Intellectual-framework-2026.09.md.</a:t>
             </a:r>
-            <a:endParaRPr lang="en-US" dirty="0"/>
           </a:p>
         </p:txBody>
       </p:sp>
@@ -971,7 +747,6 @@
 - Barry Buzan (2023), “Deep Pluralism as the Emerging Structure of Global Society.”
 - Intellectual-framework-2026.09.md: G-minus definition.</a:t>
             </a:r>
-            <a:endParaRPr lang="en-US" dirty="0"/>
           </a:p>
         </p:txBody>
       </p:sp>
@@ -1064,7 +839,6 @@
 - Amitav Acharya (2026), “Thinking beyond a polarized world: why multiplexity matters.”
 - Barry Buzan (2023), “Deep Pluralism as the Emerging Structure of Global Society.”</a:t>
             </a:r>
-            <a:endParaRPr lang="en-US" dirty="0"/>
           </a:p>
         </p:txBody>
       </p:sp>
@@ -1153,7 +927,6 @@
               <a:t>[Sources]
 - Fernando Broner, Alberto Martin, Josefin Meyer, and Christoph Trebesch (2025), Hegemonic Globalization, BSE Working Paper 1504, revised Sep 2025.</a:t>
             </a:r>
-            <a:endParaRPr lang="en-US" dirty="0"/>
           </a:p>
         </p:txBody>
       </p:sp>
@@ -1244,7 +1017,6 @@
 - Broner, Martin, Meyer, and Trebesch (2025), Hegemonic Globalization.
 - Intellectual-framework-2026.09.md: incentive compatibility, modularity, pathfinder, and G-minus working hypotheses.</a:t>
             </a:r>
-            <a:endParaRPr lang="en-US" dirty="0"/>
           </a:p>
         </p:txBody>
       </p:sp>
@@ -1333,7 +1105,6 @@
               <a:t>4-5 minutes. There is no unique classification. Ask what institutional mechanism would justify putting a function in the third column.
 </a:t>
             </a:r>
-            <a:endParaRPr lang="en-US" dirty="0"/>
           </a:p>
         </p:txBody>
       </p:sp>
@@ -1422,7 +1193,6 @@
               <a:t>[Sources]
 - Intellectual-framework-2026.09.md: current working hypothesis on G-minus and leadership.</a:t>
             </a:r>
-            <a:endParaRPr lang="en-US" dirty="0"/>
           </a:p>
         </p:txBody>
       </p:sp>
@@ -1511,7 +1281,6 @@
               <a:t>[Sources]
 - Intellectual-framework-2026.09.md (current controlling framework).</a:t>
             </a:r>
-            <a:endParaRPr lang="en-US" dirty="0"/>
           </a:p>
         </p:txBody>
       </p:sp>
@@ -1600,7 +1369,6 @@
               <a:t>[Sources]
 - Intellectual-framework-2026.09.md: G-minus definition and working hypothesis that world order may not require anyone to lead it.</a:t>
             </a:r>
-            <a:endParaRPr lang="en-US" dirty="0"/>
           </a:p>
         </p:txBody>
       </p:sp>
@@ -1690,7 +1458,6 @@
 [Sources]
 - Intellectual-framework-2026.09.md: economic diplomacy and current 3As definitions.</a:t>
             </a:r>
-            <a:endParaRPr lang="en-US" dirty="0"/>
           </a:p>
         </p:txBody>
       </p:sp>
@@ -1779,7 +1546,6 @@
               <a:t>[Sources]
 - Yuen Foong Khong and Joseph Liow (2025), “Southeast Asia Is Starting to Choose,” Foreign Affairs; data reproduced in 1774858148-Danny.Quah-Economic-Statecraft-Asias-Role-Arithmetic-deck.pdf, slide 21.</a:t>
             </a:r>
-            <a:endParaRPr lang="en-US" dirty="0"/>
           </a:p>
         </p:txBody>
       </p:sp>
@@ -1868,7 +1634,6 @@
               <a:t>[Sources]
 - Intellectual-framework-2026.09.md: economic diplomacy as Third-Nation counterpart to Great-Power economic statecraft.</a:t>
             </a:r>
-            <a:endParaRPr lang="en-US" dirty="0"/>
           </a:p>
         </p:txBody>
       </p:sp>
@@ -1957,7 +1722,6 @@
               <a:t>[Sources]
 - Intellectual-framework-2026.09.md: incentive compatibility, inadvertent cooperation, and pragmatic multilateralism.</a:t>
             </a:r>
-            <a:endParaRPr lang="en-US" dirty="0"/>
           </a:p>
         </p:txBody>
       </p:sp>
@@ -2046,7 +1810,6 @@
               <a:t>Ask students to name functions before introducing Rockefeller and the theoretical alternatives.
 </a:t>
             </a:r>
-            <a:endParaRPr lang="en-US" dirty="0"/>
           </a:p>
         </p:txBody>
       </p:sp>
@@ -2135,7 +1898,6 @@
               <a:t>[Sources]
 - The Rockefeller Foundation and Focaldata (2026), Seeking Security and Opportunity in a Stormy World: A 34-Country Survey, 16 Sep 2026. https://www.rockefellerfoundation.org/reports/seeking-security-and-opportunity-in-a-stormy-world-a-34-country-survey/</a:t>
             </a:r>
-            <a:endParaRPr lang="en-US" dirty="0"/>
           </a:p>
         </p:txBody>
       </p:sp>
@@ -2213,6 +1975,7 @@
         <a:solidFill>
           <a:srgbClr val="23383C"/>
         </a:solidFill>
+        <a:effectLst/>
       </p:bgPr>
     </p:bg>
     <p:spTree>
@@ -2253,6 +2016,13 @@
             <a:prstDash val="solid"/>
           </a:ln>
         </p:spPr>
+        <p:txBody>
+          <a:bodyPr/>
+          <a:lstStyle/>
+          <a:p>
+            <a:endParaRPr lang="en-US"/>
+          </a:p>
+        </p:txBody>
       </p:sp>
       <p:sp>
         <p:nvSpPr>
@@ -2276,6 +2046,13 @@
             <a:prstDash val="solid"/>
           </a:ln>
         </p:spPr>
+        <p:txBody>
+          <a:bodyPr/>
+          <a:lstStyle/>
+          <a:p>
+            <a:endParaRPr lang="en-US"/>
+          </a:p>
+        </p:txBody>
       </p:sp>
       <p:sp>
         <p:nvSpPr>
@@ -2298,7 +2075,7 @@
           <a:bodyPr wrap="square" lIns="0" tIns="0" rIns="0" bIns="0" rtlCol="0" anchor="ctr"/>
           <a:lstStyle/>
           <a:p>
-            <a:pPr indent="0" marL="0">
+            <a:pPr marL="0" indent="0">
               <a:buNone/>
             </a:pPr>
             <a:r>
@@ -2337,7 +2114,7 @@
           <a:bodyPr wrap="square" lIns="0" tIns="0" rIns="0" bIns="0" rtlCol="0" anchor="ctr"/>
           <a:lstStyle/>
           <a:p>
-            <a:pPr algn="l" indent="0" marL="0">
+            <a:pPr marL="0" indent="0" algn="l">
               <a:buNone/>
             </a:pPr>
             <a:r>
@@ -2375,7 +2152,7 @@
           </a:prstGeom>
           <a:extLst>
             <a:ext uri="{C572A759-6A51-4108-AA02-DFA0A04FC94B}">
-              <ma14:wrappingTextBoxFlag xmlns:ma14="http://schemas.microsoft.com/office/mac/drawingml/2011/main" val="0"/>
+              <ma14:wrappingTextBoxFlag xmlns:ma14="http://schemas.microsoft.com/office/mac/drawingml/2011/main" xmlns="" val="0"/>
             </a:ext>
           </a:extLst>
         </p:spPr>
@@ -2396,8 +2173,8 @@
           <a:p>
             <a:pPr algn="r"/>
             <a:fld id="{F7021451-1387-4CA6-816F-3879F97B5CBC}" type="slidenum">
-              <a:rPr b="0" lang="en-US"/>
-              <a:t>1002</a:t>
+              <a:rPr lang="en-US" b="0"/>
+              <a:t>‹#›</a:t>
             </a:fld>
             <a:endParaRPr lang="en-US"/>
           </a:p>
@@ -2419,6 +2196,7 @@
         <a:solidFill>
           <a:srgbClr val="23383C"/>
         </a:solidFill>
+        <a:effectLst/>
       </p:bgPr>
     </p:bg>
     <p:spTree>
@@ -2457,6 +2235,13 @@
             <a:prstDash val="solid"/>
           </a:ln>
         </p:spPr>
+        <p:txBody>
+          <a:bodyPr/>
+          <a:lstStyle/>
+          <a:p>
+            <a:endParaRPr lang="en-US"/>
+          </a:p>
+        </p:txBody>
       </p:sp>
       <p:sp>
         <p:nvSpPr>
@@ -2479,7 +2264,7 @@
           <a:bodyPr wrap="square" lIns="0" tIns="0" rIns="0" bIns="0" rtlCol="0" anchor="ctr"/>
           <a:lstStyle/>
           <a:p>
-            <a:pPr indent="0" marL="0">
+            <a:pPr marL="0" indent="0">
               <a:buNone/>
             </a:pPr>
             <a:r>
@@ -2518,7 +2303,7 @@
           <a:bodyPr wrap="square" lIns="0" tIns="0" rIns="0" bIns="0" rtlCol="0" anchor="ctr"/>
           <a:lstStyle/>
           <a:p>
-            <a:pPr algn="l" indent="0" marL="0">
+            <a:pPr marL="0" indent="0" algn="l">
               <a:buNone/>
             </a:pPr>
             <a:r>
@@ -2556,7 +2341,7 @@
           </a:prstGeom>
           <a:extLst>
             <a:ext uri="{C572A759-6A51-4108-AA02-DFA0A04FC94B}">
-              <ma14:wrappingTextBoxFlag xmlns:ma14="http://schemas.microsoft.com/office/mac/drawingml/2011/main" val="0"/>
+              <ma14:wrappingTextBoxFlag xmlns:ma14="http://schemas.microsoft.com/office/mac/drawingml/2011/main" xmlns="" val="0"/>
             </a:ext>
           </a:extLst>
         </p:spPr>
@@ -2577,8 +2362,8 @@
           <a:p>
             <a:pPr algn="r"/>
             <a:fld id="{F7021451-1387-4CA6-816F-3879F97B5CBC}" type="slidenum">
-              <a:rPr b="0" lang="en-US"/>
-              <a:t>1003</a:t>
+              <a:rPr lang="en-US" b="0"/>
+              <a:t>‹#›</a:t>
             </a:fld>
             <a:endParaRPr lang="en-US"/>
           </a:p>
@@ -2595,6 +2380,11 @@
 <file path=ppt/slideMasters/slideMaster1.xml><?xml version="1.0" encoding="utf-8"?>
 <p:sldMaster xmlns:a="http://schemas.openxmlformats.org/drawingml/2006/main" xmlns:r="http://schemas.openxmlformats.org/officeDocument/2006/relationships" xmlns:p="http://schemas.openxmlformats.org/presentationml/2006/main">
   <p:cSld>
+    <p:bg>
+      <p:bgRef idx="1001">
+        <a:schemeClr val="bg1"/>
+      </p:bgRef>
+    </p:bg>
     <p:spTree>
       <p:nvGrpSpPr>
         <p:cNvPr id="1" name=""/>
@@ -2629,7 +2419,7 @@
           </a:prstGeom>
           <a:extLst>
             <a:ext uri="{C572A759-6A51-4108-AA02-DFA0A04FC94B}">
-              <ma14:wrappingTextBoxFlag xmlns:ma14="http://schemas.microsoft.com/office/mac/drawingml/2011/main" val="0"/>
+              <ma14:wrappingTextBoxFlag xmlns:ma14="http://schemas.microsoft.com/office/mac/drawingml/2011/main" xmlns="" val="0"/>
             </a:ext>
           </a:extLst>
         </p:spPr>
@@ -2650,8 +2440,8 @@
           <a:p>
             <a:pPr algn="r"/>
             <a:fld id="{F7021451-1387-4CA6-816F-3879F97B5CBC}" type="slidenum">
-              <a:rPr b="0" lang="en-US"/>
-              <a:t>null</a:t>
+              <a:rPr lang="en-US" b="0"/>
+              <a:t>‹#›</a:t>
             </a:fld>
             <a:endParaRPr lang="en-US"/>
           </a:p>
@@ -2957,7 +2747,7 @@
           <a:bodyPr wrap="square" lIns="0" tIns="0" rIns="0" bIns="0" rtlCol="0" anchor="ctr"/>
           <a:lstStyle/>
           <a:p>
-            <a:pPr indent="0" marL="0">
+            <a:pPr marL="0" indent="0">
               <a:buNone/>
             </a:pPr>
             <a:r>
@@ -2993,7 +2783,7 @@
           <a:bodyPr wrap="square" lIns="0" tIns="0" rIns="0" bIns="0" rtlCol="0" anchor="ctr"/>
           <a:lstStyle/>
           <a:p>
-            <a:pPr indent="0" marL="0">
+            <a:pPr marL="0" indent="0">
               <a:buNone/>
             </a:pPr>
             <a:r>
@@ -3029,7 +2819,7 @@
           <a:bodyPr wrap="square" lIns="0" tIns="0" rIns="0" bIns="0" rtlCol="0" anchor="ctr"/>
           <a:lstStyle/>
           <a:p>
-            <a:pPr indent="0" marL="0">
+            <a:pPr marL="0" indent="0">
               <a:buNone/>
             </a:pPr>
             <a:r>
@@ -3043,7 +2833,7 @@
             <a:endParaRPr lang="en-US" sz="1600" dirty="0"/>
           </a:p>
           <a:p>
-            <a:pPr indent="0" marL="0">
+            <a:pPr marL="0" indent="0">
               <a:buNone/>
             </a:pPr>
             <a:r>
@@ -3057,7 +2847,7 @@
             <a:endParaRPr lang="en-US" sz="1600" dirty="0"/>
           </a:p>
           <a:p>
-            <a:pPr indent="0" marL="0">
+            <a:pPr marL="0" indent="0">
               <a:buNone/>
             </a:pPr>
             <a:r>
@@ -3092,7 +2882,7 @@
           </a:prstGeom>
           <a:extLst>
             <a:ext uri="{C572A759-6A51-4108-AA02-DFA0A04FC94B}">
-              <ma14:wrappingTextBoxFlag xmlns:ma14="http://schemas.microsoft.com/office/mac/drawingml/2011/main" val="0"/>
+              <ma14:wrappingTextBoxFlag xmlns:ma14="http://schemas.microsoft.com/office/mac/drawingml/2011/main" xmlns="" val="0"/>
             </a:ext>
           </a:extLst>
         </p:spPr>
@@ -3113,7 +2903,7 @@
           <a:p>
             <a:pPr algn="r"/>
             <a:fld id="{F7021451-1387-4CA6-816F-3879F97B5CBC}" type="slidenum">
-              <a:rPr b="0" lang="en-US"/>
+              <a:rPr lang="en-US" b="0"/>
               <a:t>1</a:t>
             </a:fld>
             <a:endParaRPr lang="en-US"/>
@@ -3166,7 +2956,7 @@
           <a:bodyPr wrap="square" lIns="0" tIns="0" rIns="0" bIns="0" rtlCol="0" anchor="ctr"/>
           <a:lstStyle/>
           <a:p>
-            <a:pPr indent="0" marL="0">
+            <a:pPr marL="0" indent="0">
               <a:buNone/>
             </a:pPr>
             <a:r>
@@ -3205,7 +2995,7 @@
           <a:bodyPr wrap="square" lIns="0" tIns="0" rIns="0" bIns="0" rtlCol="0" anchor="ctr"/>
           <a:lstStyle/>
           <a:p>
-            <a:pPr indent="0" marL="0">
+            <a:pPr marL="0" indent="0">
               <a:buNone/>
             </a:pPr>
             <a:r>
@@ -3241,7 +3031,7 @@
           <a:bodyPr wrap="square" lIns="0" tIns="0" rIns="0" bIns="0" rtlCol="0" anchor="ctr"/>
           <a:lstStyle/>
           <a:p>
-            <a:pPr indent="0" marL="0">
+            <a:pPr marL="0" indent="0">
               <a:buNone/>
             </a:pPr>
             <a:r>
@@ -3280,6 +3070,13 @@
             <a:prstDash val="solid"/>
           </a:ln>
         </p:spPr>
+        <p:txBody>
+          <a:bodyPr/>
+          <a:lstStyle/>
+          <a:p>
+            <a:endParaRPr lang="en-US"/>
+          </a:p>
+        </p:txBody>
       </p:sp>
       <p:sp>
         <p:nvSpPr>
@@ -3302,7 +3099,7 @@
           <a:bodyPr wrap="square" lIns="0" tIns="0" rIns="0" bIns="0" rtlCol="0" anchor="ctr"/>
           <a:lstStyle/>
           <a:p>
-            <a:pPr indent="0" marL="0">
+            <a:pPr marL="0" indent="0">
               <a:buNone/>
             </a:pPr>
             <a:r>
@@ -3338,7 +3135,7 @@
           <a:bodyPr wrap="square" lIns="0" tIns="0" rIns="0" bIns="0" rtlCol="0" anchor="ctr"/>
           <a:lstStyle/>
           <a:p>
-            <a:pPr indent="0" marL="0">
+            <a:pPr marL="0" indent="0">
               <a:buNone/>
             </a:pPr>
             <a:r>
@@ -3377,6 +3174,13 @@
             <a:prstDash val="solid"/>
           </a:ln>
         </p:spPr>
+        <p:txBody>
+          <a:bodyPr/>
+          <a:lstStyle/>
+          <a:p>
+            <a:endParaRPr lang="en-US"/>
+          </a:p>
+        </p:txBody>
       </p:sp>
       <p:sp>
         <p:nvSpPr>
@@ -3399,7 +3203,7 @@
           <a:bodyPr wrap="square" lIns="0" tIns="0" rIns="0" bIns="0" rtlCol="0" anchor="ctr"/>
           <a:lstStyle/>
           <a:p>
-            <a:pPr indent="0" marL="0">
+            <a:pPr marL="0" indent="0">
               <a:buNone/>
             </a:pPr>
             <a:r>
@@ -3436,6 +3240,13 @@
             <a:prstDash val="solid"/>
           </a:ln>
         </p:spPr>
+        <p:txBody>
+          <a:bodyPr/>
+          <a:lstStyle/>
+          <a:p>
+            <a:endParaRPr lang="en-US"/>
+          </a:p>
+        </p:txBody>
       </p:sp>
       <p:sp>
         <p:nvSpPr>
@@ -3460,7 +3271,7 @@
           </a:bodyPr>
           <a:lstStyle/>
           <a:p>
-            <a:pPr indent="0" marL="0">
+            <a:pPr marL="0" indent="0">
               <a:buNone/>
             </a:pPr>
             <a:r>
@@ -3496,7 +3307,7 @@
           <a:bodyPr wrap="square" lIns="0" tIns="0" rIns="0" bIns="0" rtlCol="0" anchor="ctr"/>
           <a:lstStyle/>
           <a:p>
-            <a:pPr indent="0" marL="0">
+            <a:pPr marL="0" indent="0">
               <a:buNone/>
             </a:pPr>
             <a:r>
@@ -3532,7 +3343,7 @@
           <a:bodyPr wrap="square" lIns="0" tIns="0" rIns="0" bIns="0" rtlCol="0" anchor="ctr"/>
           <a:lstStyle/>
           <a:p>
-            <a:pPr indent="0" marL="0">
+            <a:pPr marL="0" indent="0">
               <a:buNone/>
             </a:pPr>
             <a:r>
@@ -3568,7 +3379,7 @@
           <a:bodyPr wrap="square" lIns="0" tIns="0" rIns="0" bIns="0" rtlCol="0" anchor="ctr"/>
           <a:lstStyle/>
           <a:p>
-            <a:pPr indent="0" marL="0">
+            <a:pPr marL="0" indent="0">
               <a:buNone/>
             </a:pPr>
             <a:r>
@@ -3604,7 +3415,7 @@
           <a:bodyPr wrap="square" lIns="0" tIns="0" rIns="0" bIns="0" rtlCol="0" anchor="ctr"/>
           <a:lstStyle/>
           <a:p>
-            <a:pPr indent="0" marL="0">
+            <a:pPr marL="0" indent="0">
               <a:buNone/>
             </a:pPr>
             <a:r>
@@ -3642,7 +3453,7 @@
           </a:bodyPr>
           <a:lstStyle/>
           <a:p>
-            <a:pPr indent="0" marL="0">
+            <a:pPr marL="0" indent="0">
               <a:buNone/>
             </a:pPr>
             <a:r>
@@ -3678,7 +3489,7 @@
           <a:bodyPr wrap="square" lIns="0" tIns="0" rIns="0" bIns="0" rtlCol="0" anchor="ctr"/>
           <a:lstStyle/>
           <a:p>
-            <a:pPr algn="ctr" indent="0" marL="0">
+            <a:pPr marL="0" indent="0" algn="ctr">
               <a:buNone/>
             </a:pPr>
             <a:r>
@@ -3713,7 +3524,7 @@
           </a:prstGeom>
           <a:extLst>
             <a:ext uri="{C572A759-6A51-4108-AA02-DFA0A04FC94B}">
-              <ma14:wrappingTextBoxFlag xmlns:ma14="http://schemas.microsoft.com/office/mac/drawingml/2011/main" val="0"/>
+              <ma14:wrappingTextBoxFlag xmlns:ma14="http://schemas.microsoft.com/office/mac/drawingml/2011/main" xmlns="" val="0"/>
             </a:ext>
           </a:extLst>
         </p:spPr>
@@ -3734,7 +3545,7 @@
           <a:p>
             <a:pPr algn="r"/>
             <a:fld id="{F7021451-1387-4CA6-816F-3879F97B5CBC}" type="slidenum">
-              <a:rPr b="0" lang="en-US"/>
+              <a:rPr lang="en-US" b="0"/>
               <a:t>10</a:t>
             </a:fld>
             <a:endParaRPr lang="en-US"/>
@@ -3787,7 +3598,7 @@
           <a:bodyPr wrap="square" lIns="0" tIns="0" rIns="0" bIns="0" rtlCol="0" anchor="ctr"/>
           <a:lstStyle/>
           <a:p>
-            <a:pPr indent="0" marL="0">
+            <a:pPr marL="0" indent="0">
               <a:buNone/>
             </a:pPr>
             <a:r>
@@ -3826,7 +3637,7 @@
           <a:bodyPr wrap="square" lIns="0" tIns="0" rIns="0" bIns="0" rtlCol="0" anchor="ctr"/>
           <a:lstStyle/>
           <a:p>
-            <a:pPr algn="r" indent="0" marL="0">
+            <a:pPr marL="0" indent="0" algn="r">
               <a:buNone/>
             </a:pPr>
             <a:r>
@@ -3864,7 +3675,7 @@
           </a:bodyPr>
           <a:lstStyle/>
           <a:p>
-            <a:pPr indent="0" marL="0">
+            <a:pPr marL="0" indent="0">
               <a:buNone/>
             </a:pPr>
             <a:r>
@@ -3900,7 +3711,7 @@
           <a:bodyPr wrap="square" lIns="0" tIns="0" rIns="0" bIns="0" rtlCol="0" anchor="ctr"/>
           <a:lstStyle/>
           <a:p>
-            <a:pPr algn="r" indent="0" marL="0">
+            <a:pPr marL="0" indent="0" algn="r">
               <a:buNone/>
             </a:pPr>
             <a:r>
@@ -3938,7 +3749,7 @@
           </a:bodyPr>
           <a:lstStyle/>
           <a:p>
-            <a:pPr indent="0" marL="0">
+            <a:pPr marL="0" indent="0">
               <a:buNone/>
             </a:pPr>
             <a:r>
@@ -3974,7 +3785,7 @@
           <a:bodyPr wrap="square" lIns="0" tIns="0" rIns="0" bIns="0" rtlCol="0" anchor="ctr"/>
           <a:lstStyle/>
           <a:p>
-            <a:pPr algn="r" indent="0" marL="0">
+            <a:pPr marL="0" indent="0" algn="r">
               <a:buNone/>
             </a:pPr>
             <a:r>
@@ -4012,7 +3823,7 @@
           </a:bodyPr>
           <a:lstStyle/>
           <a:p>
-            <a:pPr indent="0" marL="0">
+            <a:pPr marL="0" indent="0">
               <a:buNone/>
             </a:pPr>
             <a:r>
@@ -4049,6 +3860,13 @@
             <a:prstDash val="solid"/>
           </a:ln>
         </p:spPr>
+        <p:txBody>
+          <a:bodyPr/>
+          <a:lstStyle/>
+          <a:p>
+            <a:endParaRPr lang="en-US"/>
+          </a:p>
+        </p:txBody>
       </p:sp>
       <p:sp>
         <p:nvSpPr>
@@ -4071,7 +3889,7 @@
           <a:bodyPr wrap="square" lIns="0" tIns="0" rIns="0" bIns="0" rtlCol="0" anchor="ctr"/>
           <a:lstStyle/>
           <a:p>
-            <a:pPr indent="0" marL="0">
+            <a:pPr marL="0" indent="0">
               <a:buNone/>
             </a:pPr>
             <a:r>
@@ -4107,7 +3925,7 @@
           <a:bodyPr wrap="square" lIns="0" tIns="0" rIns="0" bIns="0" rtlCol="0" anchor="ctr"/>
           <a:lstStyle/>
           <a:p>
-            <a:pPr indent="0" marL="0">
+            <a:pPr marL="0" indent="0">
               <a:buNone/>
             </a:pPr>
             <a:r>
@@ -4142,7 +3960,7 @@
           </a:prstGeom>
           <a:extLst>
             <a:ext uri="{C572A759-6A51-4108-AA02-DFA0A04FC94B}">
-              <ma14:wrappingTextBoxFlag xmlns:ma14="http://schemas.microsoft.com/office/mac/drawingml/2011/main" val="0"/>
+              <ma14:wrappingTextBoxFlag xmlns:ma14="http://schemas.microsoft.com/office/mac/drawingml/2011/main" xmlns="" val="0"/>
             </a:ext>
           </a:extLst>
         </p:spPr>
@@ -4163,7 +3981,7 @@
           <a:p>
             <a:pPr algn="r"/>
             <a:fld id="{F7021451-1387-4CA6-816F-3879F97B5CBC}" type="slidenum">
-              <a:rPr b="0" lang="en-US"/>
+              <a:rPr lang="en-US" b="0"/>
               <a:t>11</a:t>
             </a:fld>
             <a:endParaRPr lang="en-US"/>
@@ -4216,7 +4034,7 @@
           <a:bodyPr wrap="square" lIns="0" tIns="0" rIns="0" bIns="0" rtlCol="0" anchor="ctr"/>
           <a:lstStyle/>
           <a:p>
-            <a:pPr indent="0" marL="0">
+            <a:pPr marL="0" indent="0">
               <a:buNone/>
             </a:pPr>
             <a:r>
@@ -4255,7 +4073,7 @@
           <a:bodyPr wrap="square" lIns="0" tIns="0" rIns="0" bIns="0" rtlCol="0" anchor="ctr"/>
           <a:lstStyle/>
           <a:p>
-            <a:pPr algn="ctr" indent="0" marL="0">
+            <a:pPr marL="0" indent="0" algn="ctr">
               <a:buNone/>
             </a:pPr>
             <a:r>
@@ -4294,6 +4112,13 @@
             <a:tailEnd type="triangle"/>
           </a:ln>
         </p:spPr>
+        <p:txBody>
+          <a:bodyPr/>
+          <a:lstStyle/>
+          <a:p>
+            <a:endParaRPr lang="en-US"/>
+          </a:p>
+        </p:txBody>
       </p:sp>
       <p:sp>
         <p:nvSpPr>
@@ -4316,7 +4141,7 @@
           <a:bodyPr wrap="square" lIns="0" tIns="0" rIns="0" bIns="0" rtlCol="0" anchor="ctr"/>
           <a:lstStyle/>
           <a:p>
-            <a:pPr algn="ctr" indent="0" marL="0">
+            <a:pPr marL="0" indent="0" algn="ctr">
               <a:buNone/>
             </a:pPr>
             <a:r>
@@ -4354,7 +4179,7 @@
           </a:bodyPr>
           <a:lstStyle/>
           <a:p>
-            <a:pPr algn="ctr" indent="0" marL="0">
+            <a:pPr marL="0" indent="0" algn="ctr">
               <a:buNone/>
             </a:pPr>
             <a:r>
@@ -4389,7 +4214,7 @@
           </a:prstGeom>
           <a:extLst>
             <a:ext uri="{C572A759-6A51-4108-AA02-DFA0A04FC94B}">
-              <ma14:wrappingTextBoxFlag xmlns:ma14="http://schemas.microsoft.com/office/mac/drawingml/2011/main" val="0"/>
+              <ma14:wrappingTextBoxFlag xmlns:ma14="http://schemas.microsoft.com/office/mac/drawingml/2011/main" xmlns="" val="0"/>
             </a:ext>
           </a:extLst>
         </p:spPr>
@@ -4410,7 +4235,7 @@
           <a:p>
             <a:pPr algn="r"/>
             <a:fld id="{F7021451-1387-4CA6-816F-3879F97B5CBC}" type="slidenum">
-              <a:rPr b="0" lang="en-US"/>
+              <a:rPr lang="en-US" b="0"/>
               <a:t>12</a:t>
             </a:fld>
             <a:endParaRPr lang="en-US"/>
@@ -4463,7 +4288,7 @@
           <a:bodyPr wrap="square" lIns="0" tIns="0" rIns="0" bIns="0" rtlCol="0" anchor="ctr"/>
           <a:lstStyle/>
           <a:p>
-            <a:pPr indent="0" marL="0">
+            <a:pPr marL="0" indent="0">
               <a:buNone/>
             </a:pPr>
             <a:r>
@@ -4502,11 +4327,11 @@
           <a:bodyPr wrap="square" lIns="0" tIns="0" rIns="0" bIns="0" rtlCol="0" anchor="ctr"/>
           <a:lstStyle/>
           <a:p>
-            <a:pPr indent="0" marL="0">
+            <a:pPr marL="0" indent="0">
               <a:buNone/>
             </a:pPr>
             <a:r>
-              <a:rPr lang="en-US" sz="1000" b="1" spc="120" kern="0" dirty="0">
+              <a:rPr lang="en-US" sz="1000" b="1" kern="0" spc="120" dirty="0">
                 <a:solidFill>
                   <a:srgbClr val="E5A823"/>
                 </a:solidFill>
@@ -4541,6 +4366,13 @@
             <a:prstDash val="solid"/>
           </a:ln>
         </p:spPr>
+        <p:txBody>
+          <a:bodyPr/>
+          <a:lstStyle/>
+          <a:p>
+            <a:endParaRPr lang="en-US"/>
+          </a:p>
+        </p:txBody>
       </p:sp>
       <p:sp>
         <p:nvSpPr>
@@ -4563,7 +4395,7 @@
           <a:bodyPr wrap="square" lIns="0" tIns="0" rIns="0" bIns="0" rtlCol="0" anchor="ctr"/>
           <a:lstStyle/>
           <a:p>
-            <a:pPr algn="ctr" indent="0" marL="0">
+            <a:pPr marL="0" indent="0" algn="ctr">
               <a:buNone/>
             </a:pPr>
             <a:r>
@@ -4599,7 +4431,7 @@
           <a:bodyPr wrap="square" lIns="0" tIns="0" rIns="0" bIns="0" rtlCol="0" anchor="ctr"/>
           <a:lstStyle/>
           <a:p>
-            <a:pPr algn="ctr" indent="0" marL="0">
+            <a:pPr marL="0" indent="0" algn="ctr">
               <a:buNone/>
             </a:pPr>
             <a:r>
@@ -4638,6 +4470,13 @@
             <a:prstDash val="solid"/>
           </a:ln>
         </p:spPr>
+        <p:txBody>
+          <a:bodyPr/>
+          <a:lstStyle/>
+          <a:p>
+            <a:endParaRPr lang="en-US"/>
+          </a:p>
+        </p:txBody>
       </p:sp>
       <p:sp>
         <p:nvSpPr>
@@ -4660,7 +4499,7 @@
           <a:bodyPr wrap="square" lIns="0" tIns="0" rIns="0" bIns="0" rtlCol="0" anchor="ctr"/>
           <a:lstStyle/>
           <a:p>
-            <a:pPr algn="ctr" indent="0" marL="0">
+            <a:pPr marL="0" indent="0" algn="ctr">
               <a:buNone/>
             </a:pPr>
             <a:r>
@@ -4696,7 +4535,7 @@
           <a:bodyPr wrap="square" lIns="0" tIns="0" rIns="0" bIns="0" rtlCol="0" anchor="ctr"/>
           <a:lstStyle/>
           <a:p>
-            <a:pPr algn="ctr" indent="0" marL="0">
+            <a:pPr marL="0" indent="0" algn="ctr">
               <a:buNone/>
             </a:pPr>
             <a:r>
@@ -4735,6 +4574,13 @@
             <a:prstDash val="solid"/>
           </a:ln>
         </p:spPr>
+        <p:txBody>
+          <a:bodyPr/>
+          <a:lstStyle/>
+          <a:p>
+            <a:endParaRPr lang="en-US"/>
+          </a:p>
+        </p:txBody>
       </p:sp>
       <p:sp>
         <p:nvSpPr>
@@ -4757,7 +4603,7 @@
           <a:bodyPr wrap="square" lIns="0" tIns="0" rIns="0" bIns="0" rtlCol="0" anchor="ctr"/>
           <a:lstStyle/>
           <a:p>
-            <a:pPr algn="ctr" indent="0" marL="0">
+            <a:pPr marL="0" indent="0" algn="ctr">
               <a:buNone/>
             </a:pPr>
             <a:r>
@@ -4793,7 +4639,7 @@
           <a:bodyPr wrap="square" lIns="0" tIns="0" rIns="0" bIns="0" rtlCol="0" anchor="ctr"/>
           <a:lstStyle/>
           <a:p>
-            <a:pPr algn="ctr" indent="0" marL="0">
+            <a:pPr marL="0" indent="0" algn="ctr">
               <a:buNone/>
             </a:pPr>
             <a:r>
@@ -4832,6 +4678,13 @@
             <a:prstDash val="solid"/>
           </a:ln>
         </p:spPr>
+        <p:txBody>
+          <a:bodyPr/>
+          <a:lstStyle/>
+          <a:p>
+            <a:endParaRPr lang="en-US"/>
+          </a:p>
+        </p:txBody>
       </p:sp>
       <p:sp>
         <p:nvSpPr>
@@ -4854,7 +4707,7 @@
           <a:bodyPr wrap="square" lIns="0" tIns="0" rIns="0" bIns="0" rtlCol="0" anchor="ctr"/>
           <a:lstStyle/>
           <a:p>
-            <a:pPr algn="ctr" indent="0" marL="0">
+            <a:pPr marL="0" indent="0" algn="ctr">
               <a:buNone/>
             </a:pPr>
             <a:r>
@@ -4890,7 +4743,7 @@
           <a:bodyPr wrap="square" lIns="0" tIns="0" rIns="0" bIns="0" rtlCol="0" anchor="ctr"/>
           <a:lstStyle/>
           <a:p>
-            <a:pPr algn="ctr" indent="0" marL="0">
+            <a:pPr marL="0" indent="0" algn="ctr">
               <a:buNone/>
             </a:pPr>
             <a:r>
@@ -4929,6 +4782,13 @@
             <a:prstDash val="solid"/>
           </a:ln>
         </p:spPr>
+        <p:txBody>
+          <a:bodyPr/>
+          <a:lstStyle/>
+          <a:p>
+            <a:endParaRPr lang="en-US"/>
+          </a:p>
+        </p:txBody>
       </p:sp>
       <p:sp>
         <p:nvSpPr>
@@ -4951,7 +4811,7 @@
           <a:bodyPr wrap="square" lIns="0" tIns="0" rIns="0" bIns="0" rtlCol="0" anchor="ctr"/>
           <a:lstStyle/>
           <a:p>
-            <a:pPr algn="ctr" indent="0" marL="0">
+            <a:pPr marL="0" indent="0" algn="ctr">
               <a:buNone/>
             </a:pPr>
             <a:r>
@@ -4987,7 +4847,7 @@
           <a:bodyPr wrap="square" lIns="0" tIns="0" rIns="0" bIns="0" rtlCol="0" anchor="ctr"/>
           <a:lstStyle/>
           <a:p>
-            <a:pPr algn="ctr" indent="0" marL="0">
+            <a:pPr marL="0" indent="0" algn="ctr">
               <a:buNone/>
             </a:pPr>
             <a:r>
@@ -5026,6 +4886,13 @@
             <a:prstDash val="solid"/>
           </a:ln>
         </p:spPr>
+        <p:txBody>
+          <a:bodyPr/>
+          <a:lstStyle/>
+          <a:p>
+            <a:endParaRPr lang="en-US"/>
+          </a:p>
+        </p:txBody>
       </p:sp>
       <p:sp>
         <p:nvSpPr>
@@ -5048,7 +4915,7 @@
           <a:bodyPr wrap="square" lIns="0" tIns="0" rIns="0" bIns="0" rtlCol="0" anchor="ctr"/>
           <a:lstStyle/>
           <a:p>
-            <a:pPr algn="ctr" indent="0" marL="0">
+            <a:pPr marL="0" indent="0" algn="ctr">
               <a:buNone/>
             </a:pPr>
             <a:r>
@@ -5084,7 +4951,7 @@
           <a:bodyPr wrap="square" lIns="0" tIns="0" rIns="0" bIns="0" rtlCol="0" anchor="ctr"/>
           <a:lstStyle/>
           <a:p>
-            <a:pPr algn="ctr" indent="0" marL="0">
+            <a:pPr marL="0" indent="0" algn="ctr">
               <a:buNone/>
             </a:pPr>
             <a:r>
@@ -5123,6 +4990,13 @@
             <a:prstDash val="solid"/>
           </a:ln>
         </p:spPr>
+        <p:txBody>
+          <a:bodyPr/>
+          <a:lstStyle/>
+          <a:p>
+            <a:endParaRPr lang="en-US"/>
+          </a:p>
+        </p:txBody>
       </p:sp>
       <p:sp>
         <p:nvSpPr>
@@ -5145,7 +5019,7 @@
           <a:bodyPr wrap="square" lIns="0" tIns="0" rIns="0" bIns="0" rtlCol="0" anchor="ctr"/>
           <a:lstStyle/>
           <a:p>
-            <a:pPr algn="ctr" indent="0" marL="0">
+            <a:pPr marL="0" indent="0" algn="ctr">
               <a:buNone/>
             </a:pPr>
             <a:r>
@@ -5181,7 +5055,7 @@
           <a:bodyPr wrap="square" lIns="0" tIns="0" rIns="0" bIns="0" rtlCol="0" anchor="ctr"/>
           <a:lstStyle/>
           <a:p>
-            <a:pPr algn="ctr" indent="0" marL="0">
+            <a:pPr marL="0" indent="0" algn="ctr">
               <a:buNone/>
             </a:pPr>
             <a:r>
@@ -5220,6 +5094,13 @@
             <a:prstDash val="solid"/>
           </a:ln>
         </p:spPr>
+        <p:txBody>
+          <a:bodyPr/>
+          <a:lstStyle/>
+          <a:p>
+            <a:endParaRPr lang="en-US"/>
+          </a:p>
+        </p:txBody>
       </p:sp>
       <p:sp>
         <p:nvSpPr>
@@ -5242,7 +5123,7 @@
           <a:bodyPr wrap="square" lIns="0" tIns="0" rIns="0" bIns="0" rtlCol="0" anchor="ctr"/>
           <a:lstStyle/>
           <a:p>
-            <a:pPr algn="ctr" indent="0" marL="0">
+            <a:pPr marL="0" indent="0" algn="ctr">
               <a:buNone/>
             </a:pPr>
             <a:r>
@@ -5278,7 +5159,7 @@
           <a:bodyPr wrap="square" lIns="0" tIns="0" rIns="0" bIns="0" rtlCol="0" anchor="ctr"/>
           <a:lstStyle/>
           <a:p>
-            <a:pPr algn="ctr" indent="0" marL="0">
+            <a:pPr marL="0" indent="0" algn="ctr">
               <a:buNone/>
             </a:pPr>
             <a:r>
@@ -5317,6 +5198,13 @@
             <a:prstDash val="solid"/>
           </a:ln>
         </p:spPr>
+        <p:txBody>
+          <a:bodyPr/>
+          <a:lstStyle/>
+          <a:p>
+            <a:endParaRPr lang="en-US"/>
+          </a:p>
+        </p:txBody>
       </p:sp>
       <p:sp>
         <p:nvSpPr>
@@ -5339,7 +5227,7 @@
           <a:bodyPr wrap="square" lIns="0" tIns="0" rIns="0" bIns="0" rtlCol="0" anchor="ctr"/>
           <a:lstStyle/>
           <a:p>
-            <a:pPr algn="ctr" indent="0" marL="0">
+            <a:pPr marL="0" indent="0" algn="ctr">
               <a:buNone/>
             </a:pPr>
             <a:r>
@@ -5375,7 +5263,7 @@
           <a:bodyPr wrap="square" lIns="0" tIns="0" rIns="0" bIns="0" rtlCol="0" anchor="ctr"/>
           <a:lstStyle/>
           <a:p>
-            <a:pPr algn="ctr" indent="0" marL="0">
+            <a:pPr marL="0" indent="0" algn="ctr">
               <a:buNone/>
             </a:pPr>
             <a:r>
@@ -5411,7 +5299,7 @@
           <a:bodyPr wrap="square" lIns="0" tIns="0" rIns="0" bIns="0" rtlCol="0" anchor="ctr"/>
           <a:lstStyle/>
           <a:p>
-            <a:pPr algn="ctr" indent="0" marL="0">
+            <a:pPr marL="0" indent="0" algn="ctr">
               <a:buNone/>
             </a:pPr>
             <a:r>
@@ -5428,7 +5316,7 @@
       </p:sp>
       <p:sp>
         <p:nvSpPr>
-          <p:cNvPr id="25" name="Slide Number Placeholder 0"/>
+          <p:cNvPr id="32" name="Slide Number Placeholder 0"/>
           <p:cNvSpPr>
             <a:spLocks noGrp="1"/>
           </p:cNvSpPr>
@@ -5446,7 +5334,7 @@
           </a:prstGeom>
           <a:extLst>
             <a:ext uri="{C572A759-6A51-4108-AA02-DFA0A04FC94B}">
-              <ma14:wrappingTextBoxFlag xmlns:ma14="http://schemas.microsoft.com/office/mac/drawingml/2011/main" val="0"/>
+              <ma14:wrappingTextBoxFlag xmlns:ma14="http://schemas.microsoft.com/office/mac/drawingml/2011/main" xmlns="" val="0"/>
             </a:ext>
           </a:extLst>
         </p:spPr>
@@ -5467,7 +5355,7 @@
           <a:p>
             <a:pPr algn="r"/>
             <a:fld id="{F7021451-1387-4CA6-816F-3879F97B5CBC}" type="slidenum">
-              <a:rPr b="0" lang="en-US"/>
+              <a:rPr lang="en-US" b="0"/>
               <a:t>13</a:t>
             </a:fld>
             <a:endParaRPr lang="en-US"/>
@@ -5520,7 +5408,7 @@
           <a:bodyPr wrap="square" lIns="0" tIns="0" rIns="0" bIns="0" rtlCol="0" anchor="ctr"/>
           <a:lstStyle/>
           <a:p>
-            <a:pPr indent="0" marL="0">
+            <a:pPr marL="0" indent="0">
               <a:buNone/>
             </a:pPr>
             <a:r>
@@ -5554,16 +5442,34 @@
         </p:nvGraphicFramePr>
         <p:xfrm>
           <a:off x="502920" y="1234440"/>
-          <a:ext cx="11155680" cy="4434840"/>
+          <a:ext cx="11155680" cy="4297680"/>
         </p:xfrm>
         <a:graphic>
           <a:graphicData uri="http://schemas.openxmlformats.org/drawingml/2006/table">
             <a:tbl>
               <a:tblPr/>
               <a:tblGrid>
-                <a:gridCol w="2057400"/>
-                <a:gridCol w="4800600"/>
-                <a:gridCol w="4297680"/>
+                <a:gridCol w="2057400">
+                  <a:extLst>
+                    <a:ext uri="{9D8B030D-6E8A-4147-A177-3AD203B41FA5}">
+                      <a16:colId xmlns:a16="http://schemas.microsoft.com/office/drawing/2014/main" val="20000"/>
+                    </a:ext>
+                  </a:extLst>
+                </a:gridCol>
+                <a:gridCol w="4800600">
+                  <a:extLst>
+                    <a:ext uri="{9D8B030D-6E8A-4147-A177-3AD203B41FA5}">
+                      <a16:colId xmlns:a16="http://schemas.microsoft.com/office/drawing/2014/main" val="20001"/>
+                    </a:ext>
+                  </a:extLst>
+                </a:gridCol>
+                <a:gridCol w="4297680">
+                  <a:extLst>
+                    <a:ext uri="{9D8B030D-6E8A-4147-A177-3AD203B41FA5}">
+                      <a16:colId xmlns:a16="http://schemas.microsoft.com/office/drawing/2014/main" val="20002"/>
+                    </a:ext>
+                  </a:extLst>
+                </a:gridCol>
               </a:tblGrid>
               <a:tr h="594360">
                 <a:tc>
@@ -5571,7 +5477,7 @@
                     <a:bodyPr/>
                     <a:lstStyle/>
                     <a:p>
-                      <a:pPr indent="0" marL="0">
+                      <a:pPr marL="0" indent="0">
                         <a:buNone/>
                       </a:pPr>
                       <a:endParaRPr lang="en-US" sz="1500" dirty="0">
@@ -5581,7 +5487,7 @@
                       </a:endParaRPr>
                     </a:p>
                   </a:txBody>
-                  <a:tcPr marL="109728" marR="109728" marT="109728" marB="109728" anchor="mid">
+                  <a:tcPr marL="109728" marR="109728" marT="109728" marB="109728">
                     <a:lnL w="8890" cap="flat" cmpd="sng" algn="ctr">
                       <a:solidFill>
                         <a:srgbClr val="607378"/>
@@ -5628,7 +5534,7 @@
                     <a:bodyPr/>
                     <a:lstStyle/>
                     <a:p>
-                      <a:pPr indent="0" marL="0">
+                      <a:pPr marL="0" indent="0">
                         <a:buNone/>
                       </a:pPr>
                       <a:r>
@@ -5649,7 +5555,7 @@
                       </a:endParaRPr>
                     </a:p>
                   </a:txBody>
-                  <a:tcPr marL="109728" marR="109728" marT="109728" marB="109728" anchor="mid">
+                  <a:tcPr marL="109728" marR="109728" marT="109728" marB="109728">
                     <a:lnL w="8890" cap="flat" cmpd="sng" algn="ctr">
                       <a:solidFill>
                         <a:srgbClr val="607378"/>
@@ -5696,7 +5602,7 @@
                     <a:bodyPr/>
                     <a:lstStyle/>
                     <a:p>
-                      <a:pPr indent="0" marL="0">
+                      <a:pPr marL="0" indent="0">
                         <a:buNone/>
                       </a:pPr>
                       <a:r>
@@ -5717,7 +5623,7 @@
                       </a:endParaRPr>
                     </a:p>
                   </a:txBody>
-                  <a:tcPr marL="109728" marR="109728" marT="109728" marB="109728" anchor="mid">
+                  <a:tcPr marL="109728" marR="109728" marT="109728" marB="109728">
                     <a:lnL w="8890" cap="flat" cmpd="sng" algn="ctr">
                       <a:solidFill>
                         <a:srgbClr val="607378"/>
@@ -5759,6 +5665,11 @@
                     </a:solidFill>
                   </a:tcPr>
                 </a:tc>
+                <a:extLst>
+                  <a:ext uri="{0D108BD9-81ED-4DB2-BD59-A6C34878D82A}">
+                    <a16:rowId xmlns:a16="http://schemas.microsoft.com/office/drawing/2014/main" val="10000"/>
+                  </a:ext>
+                </a:extLst>
               </a:tr>
               <a:tr h="1234440">
                 <a:tc>
@@ -5766,7 +5677,7 @@
                     <a:bodyPr/>
                     <a:lstStyle/>
                     <a:p>
-                      <a:pPr indent="0" marL="0">
+                      <a:pPr marL="0" indent="0">
                         <a:buNone/>
                       </a:pPr>
                       <a:r>
@@ -5787,7 +5698,7 @@
                       </a:endParaRPr>
                     </a:p>
                   </a:txBody>
-                  <a:tcPr marL="109728" marR="109728" marT="109728" marB="109728" anchor="mid">
+                  <a:tcPr marL="109728" marR="109728" marT="109728" marB="109728">
                     <a:lnL w="8890" cap="flat" cmpd="sng" algn="ctr">
                       <a:solidFill>
                         <a:srgbClr val="607378"/>
@@ -5834,7 +5745,7 @@
                     <a:bodyPr/>
                     <a:lstStyle/>
                     <a:p>
-                      <a:pPr indent="0" marL="0">
+                      <a:pPr marL="0" indent="0">
                         <a:buNone/>
                       </a:pPr>
                       <a:r>
@@ -5855,7 +5766,7 @@
                       </a:endParaRPr>
                     </a:p>
                   </a:txBody>
-                  <a:tcPr marL="109728" marR="109728" marT="109728" marB="109728" anchor="mid">
+                  <a:tcPr marL="109728" marR="109728" marT="109728" marB="109728">
                     <a:lnL w="8890" cap="flat" cmpd="sng" algn="ctr">
                       <a:solidFill>
                         <a:srgbClr val="607378"/>
@@ -5902,7 +5813,7 @@
                     <a:bodyPr/>
                     <a:lstStyle/>
                     <a:p>
-                      <a:pPr indent="0" marL="0">
+                      <a:pPr marL="0" indent="0">
                         <a:buNone/>
                       </a:pPr>
                       <a:r>
@@ -5923,7 +5834,7 @@
                       </a:endParaRPr>
                     </a:p>
                   </a:txBody>
-                  <a:tcPr marL="109728" marR="109728" marT="109728" marB="109728" anchor="mid">
+                  <a:tcPr marL="109728" marR="109728" marT="109728" marB="109728">
                     <a:lnL w="8890" cap="flat" cmpd="sng" algn="ctr">
                       <a:solidFill>
                         <a:srgbClr val="607378"/>
@@ -5965,6 +5876,11 @@
                     </a:solidFill>
                   </a:tcPr>
                 </a:tc>
+                <a:extLst>
+                  <a:ext uri="{0D108BD9-81ED-4DB2-BD59-A6C34878D82A}">
+                    <a16:rowId xmlns:a16="http://schemas.microsoft.com/office/drawing/2014/main" val="10001"/>
+                  </a:ext>
+                </a:extLst>
               </a:tr>
               <a:tr h="1234440">
                 <a:tc>
@@ -5972,7 +5888,7 @@
                     <a:bodyPr/>
                     <a:lstStyle/>
                     <a:p>
-                      <a:pPr indent="0" marL="0">
+                      <a:pPr marL="0" indent="0">
                         <a:buNone/>
                       </a:pPr>
                       <a:r>
@@ -5993,7 +5909,7 @@
                       </a:endParaRPr>
                     </a:p>
                   </a:txBody>
-                  <a:tcPr marL="109728" marR="109728" marT="109728" marB="109728" anchor="mid">
+                  <a:tcPr marL="109728" marR="109728" marT="109728" marB="109728">
                     <a:lnL w="8890" cap="flat" cmpd="sng" algn="ctr">
                       <a:solidFill>
                         <a:srgbClr val="607378"/>
@@ -6040,7 +5956,7 @@
                     <a:bodyPr/>
                     <a:lstStyle/>
                     <a:p>
-                      <a:pPr indent="0" marL="0">
+                      <a:pPr marL="0" indent="0">
                         <a:buNone/>
                       </a:pPr>
                       <a:r>
@@ -6061,7 +5977,7 @@
                       </a:endParaRPr>
                     </a:p>
                   </a:txBody>
-                  <a:tcPr marL="109728" marR="109728" marT="109728" marB="109728" anchor="mid">
+                  <a:tcPr marL="109728" marR="109728" marT="109728" marB="109728">
                     <a:lnL w="8890" cap="flat" cmpd="sng" algn="ctr">
                       <a:solidFill>
                         <a:srgbClr val="607378"/>
@@ -6108,7 +6024,7 @@
                     <a:bodyPr/>
                     <a:lstStyle/>
                     <a:p>
-                      <a:pPr indent="0" marL="0">
+                      <a:pPr marL="0" indent="0">
                         <a:buNone/>
                       </a:pPr>
                       <a:r>
@@ -6129,7 +6045,7 @@
                       </a:endParaRPr>
                     </a:p>
                   </a:txBody>
-                  <a:tcPr marL="109728" marR="109728" marT="109728" marB="109728" anchor="mid">
+                  <a:tcPr marL="109728" marR="109728" marT="109728" marB="109728">
                     <a:lnL w="8890" cap="flat" cmpd="sng" algn="ctr">
                       <a:solidFill>
                         <a:srgbClr val="607378"/>
@@ -6171,6 +6087,11 @@
                     </a:solidFill>
                   </a:tcPr>
                 </a:tc>
+                <a:extLst>
+                  <a:ext uri="{0D108BD9-81ED-4DB2-BD59-A6C34878D82A}">
+                    <a16:rowId xmlns:a16="http://schemas.microsoft.com/office/drawing/2014/main" val="10002"/>
+                  </a:ext>
+                </a:extLst>
               </a:tr>
               <a:tr h="1234440">
                 <a:tc>
@@ -6178,7 +6099,7 @@
                     <a:bodyPr/>
                     <a:lstStyle/>
                     <a:p>
-                      <a:pPr indent="0" marL="0">
+                      <a:pPr marL="0" indent="0">
                         <a:buNone/>
                       </a:pPr>
                       <a:r>
@@ -6199,7 +6120,7 @@
                       </a:endParaRPr>
                     </a:p>
                   </a:txBody>
-                  <a:tcPr marL="109728" marR="109728" marT="109728" marB="109728" anchor="mid">
+                  <a:tcPr marL="109728" marR="109728" marT="109728" marB="109728">
                     <a:lnL w="8890" cap="flat" cmpd="sng" algn="ctr">
                       <a:solidFill>
                         <a:srgbClr val="607378"/>
@@ -6246,7 +6167,7 @@
                     <a:bodyPr/>
                     <a:lstStyle/>
                     <a:p>
-                      <a:pPr indent="0" marL="0">
+                      <a:pPr marL="0" indent="0">
                         <a:buNone/>
                       </a:pPr>
                       <a:r>
@@ -6267,7 +6188,7 @@
                       </a:endParaRPr>
                     </a:p>
                   </a:txBody>
-                  <a:tcPr marL="109728" marR="109728" marT="109728" marB="109728" anchor="mid">
+                  <a:tcPr marL="109728" marR="109728" marT="109728" marB="109728">
                     <a:lnL w="8890" cap="flat" cmpd="sng" algn="ctr">
                       <a:solidFill>
                         <a:srgbClr val="607378"/>
@@ -6314,7 +6235,7 @@
                     <a:bodyPr/>
                     <a:lstStyle/>
                     <a:p>
-                      <a:pPr indent="0" marL="0">
+                      <a:pPr marL="0" indent="0">
                         <a:buNone/>
                       </a:pPr>
                       <a:r>
@@ -6335,7 +6256,7 @@
                       </a:endParaRPr>
                     </a:p>
                   </a:txBody>
-                  <a:tcPr marL="109728" marR="109728" marT="109728" marB="109728" anchor="mid">
+                  <a:tcPr marL="109728" marR="109728" marT="109728" marB="109728">
                     <a:lnL w="8890" cap="flat" cmpd="sng" algn="ctr">
                       <a:solidFill>
                         <a:srgbClr val="607378"/>
@@ -6377,6 +6298,11 @@
                     </a:solidFill>
                   </a:tcPr>
                 </a:tc>
+                <a:extLst>
+                  <a:ext uri="{0D108BD9-81ED-4DB2-BD59-A6C34878D82A}">
+                    <a16:rowId xmlns:a16="http://schemas.microsoft.com/office/drawing/2014/main" val="10003"/>
+                  </a:ext>
+                </a:extLst>
               </a:tr>
             </a:tbl>
           </a:graphicData>
@@ -6403,7 +6329,7 @@
           <a:bodyPr wrap="square" lIns="0" tIns="0" rIns="0" bIns="0" rtlCol="0" anchor="ctr"/>
           <a:lstStyle/>
           <a:p>
-            <a:pPr algn="ctr" indent="0" marL="0">
+            <a:pPr marL="0" indent="0" algn="ctr">
               <a:buNone/>
             </a:pPr>
             <a:r>
@@ -6438,7 +6364,7 @@
           </a:prstGeom>
           <a:extLst>
             <a:ext uri="{C572A759-6A51-4108-AA02-DFA0A04FC94B}">
-              <ma14:wrappingTextBoxFlag xmlns:ma14="http://schemas.microsoft.com/office/mac/drawingml/2011/main" val="0"/>
+              <ma14:wrappingTextBoxFlag xmlns:ma14="http://schemas.microsoft.com/office/mac/drawingml/2011/main" xmlns="" val="0"/>
             </a:ext>
           </a:extLst>
         </p:spPr>
@@ -6459,7 +6385,7 @@
           <a:p>
             <a:pPr algn="r"/>
             <a:fld id="{F7021451-1387-4CA6-816F-3879F97B5CBC}" type="slidenum">
-              <a:rPr b="0" lang="en-US"/>
+              <a:rPr lang="en-US" b="0"/>
               <a:t>14</a:t>
             </a:fld>
             <a:endParaRPr lang="en-US"/>
@@ -6512,7 +6438,7 @@
           <a:bodyPr wrap="square" lIns="0" tIns="0" rIns="0" bIns="0" rtlCol="0" anchor="ctr"/>
           <a:lstStyle/>
           <a:p>
-            <a:pPr indent="0" marL="0">
+            <a:pPr marL="0" indent="0">
               <a:buNone/>
             </a:pPr>
             <a:r>
@@ -6551,7 +6477,7 @@
           <a:bodyPr wrap="square" lIns="0" tIns="0" rIns="0" bIns="0" rtlCol="0" anchor="ctr"/>
           <a:lstStyle/>
           <a:p>
-            <a:pPr algn="ctr" indent="0" marL="0">
+            <a:pPr marL="0" indent="0" algn="ctr">
               <a:buNone/>
             </a:pPr>
             <a:r>
@@ -6588,6 +6514,13 @@
             <a:prstDash val="solid"/>
           </a:ln>
         </p:spPr>
+        <p:txBody>
+          <a:bodyPr/>
+          <a:lstStyle/>
+          <a:p>
+            <a:endParaRPr lang="en-US"/>
+          </a:p>
+        </p:txBody>
       </p:sp>
       <p:sp>
         <p:nvSpPr>
@@ -6610,7 +6543,7 @@
           <a:bodyPr wrap="square" lIns="0" tIns="0" rIns="0" bIns="0" rtlCol="0" anchor="ctr"/>
           <a:lstStyle/>
           <a:p>
-            <a:pPr indent="0" marL="0">
+            <a:pPr marL="0" indent="0">
               <a:buNone/>
             </a:pPr>
             <a:r>
@@ -6648,7 +6581,7 @@
           </a:bodyPr>
           <a:lstStyle/>
           <a:p>
-            <a:pPr indent="0" marL="0">
+            <a:pPr marL="0" indent="0">
               <a:buNone/>
             </a:pPr>
             <a:r>
@@ -6684,7 +6617,7 @@
           <a:bodyPr wrap="square" lIns="0" tIns="0" rIns="0" bIns="0" rtlCol="0" anchor="ctr"/>
           <a:lstStyle/>
           <a:p>
-            <a:pPr algn="ctr" indent="0" marL="0">
+            <a:pPr marL="0" indent="0" algn="ctr">
               <a:buNone/>
             </a:pPr>
             <a:r>
@@ -6721,6 +6654,13 @@
             <a:prstDash val="solid"/>
           </a:ln>
         </p:spPr>
+        <p:txBody>
+          <a:bodyPr/>
+          <a:lstStyle/>
+          <a:p>
+            <a:endParaRPr lang="en-US"/>
+          </a:p>
+        </p:txBody>
       </p:sp>
       <p:sp>
         <p:nvSpPr>
@@ -6743,7 +6683,7 @@
           <a:bodyPr wrap="square" lIns="0" tIns="0" rIns="0" bIns="0" rtlCol="0" anchor="ctr"/>
           <a:lstStyle/>
           <a:p>
-            <a:pPr indent="0" marL="0">
+            <a:pPr marL="0" indent="0">
               <a:buNone/>
             </a:pPr>
             <a:r>
@@ -6781,7 +6721,7 @@
           </a:bodyPr>
           <a:lstStyle/>
           <a:p>
-            <a:pPr indent="0" marL="0">
+            <a:pPr marL="0" indent="0">
               <a:buNone/>
             </a:pPr>
             <a:r>
@@ -6817,7 +6757,7 @@
           <a:bodyPr wrap="square" lIns="0" tIns="0" rIns="0" bIns="0" rtlCol="0" anchor="ctr"/>
           <a:lstStyle/>
           <a:p>
-            <a:pPr algn="ctr" indent="0" marL="0">
+            <a:pPr marL="0" indent="0" algn="ctr">
               <a:buNone/>
             </a:pPr>
             <a:r>
@@ -6854,6 +6794,13 @@
             <a:prstDash val="solid"/>
           </a:ln>
         </p:spPr>
+        <p:txBody>
+          <a:bodyPr/>
+          <a:lstStyle/>
+          <a:p>
+            <a:endParaRPr lang="en-US"/>
+          </a:p>
+        </p:txBody>
       </p:sp>
       <p:sp>
         <p:nvSpPr>
@@ -6876,7 +6823,7 @@
           <a:bodyPr wrap="square" lIns="0" tIns="0" rIns="0" bIns="0" rtlCol="0" anchor="ctr"/>
           <a:lstStyle/>
           <a:p>
-            <a:pPr indent="0" marL="0">
+            <a:pPr marL="0" indent="0">
               <a:buNone/>
             </a:pPr>
             <a:r>
@@ -6914,7 +6861,7 @@
           </a:bodyPr>
           <a:lstStyle/>
           <a:p>
-            <a:pPr indent="0" marL="0">
+            <a:pPr marL="0" indent="0">
               <a:buNone/>
             </a:pPr>
             <a:r>
@@ -6950,7 +6897,7 @@
           <a:bodyPr wrap="square" lIns="0" tIns="0" rIns="0" bIns="0" rtlCol="0" anchor="ctr"/>
           <a:lstStyle/>
           <a:p>
-            <a:pPr algn="ctr" indent="0" marL="0">
+            <a:pPr marL="0" indent="0" algn="ctr">
               <a:buNone/>
             </a:pPr>
             <a:r>
@@ -6987,6 +6934,13 @@
             <a:prstDash val="solid"/>
           </a:ln>
         </p:spPr>
+        <p:txBody>
+          <a:bodyPr/>
+          <a:lstStyle/>
+          <a:p>
+            <a:endParaRPr lang="en-US"/>
+          </a:p>
+        </p:txBody>
       </p:sp>
       <p:sp>
         <p:nvSpPr>
@@ -7009,7 +6963,7 @@
           <a:bodyPr wrap="square" lIns="0" tIns="0" rIns="0" bIns="0" rtlCol="0" anchor="ctr"/>
           <a:lstStyle/>
           <a:p>
-            <a:pPr indent="0" marL="0">
+            <a:pPr marL="0" indent="0">
               <a:buNone/>
             </a:pPr>
             <a:r>
@@ -7047,7 +7001,7 @@
           </a:bodyPr>
           <a:lstStyle/>
           <a:p>
-            <a:pPr indent="0" marL="0">
+            <a:pPr marL="0" indent="0">
               <a:buNone/>
             </a:pPr>
             <a:r>
@@ -7083,7 +7037,7 @@
           <a:bodyPr wrap="square" lIns="0" tIns="0" rIns="0" bIns="0" rtlCol="0" anchor="ctr"/>
           <a:lstStyle/>
           <a:p>
-            <a:pPr algn="ctr" indent="0" marL="0">
+            <a:pPr marL="0" indent="0" algn="ctr">
               <a:buNone/>
             </a:pPr>
             <a:r>
@@ -7120,6 +7074,13 @@
             <a:prstDash val="solid"/>
           </a:ln>
         </p:spPr>
+        <p:txBody>
+          <a:bodyPr/>
+          <a:lstStyle/>
+          <a:p>
+            <a:endParaRPr lang="en-US"/>
+          </a:p>
+        </p:txBody>
       </p:sp>
       <p:sp>
         <p:nvSpPr>
@@ -7142,7 +7103,7 @@
           <a:bodyPr wrap="square" lIns="0" tIns="0" rIns="0" bIns="0" rtlCol="0" anchor="ctr"/>
           <a:lstStyle/>
           <a:p>
-            <a:pPr indent="0" marL="0">
+            <a:pPr marL="0" indent="0">
               <a:buNone/>
             </a:pPr>
             <a:r>
@@ -7180,7 +7141,7 @@
           </a:bodyPr>
           <a:lstStyle/>
           <a:p>
-            <a:pPr indent="0" marL="0">
+            <a:pPr marL="0" indent="0">
               <a:buNone/>
             </a:pPr>
             <a:r>
@@ -7215,7 +7176,7 @@
           </a:prstGeom>
           <a:extLst>
             <a:ext uri="{C572A759-6A51-4108-AA02-DFA0A04FC94B}">
-              <ma14:wrappingTextBoxFlag xmlns:ma14="http://schemas.microsoft.com/office/mac/drawingml/2011/main" val="0"/>
+              <ma14:wrappingTextBoxFlag xmlns:ma14="http://schemas.microsoft.com/office/mac/drawingml/2011/main" xmlns="" val="0"/>
             </a:ext>
           </a:extLst>
         </p:spPr>
@@ -7236,7 +7197,7 @@
           <a:p>
             <a:pPr algn="r"/>
             <a:fld id="{F7021451-1387-4CA6-816F-3879F97B5CBC}" type="slidenum">
-              <a:rPr b="0" lang="en-US"/>
+              <a:rPr lang="en-US" b="0"/>
               <a:t>15</a:t>
             </a:fld>
             <a:endParaRPr lang="en-US"/>
@@ -7289,7 +7250,7 @@
           <a:bodyPr wrap="square" lIns="0" tIns="0" rIns="0" bIns="0" rtlCol="0" anchor="ctr"/>
           <a:lstStyle/>
           <a:p>
-            <a:pPr indent="0" marL="0">
+            <a:pPr marL="0" indent="0">
               <a:buNone/>
             </a:pPr>
             <a:r>
@@ -7328,7 +7289,7 @@
           <a:bodyPr wrap="square" lIns="0" tIns="0" rIns="0" bIns="0" rtlCol="0" anchor="ctr"/>
           <a:lstStyle/>
           <a:p>
-            <a:pPr indent="0" marL="0">
+            <a:pPr marL="0" indent="0">
               <a:buNone/>
             </a:pPr>
             <a:r>
@@ -7364,7 +7325,7 @@
           <a:bodyPr wrap="square" lIns="0" tIns="0" rIns="0" bIns="0" rtlCol="0" anchor="ctr"/>
           <a:lstStyle/>
           <a:p>
-            <a:pPr indent="0" marL="0">
+            <a:pPr marL="0" indent="0">
               <a:buNone/>
             </a:pPr>
             <a:r>
@@ -7458,7 +7419,7 @@
           <a:bodyPr wrap="square" lIns="0" tIns="0" rIns="0" bIns="0" rtlCol="0" anchor="ctr"/>
           <a:lstStyle/>
           <a:p>
-            <a:pPr indent="0" marL="0">
+            <a:pPr marL="0" indent="0">
               <a:buNone/>
             </a:pPr>
             <a:r>
@@ -7496,7 +7457,7 @@
           </a:bodyPr>
           <a:lstStyle/>
           <a:p>
-            <a:pPr indent="0" marL="0">
+            <a:pPr marL="0" indent="0">
               <a:buNone/>
             </a:pPr>
             <a:r>
@@ -7533,6 +7494,13 @@
             <a:prstDash val="solid"/>
           </a:ln>
         </p:spPr>
+        <p:txBody>
+          <a:bodyPr/>
+          <a:lstStyle/>
+          <a:p>
+            <a:endParaRPr lang="en-US"/>
+          </a:p>
+        </p:txBody>
       </p:sp>
       <p:sp>
         <p:nvSpPr>
@@ -7555,7 +7523,7 @@
           <a:bodyPr wrap="square" lIns="0" tIns="0" rIns="0" bIns="0" rtlCol="0" anchor="ctr"/>
           <a:lstStyle/>
           <a:p>
-            <a:pPr indent="0" marL="0">
+            <a:pPr marL="0" indent="0">
               <a:buNone/>
             </a:pPr>
             <a:r>
@@ -7591,7 +7559,7 @@
           <a:bodyPr wrap="square" lIns="0" tIns="0" rIns="0" bIns="0" rtlCol="0" anchor="ctr"/>
           <a:lstStyle/>
           <a:p>
-            <a:pPr indent="0" marL="0">
+            <a:pPr marL="0" indent="0">
               <a:buNone/>
             </a:pPr>
             <a:r>
@@ -7627,7 +7595,7 @@
           <a:bodyPr wrap="square" lIns="0" tIns="0" rIns="0" bIns="0" rtlCol="0" anchor="ctr"/>
           <a:lstStyle/>
           <a:p>
-            <a:pPr indent="0" marL="0">
+            <a:pPr marL="0" indent="0">
               <a:buNone/>
             </a:pPr>
             <a:r>
@@ -7663,7 +7631,7 @@
           <a:bodyPr wrap="square" lIns="0" tIns="0" rIns="0" bIns="0" rtlCol="0" anchor="ctr"/>
           <a:lstStyle/>
           <a:p>
-            <a:pPr indent="0" marL="0">
+            <a:pPr marL="0" indent="0">
               <a:buNone/>
             </a:pPr>
             <a:r>
@@ -7699,7 +7667,7 @@
           <a:bodyPr wrap="square" lIns="0" tIns="0" rIns="0" bIns="0" rtlCol="0" anchor="ctr"/>
           <a:lstStyle/>
           <a:p>
-            <a:pPr indent="0" marL="0">
+            <a:pPr marL="0" indent="0">
               <a:buNone/>
             </a:pPr>
             <a:r>
@@ -7735,7 +7703,7 @@
           <a:bodyPr wrap="square" lIns="0" tIns="0" rIns="0" bIns="0" rtlCol="0" anchor="ctr"/>
           <a:lstStyle/>
           <a:p>
-            <a:pPr algn="ctr" indent="0" marL="0">
+            <a:pPr marL="0" indent="0" algn="ctr">
               <a:buNone/>
             </a:pPr>
             <a:r>
@@ -7770,7 +7738,7 @@
           </a:prstGeom>
           <a:extLst>
             <a:ext uri="{C572A759-6A51-4108-AA02-DFA0A04FC94B}">
-              <ma14:wrappingTextBoxFlag xmlns:ma14="http://schemas.microsoft.com/office/mac/drawingml/2011/main" val="0"/>
+              <ma14:wrappingTextBoxFlag xmlns:ma14="http://schemas.microsoft.com/office/mac/drawingml/2011/main" xmlns="" val="0"/>
             </a:ext>
           </a:extLst>
         </p:spPr>
@@ -7791,7 +7759,7 @@
           <a:p>
             <a:pPr algn="r"/>
             <a:fld id="{F7021451-1387-4CA6-816F-3879F97B5CBC}" type="slidenum">
-              <a:rPr b="0" lang="en-US"/>
+              <a:rPr lang="en-US" b="0"/>
               <a:t>16</a:t>
             </a:fld>
             <a:endParaRPr lang="en-US"/>
@@ -7844,7 +7812,7 @@
           <a:bodyPr wrap="square" lIns="0" tIns="0" rIns="0" bIns="0" rtlCol="0" anchor="ctr"/>
           <a:lstStyle/>
           <a:p>
-            <a:pPr indent="0" marL="0">
+            <a:pPr marL="0" indent="0">
               <a:buNone/>
             </a:pPr>
             <a:r>
@@ -7885,9 +7853,27 @@
             <a:tbl>
               <a:tblPr/>
               <a:tblGrid>
-                <a:gridCol w="2011680"/>
-                <a:gridCol w="3703320"/>
-                <a:gridCol w="5669280"/>
+                <a:gridCol w="2011680">
+                  <a:extLst>
+                    <a:ext uri="{9D8B030D-6E8A-4147-A177-3AD203B41FA5}">
+                      <a16:colId xmlns:a16="http://schemas.microsoft.com/office/drawing/2014/main" val="20000"/>
+                    </a:ext>
+                  </a:extLst>
+                </a:gridCol>
+                <a:gridCol w="3703320">
+                  <a:extLst>
+                    <a:ext uri="{9D8B030D-6E8A-4147-A177-3AD203B41FA5}">
+                      <a16:colId xmlns:a16="http://schemas.microsoft.com/office/drawing/2014/main" val="20001"/>
+                    </a:ext>
+                  </a:extLst>
+                </a:gridCol>
+                <a:gridCol w="5669280">
+                  <a:extLst>
+                    <a:ext uri="{9D8B030D-6E8A-4147-A177-3AD203B41FA5}">
+                      <a16:colId xmlns:a16="http://schemas.microsoft.com/office/drawing/2014/main" val="20002"/>
+                    </a:ext>
+                  </a:extLst>
+                </a:gridCol>
               </a:tblGrid>
               <a:tr h="502920">
                 <a:tc>
@@ -7895,7 +7881,7 @@
                     <a:bodyPr/>
                     <a:lstStyle/>
                     <a:p>
-                      <a:pPr indent="0" marL="0">
+                      <a:pPr marL="0" indent="0">
                         <a:buNone/>
                       </a:pPr>
                       <a:r>
@@ -7916,7 +7902,7 @@
                       </a:endParaRPr>
                     </a:p>
                   </a:txBody>
-                  <a:tcPr marL="82296" marR="82296" marT="82296" marB="82296" anchor="mid">
+                  <a:tcPr marL="82296" marR="82296" marT="82296" marB="82296">
                     <a:lnL w="6985" cap="flat" cmpd="sng" algn="ctr">
                       <a:solidFill>
                         <a:srgbClr val="607378"/>
@@ -7963,7 +7949,7 @@
                     <a:bodyPr/>
                     <a:lstStyle/>
                     <a:p>
-                      <a:pPr indent="0" marL="0">
+                      <a:pPr marL="0" indent="0">
                         <a:buNone/>
                       </a:pPr>
                       <a:r>
@@ -7984,7 +7970,7 @@
                       </a:endParaRPr>
                     </a:p>
                   </a:txBody>
-                  <a:tcPr marL="82296" marR="82296" marT="82296" marB="82296" anchor="mid">
+                  <a:tcPr marL="82296" marR="82296" marT="82296" marB="82296">
                     <a:lnL w="6985" cap="flat" cmpd="sng" algn="ctr">
                       <a:solidFill>
                         <a:srgbClr val="607378"/>
@@ -8031,7 +8017,7 @@
                     <a:bodyPr/>
                     <a:lstStyle/>
                     <a:p>
-                      <a:pPr indent="0" marL="0">
+                      <a:pPr marL="0" indent="0">
                         <a:buNone/>
                       </a:pPr>
                       <a:r>
@@ -8052,7 +8038,7 @@
                       </a:endParaRPr>
                     </a:p>
                   </a:txBody>
-                  <a:tcPr marL="82296" marR="82296" marT="82296" marB="82296" anchor="mid">
+                  <a:tcPr marL="82296" marR="82296" marT="82296" marB="82296">
                     <a:lnL w="6985" cap="flat" cmpd="sng" algn="ctr">
                       <a:solidFill>
                         <a:srgbClr val="607378"/>
@@ -8094,6 +8080,11 @@
                     </a:solidFill>
                   </a:tcPr>
                 </a:tc>
+                <a:extLst>
+                  <a:ext uri="{0D108BD9-81ED-4DB2-BD59-A6C34878D82A}">
+                    <a16:rowId xmlns:a16="http://schemas.microsoft.com/office/drawing/2014/main" val="10000"/>
+                  </a:ext>
+                </a:extLst>
               </a:tr>
               <a:tr h="713232">
                 <a:tc>
@@ -8101,7 +8092,7 @@
                     <a:bodyPr/>
                     <a:lstStyle/>
                     <a:p>
-                      <a:pPr indent="0" marL="0">
+                      <a:pPr marL="0" indent="0">
                         <a:buNone/>
                       </a:pPr>
                       <a:r>
@@ -8122,7 +8113,7 @@
                       </a:endParaRPr>
                     </a:p>
                   </a:txBody>
-                  <a:tcPr marL="82296" marR="82296" marT="82296" marB="82296" anchor="mid">
+                  <a:tcPr marL="82296" marR="82296" marT="82296" marB="82296">
                     <a:lnL w="6985" cap="flat" cmpd="sng" algn="ctr">
                       <a:solidFill>
                         <a:srgbClr val="607378"/>
@@ -8169,7 +8160,7 @@
                     <a:bodyPr/>
                     <a:lstStyle/>
                     <a:p>
-                      <a:pPr indent="0" marL="0">
+                      <a:pPr marL="0" indent="0">
                         <a:buNone/>
                       </a:pPr>
                       <a:r>
@@ -8190,7 +8181,7 @@
                       </a:endParaRPr>
                     </a:p>
                   </a:txBody>
-                  <a:tcPr marL="82296" marR="82296" marT="82296" marB="82296" anchor="mid">
+                  <a:tcPr marL="82296" marR="82296" marT="82296" marB="82296">
                     <a:lnL w="6985" cap="flat" cmpd="sng" algn="ctr">
                       <a:solidFill>
                         <a:srgbClr val="607378"/>
@@ -8237,7 +8228,7 @@
                     <a:bodyPr/>
                     <a:lstStyle/>
                     <a:p>
-                      <a:pPr indent="0" marL="0">
+                      <a:pPr marL="0" indent="0">
                         <a:buNone/>
                       </a:pPr>
                       <a:r>
@@ -8258,7 +8249,7 @@
                       </a:endParaRPr>
                     </a:p>
                   </a:txBody>
-                  <a:tcPr marL="82296" marR="82296" marT="82296" marB="82296" anchor="mid">
+                  <a:tcPr marL="82296" marR="82296" marT="82296" marB="82296">
                     <a:lnL w="6985" cap="flat" cmpd="sng" algn="ctr">
                       <a:solidFill>
                         <a:srgbClr val="607378"/>
@@ -8300,6 +8291,11 @@
                     </a:solidFill>
                   </a:tcPr>
                 </a:tc>
+                <a:extLst>
+                  <a:ext uri="{0D108BD9-81ED-4DB2-BD59-A6C34878D82A}">
+                    <a16:rowId xmlns:a16="http://schemas.microsoft.com/office/drawing/2014/main" val="10001"/>
+                  </a:ext>
+                </a:extLst>
               </a:tr>
               <a:tr h="713232">
                 <a:tc>
@@ -8307,7 +8303,7 @@
                     <a:bodyPr/>
                     <a:lstStyle/>
                     <a:p>
-                      <a:pPr indent="0" marL="0">
+                      <a:pPr marL="0" indent="0">
                         <a:buNone/>
                       </a:pPr>
                       <a:r>
@@ -8328,7 +8324,7 @@
                       </a:endParaRPr>
                     </a:p>
                   </a:txBody>
-                  <a:tcPr marL="82296" marR="82296" marT="82296" marB="82296" anchor="mid">
+                  <a:tcPr marL="82296" marR="82296" marT="82296" marB="82296">
                     <a:lnL w="6985" cap="flat" cmpd="sng" algn="ctr">
                       <a:solidFill>
                         <a:srgbClr val="607378"/>
@@ -8375,7 +8371,7 @@
                     <a:bodyPr/>
                     <a:lstStyle/>
                     <a:p>
-                      <a:pPr indent="0" marL="0">
+                      <a:pPr marL="0" indent="0">
                         <a:buNone/>
                       </a:pPr>
                       <a:r>
@@ -8396,7 +8392,7 @@
                       </a:endParaRPr>
                     </a:p>
                   </a:txBody>
-                  <a:tcPr marL="82296" marR="82296" marT="82296" marB="82296" anchor="mid">
+                  <a:tcPr marL="82296" marR="82296" marT="82296" marB="82296">
                     <a:lnL w="6985" cap="flat" cmpd="sng" algn="ctr">
                       <a:solidFill>
                         <a:srgbClr val="607378"/>
@@ -8443,7 +8439,7 @@
                     <a:bodyPr/>
                     <a:lstStyle/>
                     <a:p>
-                      <a:pPr indent="0" marL="0">
+                      <a:pPr marL="0" indent="0">
                         <a:buNone/>
                       </a:pPr>
                       <a:r>
@@ -8464,7 +8460,7 @@
                       </a:endParaRPr>
                     </a:p>
                   </a:txBody>
-                  <a:tcPr marL="82296" marR="82296" marT="82296" marB="82296" anchor="mid">
+                  <a:tcPr marL="82296" marR="82296" marT="82296" marB="82296">
                     <a:lnL w="6985" cap="flat" cmpd="sng" algn="ctr">
                       <a:solidFill>
                         <a:srgbClr val="607378"/>
@@ -8506,6 +8502,11 @@
                     </a:solidFill>
                   </a:tcPr>
                 </a:tc>
+                <a:extLst>
+                  <a:ext uri="{0D108BD9-81ED-4DB2-BD59-A6C34878D82A}">
+                    <a16:rowId xmlns:a16="http://schemas.microsoft.com/office/drawing/2014/main" val="10002"/>
+                  </a:ext>
+                </a:extLst>
               </a:tr>
               <a:tr h="786384">
                 <a:tc>
@@ -8513,7 +8514,7 @@
                     <a:bodyPr/>
                     <a:lstStyle/>
                     <a:p>
-                      <a:pPr indent="0" marL="0">
+                      <a:pPr marL="0" indent="0">
                         <a:buNone/>
                       </a:pPr>
                       <a:r>
@@ -8534,7 +8535,7 @@
                       </a:endParaRPr>
                     </a:p>
                   </a:txBody>
-                  <a:tcPr marL="82296" marR="82296" marT="82296" marB="82296" anchor="mid">
+                  <a:tcPr marL="82296" marR="82296" marT="82296" marB="82296">
                     <a:lnL w="6985" cap="flat" cmpd="sng" algn="ctr">
                       <a:solidFill>
                         <a:srgbClr val="607378"/>
@@ -8581,7 +8582,7 @@
                     <a:bodyPr/>
                     <a:lstStyle/>
                     <a:p>
-                      <a:pPr indent="0" marL="0">
+                      <a:pPr marL="0" indent="0">
                         <a:buNone/>
                       </a:pPr>
                       <a:r>
@@ -8602,7 +8603,7 @@
                       </a:endParaRPr>
                     </a:p>
                   </a:txBody>
-                  <a:tcPr marL="82296" marR="82296" marT="82296" marB="82296" anchor="mid">
+                  <a:tcPr marL="82296" marR="82296" marT="82296" marB="82296">
                     <a:lnL w="6985" cap="flat" cmpd="sng" algn="ctr">
                       <a:solidFill>
                         <a:srgbClr val="607378"/>
@@ -8649,7 +8650,7 @@
                     <a:bodyPr/>
                     <a:lstStyle/>
                     <a:p>
-                      <a:pPr indent="0" marL="0">
+                      <a:pPr marL="0" indent="0">
                         <a:buNone/>
                       </a:pPr>
                       <a:r>
@@ -8670,7 +8671,7 @@
                       </a:endParaRPr>
                     </a:p>
                   </a:txBody>
-                  <a:tcPr marL="82296" marR="82296" marT="82296" marB="82296" anchor="mid">
+                  <a:tcPr marL="82296" marR="82296" marT="82296" marB="82296">
                     <a:lnL w="6985" cap="flat" cmpd="sng" algn="ctr">
                       <a:solidFill>
                         <a:srgbClr val="607378"/>
@@ -8712,6 +8713,11 @@
                     </a:solidFill>
                   </a:tcPr>
                 </a:tc>
+                <a:extLst>
+                  <a:ext uri="{0D108BD9-81ED-4DB2-BD59-A6C34878D82A}">
+                    <a16:rowId xmlns:a16="http://schemas.microsoft.com/office/drawing/2014/main" val="10003"/>
+                  </a:ext>
+                </a:extLst>
               </a:tr>
               <a:tr h="786384">
                 <a:tc>
@@ -8719,7 +8725,7 @@
                     <a:bodyPr/>
                     <a:lstStyle/>
                     <a:p>
-                      <a:pPr indent="0" marL="0">
+                      <a:pPr marL="0" indent="0">
                         <a:buNone/>
                       </a:pPr>
                       <a:r>
@@ -8740,7 +8746,7 @@
                       </a:endParaRPr>
                     </a:p>
                   </a:txBody>
-                  <a:tcPr marL="82296" marR="82296" marT="82296" marB="82296" anchor="mid">
+                  <a:tcPr marL="82296" marR="82296" marT="82296" marB="82296">
                     <a:lnL w="6985" cap="flat" cmpd="sng" algn="ctr">
                       <a:solidFill>
                         <a:srgbClr val="607378"/>
@@ -8787,7 +8793,7 @@
                     <a:bodyPr/>
                     <a:lstStyle/>
                     <a:p>
-                      <a:pPr indent="0" marL="0">
+                      <a:pPr marL="0" indent="0">
                         <a:buNone/>
                       </a:pPr>
                       <a:r>
@@ -8808,7 +8814,7 @@
                       </a:endParaRPr>
                     </a:p>
                   </a:txBody>
-                  <a:tcPr marL="82296" marR="82296" marT="82296" marB="82296" anchor="mid">
+                  <a:tcPr marL="82296" marR="82296" marT="82296" marB="82296">
                     <a:lnL w="6985" cap="flat" cmpd="sng" algn="ctr">
                       <a:solidFill>
                         <a:srgbClr val="607378"/>
@@ -8855,7 +8861,7 @@
                     <a:bodyPr/>
                     <a:lstStyle/>
                     <a:p>
-                      <a:pPr indent="0" marL="0">
+                      <a:pPr marL="0" indent="0">
                         <a:buNone/>
                       </a:pPr>
                       <a:r>
@@ -8876,7 +8882,7 @@
                       </a:endParaRPr>
                     </a:p>
                   </a:txBody>
-                  <a:tcPr marL="82296" marR="82296" marT="82296" marB="82296" anchor="mid">
+                  <a:tcPr marL="82296" marR="82296" marT="82296" marB="82296">
                     <a:lnL w="6985" cap="flat" cmpd="sng" algn="ctr">
                       <a:solidFill>
                         <a:srgbClr val="607378"/>
@@ -8918,6 +8924,11 @@
                     </a:solidFill>
                   </a:tcPr>
                 </a:tc>
+                <a:extLst>
+                  <a:ext uri="{0D108BD9-81ED-4DB2-BD59-A6C34878D82A}">
+                    <a16:rowId xmlns:a16="http://schemas.microsoft.com/office/drawing/2014/main" val="10004"/>
+                  </a:ext>
+                </a:extLst>
               </a:tr>
               <a:tr h="786384">
                 <a:tc>
@@ -8925,7 +8936,7 @@
                     <a:bodyPr/>
                     <a:lstStyle/>
                     <a:p>
-                      <a:pPr indent="0" marL="0">
+                      <a:pPr marL="0" indent="0">
                         <a:buNone/>
                       </a:pPr>
                       <a:r>
@@ -8946,7 +8957,7 @@
                       </a:endParaRPr>
                     </a:p>
                   </a:txBody>
-                  <a:tcPr marL="82296" marR="82296" marT="82296" marB="82296" anchor="mid">
+                  <a:tcPr marL="82296" marR="82296" marT="82296" marB="82296">
                     <a:lnL w="6985" cap="flat" cmpd="sng" algn="ctr">
                       <a:solidFill>
                         <a:srgbClr val="607378"/>
@@ -8993,7 +9004,7 @@
                     <a:bodyPr/>
                     <a:lstStyle/>
                     <a:p>
-                      <a:pPr indent="0" marL="0">
+                      <a:pPr marL="0" indent="0">
                         <a:buNone/>
                       </a:pPr>
                       <a:r>
@@ -9014,7 +9025,7 @@
                       </a:endParaRPr>
                     </a:p>
                   </a:txBody>
-                  <a:tcPr marL="82296" marR="82296" marT="82296" marB="82296" anchor="mid">
+                  <a:tcPr marL="82296" marR="82296" marT="82296" marB="82296">
                     <a:lnL w="6985" cap="flat" cmpd="sng" algn="ctr">
                       <a:solidFill>
                         <a:srgbClr val="607378"/>
@@ -9061,7 +9072,7 @@
                     <a:bodyPr/>
                     <a:lstStyle/>
                     <a:p>
-                      <a:pPr indent="0" marL="0">
+                      <a:pPr marL="0" indent="0">
                         <a:buNone/>
                       </a:pPr>
                       <a:r>
@@ -9082,7 +9093,7 @@
                       </a:endParaRPr>
                     </a:p>
                   </a:txBody>
-                  <a:tcPr marL="82296" marR="82296" marT="82296" marB="82296" anchor="mid">
+                  <a:tcPr marL="82296" marR="82296" marT="82296" marB="82296">
                     <a:lnL w="6985" cap="flat" cmpd="sng" algn="ctr">
                       <a:solidFill>
                         <a:srgbClr val="607378"/>
@@ -9124,6 +9135,11 @@
                     </a:solidFill>
                   </a:tcPr>
                 </a:tc>
+                <a:extLst>
+                  <a:ext uri="{0D108BD9-81ED-4DB2-BD59-A6C34878D82A}">
+                    <a16:rowId xmlns:a16="http://schemas.microsoft.com/office/drawing/2014/main" val="10005"/>
+                  </a:ext>
+                </a:extLst>
               </a:tr>
               <a:tr h="786384">
                 <a:tc>
@@ -9131,7 +9147,7 @@
                     <a:bodyPr/>
                     <a:lstStyle/>
                     <a:p>
-                      <a:pPr indent="0" marL="0">
+                      <a:pPr marL="0" indent="0">
                         <a:buNone/>
                       </a:pPr>
                       <a:r>
@@ -9152,7 +9168,7 @@
                       </a:endParaRPr>
                     </a:p>
                   </a:txBody>
-                  <a:tcPr marL="82296" marR="82296" marT="82296" marB="82296" anchor="mid">
+                  <a:tcPr marL="82296" marR="82296" marT="82296" marB="82296">
                     <a:lnL w="6985" cap="flat" cmpd="sng" algn="ctr">
                       <a:solidFill>
                         <a:srgbClr val="607378"/>
@@ -9199,7 +9215,7 @@
                     <a:bodyPr/>
                     <a:lstStyle/>
                     <a:p>
-                      <a:pPr indent="0" marL="0">
+                      <a:pPr marL="0" indent="0">
                         <a:buNone/>
                       </a:pPr>
                       <a:r>
@@ -9220,7 +9236,7 @@
                       </a:endParaRPr>
                     </a:p>
                   </a:txBody>
-                  <a:tcPr marL="82296" marR="82296" marT="82296" marB="82296" anchor="mid">
+                  <a:tcPr marL="82296" marR="82296" marT="82296" marB="82296">
                     <a:lnL w="6985" cap="flat" cmpd="sng" algn="ctr">
                       <a:solidFill>
                         <a:srgbClr val="607378"/>
@@ -9267,7 +9283,7 @@
                     <a:bodyPr/>
                     <a:lstStyle/>
                     <a:p>
-                      <a:pPr indent="0" marL="0">
+                      <a:pPr marL="0" indent="0">
                         <a:buNone/>
                       </a:pPr>
                       <a:r>
@@ -9288,7 +9304,7 @@
                       </a:endParaRPr>
                     </a:p>
                   </a:txBody>
-                  <a:tcPr marL="82296" marR="82296" marT="82296" marB="82296" anchor="mid">
+                  <a:tcPr marL="82296" marR="82296" marT="82296" marB="82296">
                     <a:lnL w="6985" cap="flat" cmpd="sng" algn="ctr">
                       <a:solidFill>
                         <a:srgbClr val="607378"/>
@@ -9330,6 +9346,11 @@
                     </a:solidFill>
                   </a:tcPr>
                 </a:tc>
+                <a:extLst>
+                  <a:ext uri="{0D108BD9-81ED-4DB2-BD59-A6C34878D82A}">
+                    <a16:rowId xmlns:a16="http://schemas.microsoft.com/office/drawing/2014/main" val="10006"/>
+                  </a:ext>
+                </a:extLst>
               </a:tr>
             </a:tbl>
           </a:graphicData>
@@ -9355,7 +9376,7 @@
           </a:prstGeom>
           <a:extLst>
             <a:ext uri="{C572A759-6A51-4108-AA02-DFA0A04FC94B}">
-              <ma14:wrappingTextBoxFlag xmlns:ma14="http://schemas.microsoft.com/office/mac/drawingml/2011/main" val="0"/>
+              <ma14:wrappingTextBoxFlag xmlns:ma14="http://schemas.microsoft.com/office/mac/drawingml/2011/main" xmlns="" val="0"/>
             </a:ext>
           </a:extLst>
         </p:spPr>
@@ -9376,7 +9397,7 @@
           <a:p>
             <a:pPr algn="r"/>
             <a:fld id="{F7021451-1387-4CA6-816F-3879F97B5CBC}" type="slidenum">
-              <a:rPr b="0" lang="en-US"/>
+              <a:rPr lang="en-US" b="0"/>
               <a:t>17</a:t>
             </a:fld>
             <a:endParaRPr lang="en-US"/>
@@ -9429,7 +9450,7 @@
           <a:bodyPr wrap="square" lIns="0" tIns="0" rIns="0" bIns="0" rtlCol="0" anchor="ctr"/>
           <a:lstStyle/>
           <a:p>
-            <a:pPr indent="0" marL="0">
+            <a:pPr marL="0" indent="0">
               <a:buNone/>
             </a:pPr>
             <a:r>
@@ -9471,6 +9492,13 @@
             <a:prstDash val="solid"/>
           </a:ln>
         </p:spPr>
+        <p:txBody>
+          <a:bodyPr/>
+          <a:lstStyle/>
+          <a:p>
+            <a:endParaRPr lang="en-US"/>
+          </a:p>
+        </p:txBody>
       </p:sp>
       <p:sp>
         <p:nvSpPr>
@@ -9493,7 +9521,7 @@
           <a:bodyPr wrap="square" lIns="0" tIns="0" rIns="0" bIns="0" rtlCol="0" anchor="ctr"/>
           <a:lstStyle/>
           <a:p>
-            <a:pPr algn="ctr" indent="0" marL="0">
+            <a:pPr marL="0" indent="0" algn="ctr">
               <a:buNone/>
             </a:pPr>
             <a:r>
@@ -9529,7 +9557,7 @@
           <a:bodyPr wrap="square" lIns="0" tIns="0" rIns="0" bIns="0" rtlCol="0" anchor="ctr"/>
           <a:lstStyle/>
           <a:p>
-            <a:pPr algn="ctr" indent="0" marL="0">
+            <a:pPr marL="0" indent="0" algn="ctr">
               <a:buNone/>
             </a:pPr>
             <a:r>
@@ -9568,6 +9596,13 @@
             <a:prstDash val="solid"/>
           </a:ln>
         </p:spPr>
+        <p:txBody>
+          <a:bodyPr/>
+          <a:lstStyle/>
+          <a:p>
+            <a:endParaRPr lang="en-US"/>
+          </a:p>
+        </p:txBody>
       </p:sp>
       <p:sp>
         <p:nvSpPr>
@@ -9590,7 +9625,7 @@
           <a:bodyPr wrap="square" lIns="0" tIns="0" rIns="0" bIns="0" rtlCol="0" anchor="ctr"/>
           <a:lstStyle/>
           <a:p>
-            <a:pPr algn="ctr" indent="0" marL="0">
+            <a:pPr marL="0" indent="0" algn="ctr">
               <a:buNone/>
             </a:pPr>
             <a:r>
@@ -9626,7 +9661,7 @@
           <a:bodyPr wrap="square" lIns="0" tIns="0" rIns="0" bIns="0" rtlCol="0" anchor="ctr"/>
           <a:lstStyle/>
           <a:p>
-            <a:pPr algn="ctr" indent="0" marL="0">
+            <a:pPr marL="0" indent="0" algn="ctr">
               <a:buNone/>
             </a:pPr>
             <a:r>
@@ -9665,6 +9700,13 @@
             <a:prstDash val="solid"/>
           </a:ln>
         </p:spPr>
+        <p:txBody>
+          <a:bodyPr/>
+          <a:lstStyle/>
+          <a:p>
+            <a:endParaRPr lang="en-US"/>
+          </a:p>
+        </p:txBody>
       </p:sp>
       <p:sp>
         <p:nvSpPr>
@@ -9687,7 +9729,7 @@
           <a:bodyPr wrap="square" lIns="0" tIns="0" rIns="0" bIns="0" rtlCol="0" anchor="ctr"/>
           <a:lstStyle/>
           <a:p>
-            <a:pPr algn="ctr" indent="0" marL="0">
+            <a:pPr marL="0" indent="0" algn="ctr">
               <a:buNone/>
             </a:pPr>
             <a:r>
@@ -9723,7 +9765,7 @@
           <a:bodyPr wrap="square" lIns="0" tIns="0" rIns="0" bIns="0" rtlCol="0" anchor="ctr"/>
           <a:lstStyle/>
           <a:p>
-            <a:pPr algn="ctr" indent="0" marL="0">
+            <a:pPr marL="0" indent="0" algn="ctr">
               <a:buNone/>
             </a:pPr>
             <a:r>
@@ -9762,6 +9804,13 @@
             <a:prstDash val="solid"/>
           </a:ln>
         </p:spPr>
+        <p:txBody>
+          <a:bodyPr/>
+          <a:lstStyle/>
+          <a:p>
+            <a:endParaRPr lang="en-US"/>
+          </a:p>
+        </p:txBody>
       </p:sp>
       <p:sp>
         <p:nvSpPr>
@@ -9784,7 +9833,7 @@
           <a:bodyPr wrap="square" lIns="0" tIns="0" rIns="0" bIns="0" rtlCol="0" anchor="ctr"/>
           <a:lstStyle/>
           <a:p>
-            <a:pPr algn="ctr" indent="0" marL="0">
+            <a:pPr marL="0" indent="0" algn="ctr">
               <a:buNone/>
             </a:pPr>
             <a:r>
@@ -9823,6 +9872,13 @@
             <a:prstDash val="solid"/>
           </a:ln>
         </p:spPr>
+        <p:txBody>
+          <a:bodyPr/>
+          <a:lstStyle/>
+          <a:p>
+            <a:endParaRPr lang="en-US"/>
+          </a:p>
+        </p:txBody>
       </p:sp>
       <p:sp>
         <p:nvSpPr>
@@ -9845,7 +9901,7 @@
           <a:bodyPr wrap="square" lIns="0" tIns="0" rIns="0" bIns="0" rtlCol="0" anchor="ctr"/>
           <a:lstStyle/>
           <a:p>
-            <a:pPr algn="ctr" indent="0" marL="0">
+            <a:pPr marL="0" indent="0" algn="ctr">
               <a:buNone/>
             </a:pPr>
             <a:r>
@@ -9884,6 +9940,13 @@
             <a:prstDash val="solid"/>
           </a:ln>
         </p:spPr>
+        <p:txBody>
+          <a:bodyPr/>
+          <a:lstStyle/>
+          <a:p>
+            <a:endParaRPr lang="en-US"/>
+          </a:p>
+        </p:txBody>
       </p:sp>
       <p:sp>
         <p:nvSpPr>
@@ -9906,7 +9969,7 @@
           <a:bodyPr wrap="square" lIns="0" tIns="0" rIns="0" bIns="0" rtlCol="0" anchor="ctr"/>
           <a:lstStyle/>
           <a:p>
-            <a:pPr algn="ctr" indent="0" marL="0">
+            <a:pPr marL="0" indent="0" algn="ctr">
               <a:buNone/>
             </a:pPr>
             <a:r>
@@ -9945,6 +10008,13 @@
             <a:prstDash val="solid"/>
           </a:ln>
         </p:spPr>
+        <p:txBody>
+          <a:bodyPr/>
+          <a:lstStyle/>
+          <a:p>
+            <a:endParaRPr lang="en-US"/>
+          </a:p>
+        </p:txBody>
       </p:sp>
       <p:sp>
         <p:nvSpPr>
@@ -9967,7 +10037,7 @@
           <a:bodyPr wrap="square" lIns="0" tIns="0" rIns="0" bIns="0" rtlCol="0" anchor="ctr"/>
           <a:lstStyle/>
           <a:p>
-            <a:pPr algn="ctr" indent="0" marL="0">
+            <a:pPr marL="0" indent="0" algn="ctr">
               <a:buNone/>
             </a:pPr>
             <a:r>
@@ -10006,6 +10076,13 @@
             <a:prstDash val="solid"/>
           </a:ln>
         </p:spPr>
+        <p:txBody>
+          <a:bodyPr/>
+          <a:lstStyle/>
+          <a:p>
+            <a:endParaRPr lang="en-US"/>
+          </a:p>
+        </p:txBody>
       </p:sp>
       <p:sp>
         <p:nvSpPr>
@@ -10028,7 +10105,7 @@
           <a:bodyPr wrap="square" lIns="0" tIns="0" rIns="0" bIns="0" rtlCol="0" anchor="ctr"/>
           <a:lstStyle/>
           <a:p>
-            <a:pPr algn="ctr" indent="0" marL="0">
+            <a:pPr marL="0" indent="0" algn="ctr">
               <a:buNone/>
             </a:pPr>
             <a:r>
@@ -10067,6 +10144,13 @@
             <a:prstDash val="solid"/>
           </a:ln>
         </p:spPr>
+        <p:txBody>
+          <a:bodyPr/>
+          <a:lstStyle/>
+          <a:p>
+            <a:endParaRPr lang="en-US"/>
+          </a:p>
+        </p:txBody>
       </p:sp>
       <p:sp>
         <p:nvSpPr>
@@ -10089,7 +10173,7 @@
           <a:bodyPr wrap="square" lIns="0" tIns="0" rIns="0" bIns="0" rtlCol="0" anchor="ctr"/>
           <a:lstStyle/>
           <a:p>
-            <a:pPr algn="ctr" indent="0" marL="0">
+            <a:pPr marL="0" indent="0" algn="ctr">
               <a:buNone/>
             </a:pPr>
             <a:r>
@@ -10125,7 +10209,7 @@
           <a:bodyPr wrap="square" lIns="0" tIns="0" rIns="0" bIns="0" rtlCol="0" anchor="ctr"/>
           <a:lstStyle/>
           <a:p>
-            <a:pPr algn="ctr" indent="0" marL="0">
+            <a:pPr marL="0" indent="0" algn="ctr">
               <a:buNone/>
             </a:pPr>
             <a:r>
@@ -10160,7 +10244,7 @@
           </a:prstGeom>
           <a:extLst>
             <a:ext uri="{C572A759-6A51-4108-AA02-DFA0A04FC94B}">
-              <ma14:wrappingTextBoxFlag xmlns:ma14="http://schemas.microsoft.com/office/mac/drawingml/2011/main" val="0"/>
+              <ma14:wrappingTextBoxFlag xmlns:ma14="http://schemas.microsoft.com/office/mac/drawingml/2011/main" xmlns="" val="0"/>
             </a:ext>
           </a:extLst>
         </p:spPr>
@@ -10181,7 +10265,7 @@
           <a:p>
             <a:pPr algn="r"/>
             <a:fld id="{F7021451-1387-4CA6-816F-3879F97B5CBC}" type="slidenum">
-              <a:rPr b="0" lang="en-US"/>
+              <a:rPr lang="en-US" b="0"/>
               <a:t>18</a:t>
             </a:fld>
             <a:endParaRPr lang="en-US"/>
@@ -10234,7 +10318,7 @@
           <a:bodyPr wrap="square" lIns="0" tIns="0" rIns="0" bIns="0" rtlCol="0" anchor="ctr"/>
           <a:lstStyle/>
           <a:p>
-            <a:pPr indent="0" marL="0">
+            <a:pPr marL="0" indent="0">
               <a:buNone/>
             </a:pPr>
             <a:r>
@@ -10273,7 +10357,7 @@
           <a:bodyPr wrap="square" lIns="0" tIns="0" rIns="0" bIns="0" rtlCol="0" anchor="ctr"/>
           <a:lstStyle/>
           <a:p>
-            <a:pPr algn="ctr" indent="0" marL="0">
+            <a:pPr marL="0" indent="0" algn="ctr">
               <a:buNone/>
             </a:pPr>
             <a:r>
@@ -10311,7 +10395,7 @@
           </a:bodyPr>
           <a:lstStyle/>
           <a:p>
-            <a:pPr indent="0" marL="0">
+            <a:pPr marL="0" indent="0">
               <a:buNone/>
             </a:pPr>
             <a:r>
@@ -10347,7 +10431,7 @@
           <a:bodyPr wrap="square" lIns="0" tIns="0" rIns="0" bIns="0" rtlCol="0" anchor="ctr"/>
           <a:lstStyle/>
           <a:p>
-            <a:pPr algn="ctr" indent="0" marL="0">
+            <a:pPr marL="0" indent="0" algn="ctr">
               <a:buNone/>
             </a:pPr>
             <a:r>
@@ -10385,7 +10469,7 @@
           </a:bodyPr>
           <a:lstStyle/>
           <a:p>
-            <a:pPr indent="0" marL="0">
+            <a:pPr marL="0" indent="0">
               <a:buNone/>
             </a:pPr>
             <a:r>
@@ -10421,7 +10505,7 @@
           <a:bodyPr wrap="square" lIns="0" tIns="0" rIns="0" bIns="0" rtlCol="0" anchor="ctr"/>
           <a:lstStyle/>
           <a:p>
-            <a:pPr algn="ctr" indent="0" marL="0">
+            <a:pPr marL="0" indent="0" algn="ctr">
               <a:buNone/>
             </a:pPr>
             <a:r>
@@ -10459,7 +10543,7 @@
           </a:bodyPr>
           <a:lstStyle/>
           <a:p>
-            <a:pPr indent="0" marL="0">
+            <a:pPr marL="0" indent="0">
               <a:buNone/>
             </a:pPr>
             <a:r>
@@ -10496,6 +10580,13 @@
             <a:prstDash val="solid"/>
           </a:ln>
         </p:spPr>
+        <p:txBody>
+          <a:bodyPr/>
+          <a:lstStyle/>
+          <a:p>
+            <a:endParaRPr lang="en-US"/>
+          </a:p>
+        </p:txBody>
       </p:sp>
       <p:sp>
         <p:nvSpPr>
@@ -10518,7 +10609,7 @@
           <a:bodyPr wrap="square" lIns="0" tIns="0" rIns="0" bIns="0" rtlCol="0" anchor="ctr"/>
           <a:lstStyle/>
           <a:p>
-            <a:pPr algn="ctr" indent="0" marL="0">
+            <a:pPr marL="0" indent="0" algn="ctr">
               <a:buNone/>
             </a:pPr>
             <a:r>
@@ -10554,7 +10645,7 @@
           <a:bodyPr wrap="square" lIns="0" tIns="0" rIns="0" bIns="0" rtlCol="0" anchor="ctr"/>
           <a:lstStyle/>
           <a:p>
-            <a:pPr algn="ctr" indent="0" marL="0">
+            <a:pPr marL="0" indent="0" algn="ctr">
               <a:buNone/>
             </a:pPr>
             <a:r>
@@ -10589,7 +10680,7 @@
           </a:prstGeom>
           <a:extLst>
             <a:ext uri="{C572A759-6A51-4108-AA02-DFA0A04FC94B}">
-              <ma14:wrappingTextBoxFlag xmlns:ma14="http://schemas.microsoft.com/office/mac/drawingml/2011/main" val="0"/>
+              <ma14:wrappingTextBoxFlag xmlns:ma14="http://schemas.microsoft.com/office/mac/drawingml/2011/main" xmlns="" val="0"/>
             </a:ext>
           </a:extLst>
         </p:spPr>
@@ -10610,7 +10701,7 @@
           <a:p>
             <a:pPr algn="r"/>
             <a:fld id="{F7021451-1387-4CA6-816F-3879F97B5CBC}" type="slidenum">
-              <a:rPr b="0" lang="en-US"/>
+              <a:rPr lang="en-US" b="0"/>
               <a:t>19</a:t>
             </a:fld>
             <a:endParaRPr lang="en-US"/>
@@ -10663,7 +10754,7 @@
           <a:bodyPr wrap="square" lIns="0" tIns="0" rIns="0" bIns="0" rtlCol="0" anchor="ctr"/>
           <a:lstStyle/>
           <a:p>
-            <a:pPr indent="0" marL="0">
+            <a:pPr marL="0" indent="0">
               <a:buNone/>
             </a:pPr>
             <a:r>
@@ -10702,11 +10793,11 @@
           <a:bodyPr wrap="square" lIns="0" tIns="0" rIns="0" bIns="0" rtlCol="0" anchor="ctr"/>
           <a:lstStyle/>
           <a:p>
-            <a:pPr indent="0" marL="0">
+            <a:pPr marL="0" indent="0">
               <a:buNone/>
             </a:pPr>
             <a:r>
-              <a:rPr lang="en-US" sz="1000" b="1" spc="120" kern="0" dirty="0">
+              <a:rPr lang="en-US" sz="1000" b="1" kern="0" spc="120" dirty="0">
                 <a:solidFill>
                   <a:srgbClr val="E5A823"/>
                 </a:solidFill>
@@ -10740,7 +10831,7 @@
           </a:bodyPr>
           <a:lstStyle/>
           <a:p>
-            <a:pPr indent="0" marL="0">
+            <a:pPr marL="0" indent="0">
               <a:buNone/>
             </a:pPr>
             <a:r>
@@ -10778,7 +10869,7 @@
           </a:bodyPr>
           <a:lstStyle/>
           <a:p>
-            <a:pPr indent="0" marL="0">
+            <a:pPr marL="0" indent="0">
               <a:buNone/>
             </a:pPr>
             <a:r>
@@ -10817,6 +10908,13 @@
             <a:tailEnd type="triangle"/>
           </a:ln>
         </p:spPr>
+        <p:txBody>
+          <a:bodyPr/>
+          <a:lstStyle/>
+          <a:p>
+            <a:endParaRPr lang="en-US"/>
+          </a:p>
+        </p:txBody>
       </p:sp>
       <p:sp>
         <p:nvSpPr>
@@ -10844,6 +10942,13 @@
             <a:prstDash val="solid"/>
           </a:ln>
         </p:spPr>
+        <p:txBody>
+          <a:bodyPr/>
+          <a:lstStyle/>
+          <a:p>
+            <a:endParaRPr lang="en-US"/>
+          </a:p>
+        </p:txBody>
       </p:sp>
       <p:sp>
         <p:nvSpPr>
@@ -10869,6 +10974,13 @@
             <a:prstDash val="solid"/>
           </a:ln>
         </p:spPr>
+        <p:txBody>
+          <a:bodyPr/>
+          <a:lstStyle/>
+          <a:p>
+            <a:endParaRPr lang="en-US"/>
+          </a:p>
+        </p:txBody>
       </p:sp>
       <p:sp>
         <p:nvSpPr>
@@ -10891,7 +11003,7 @@
           <a:bodyPr wrap="square" lIns="0" tIns="0" rIns="0" bIns="0" rtlCol="0" anchor="ctr"/>
           <a:lstStyle/>
           <a:p>
-            <a:pPr indent="0" marL="0">
+            <a:pPr marL="0" indent="0">
               <a:buNone/>
             </a:pPr>
             <a:r>
@@ -10929,7 +11041,7 @@
           </a:bodyPr>
           <a:lstStyle/>
           <a:p>
-            <a:pPr indent="0" marL="0">
+            <a:pPr marL="0" indent="0">
               <a:buNone/>
             </a:pPr>
             <a:r>
@@ -10970,6 +11082,13 @@
             <a:prstDash val="solid"/>
           </a:ln>
         </p:spPr>
+        <p:txBody>
+          <a:bodyPr/>
+          <a:lstStyle/>
+          <a:p>
+            <a:endParaRPr lang="en-US"/>
+          </a:p>
+        </p:txBody>
       </p:sp>
       <p:sp>
         <p:nvSpPr>
@@ -10995,6 +11114,13 @@
             <a:prstDash val="solid"/>
           </a:ln>
         </p:spPr>
+        <p:txBody>
+          <a:bodyPr/>
+          <a:lstStyle/>
+          <a:p>
+            <a:endParaRPr lang="en-US"/>
+          </a:p>
+        </p:txBody>
       </p:sp>
       <p:sp>
         <p:nvSpPr>
@@ -11017,7 +11143,7 @@
           <a:bodyPr wrap="square" lIns="0" tIns="0" rIns="0" bIns="0" rtlCol="0" anchor="ctr"/>
           <a:lstStyle/>
           <a:p>
-            <a:pPr indent="0" marL="0">
+            <a:pPr marL="0" indent="0">
               <a:buNone/>
             </a:pPr>
             <a:r>
@@ -11055,7 +11181,7 @@
           </a:bodyPr>
           <a:lstStyle/>
           <a:p>
-            <a:pPr indent="0" marL="0">
+            <a:pPr marL="0" indent="0">
               <a:buNone/>
             </a:pPr>
             <a:r>
@@ -11096,6 +11222,13 @@
             <a:prstDash val="solid"/>
           </a:ln>
         </p:spPr>
+        <p:txBody>
+          <a:bodyPr/>
+          <a:lstStyle/>
+          <a:p>
+            <a:endParaRPr lang="en-US"/>
+          </a:p>
+        </p:txBody>
       </p:sp>
       <p:sp>
         <p:nvSpPr>
@@ -11121,6 +11254,13 @@
             <a:prstDash val="solid"/>
           </a:ln>
         </p:spPr>
+        <p:txBody>
+          <a:bodyPr/>
+          <a:lstStyle/>
+          <a:p>
+            <a:endParaRPr lang="en-US"/>
+          </a:p>
+        </p:txBody>
       </p:sp>
       <p:sp>
         <p:nvSpPr>
@@ -11143,7 +11283,7 @@
           <a:bodyPr wrap="square" lIns="0" tIns="0" rIns="0" bIns="0" rtlCol="0" anchor="ctr"/>
           <a:lstStyle/>
           <a:p>
-            <a:pPr indent="0" marL="0">
+            <a:pPr marL="0" indent="0">
               <a:buNone/>
             </a:pPr>
             <a:r>
@@ -11181,7 +11321,7 @@
           </a:bodyPr>
           <a:lstStyle/>
           <a:p>
-            <a:pPr indent="0" marL="0">
+            <a:pPr marL="0" indent="0">
               <a:buNone/>
             </a:pPr>
             <a:r>
@@ -11217,7 +11357,7 @@
           <a:bodyPr wrap="square" lIns="0" tIns="0" rIns="0" bIns="0" rtlCol="0" anchor="ctr"/>
           <a:lstStyle/>
           <a:p>
-            <a:pPr algn="ctr" indent="0" marL="0">
+            <a:pPr marL="0" indent="0" algn="ctr">
               <a:buNone/>
             </a:pPr>
             <a:r>
@@ -11252,7 +11392,7 @@
           </a:prstGeom>
           <a:extLst>
             <a:ext uri="{C572A759-6A51-4108-AA02-DFA0A04FC94B}">
-              <ma14:wrappingTextBoxFlag xmlns:ma14="http://schemas.microsoft.com/office/mac/drawingml/2011/main" val="0"/>
+              <ma14:wrappingTextBoxFlag xmlns:ma14="http://schemas.microsoft.com/office/mac/drawingml/2011/main" xmlns="" val="0"/>
             </a:ext>
           </a:extLst>
         </p:spPr>
@@ -11273,7 +11413,7 @@
           <a:p>
             <a:pPr algn="r"/>
             <a:fld id="{F7021451-1387-4CA6-816F-3879F97B5CBC}" type="slidenum">
-              <a:rPr b="0" lang="en-US"/>
+              <a:rPr lang="en-US" b="0"/>
               <a:t>2</a:t>
             </a:fld>
             <a:endParaRPr lang="en-US"/>
@@ -11326,7 +11466,7 @@
           <a:bodyPr wrap="square" lIns="0" tIns="0" rIns="0" bIns="0" rtlCol="0" anchor="ctr"/>
           <a:lstStyle/>
           <a:p>
-            <a:pPr indent="0" marL="0">
+            <a:pPr marL="0" indent="0">
               <a:buNone/>
             </a:pPr>
             <a:r>
@@ -11368,6 +11508,13 @@
             <a:prstDash val="solid"/>
           </a:ln>
         </p:spPr>
+        <p:txBody>
+          <a:bodyPr/>
+          <a:lstStyle/>
+          <a:p>
+            <a:endParaRPr lang="en-US"/>
+          </a:p>
+        </p:txBody>
       </p:sp>
       <p:sp>
         <p:nvSpPr>
@@ -11390,7 +11537,7 @@
           <a:bodyPr wrap="square" lIns="0" tIns="0" rIns="0" bIns="0" rtlCol="0" anchor="ctr"/>
           <a:lstStyle/>
           <a:p>
-            <a:pPr algn="ctr" indent="0" marL="0">
+            <a:pPr marL="0" indent="0" algn="ctr">
               <a:buNone/>
             </a:pPr>
             <a:r>
@@ -11426,7 +11573,7 @@
           <a:bodyPr wrap="square" lIns="0" tIns="0" rIns="0" bIns="0" rtlCol="0" anchor="ctr"/>
           <a:lstStyle/>
           <a:p>
-            <a:pPr algn="ctr" indent="0" marL="0">
+            <a:pPr marL="0" indent="0" algn="ctr">
               <a:buNone/>
             </a:pPr>
             <a:r>
@@ -11465,6 +11612,13 @@
             <a:tailEnd type="triangle"/>
           </a:ln>
         </p:spPr>
+        <p:txBody>
+          <a:bodyPr/>
+          <a:lstStyle/>
+          <a:p>
+            <a:endParaRPr lang="en-US"/>
+          </a:p>
+        </p:txBody>
       </p:sp>
       <p:sp>
         <p:nvSpPr>
@@ -11490,6 +11644,13 @@
             <a:prstDash val="solid"/>
           </a:ln>
         </p:spPr>
+        <p:txBody>
+          <a:bodyPr/>
+          <a:lstStyle/>
+          <a:p>
+            <a:endParaRPr lang="en-US"/>
+          </a:p>
+        </p:txBody>
       </p:sp>
       <p:sp>
         <p:nvSpPr>
@@ -11512,7 +11673,7 @@
           <a:bodyPr wrap="square" lIns="0" tIns="0" rIns="0" bIns="0" rtlCol="0" anchor="ctr"/>
           <a:lstStyle/>
           <a:p>
-            <a:pPr algn="ctr" indent="0" marL="0">
+            <a:pPr marL="0" indent="0" algn="ctr">
               <a:buNone/>
             </a:pPr>
             <a:r>
@@ -11548,7 +11709,7 @@
           <a:bodyPr wrap="square" lIns="0" tIns="0" rIns="0" bIns="0" rtlCol="0" anchor="ctr"/>
           <a:lstStyle/>
           <a:p>
-            <a:pPr algn="ctr" indent="0" marL="0">
+            <a:pPr marL="0" indent="0" algn="ctr">
               <a:buNone/>
             </a:pPr>
             <a:r>
@@ -11587,6 +11748,13 @@
             <a:tailEnd type="triangle"/>
           </a:ln>
         </p:spPr>
+        <p:txBody>
+          <a:bodyPr/>
+          <a:lstStyle/>
+          <a:p>
+            <a:endParaRPr lang="en-US"/>
+          </a:p>
+        </p:txBody>
       </p:sp>
       <p:sp>
         <p:nvSpPr>
@@ -11612,6 +11780,13 @@
             <a:prstDash val="solid"/>
           </a:ln>
         </p:spPr>
+        <p:txBody>
+          <a:bodyPr/>
+          <a:lstStyle/>
+          <a:p>
+            <a:endParaRPr lang="en-US"/>
+          </a:p>
+        </p:txBody>
       </p:sp>
       <p:sp>
         <p:nvSpPr>
@@ -11634,7 +11809,7 @@
           <a:bodyPr wrap="square" lIns="0" tIns="0" rIns="0" bIns="0" rtlCol="0" anchor="ctr"/>
           <a:lstStyle/>
           <a:p>
-            <a:pPr algn="ctr" indent="0" marL="0">
+            <a:pPr marL="0" indent="0" algn="ctr">
               <a:buNone/>
             </a:pPr>
             <a:r>
@@ -11670,7 +11845,7 @@
           <a:bodyPr wrap="square" lIns="0" tIns="0" rIns="0" bIns="0" rtlCol="0" anchor="ctr"/>
           <a:lstStyle/>
           <a:p>
-            <a:pPr algn="ctr" indent="0" marL="0">
+            <a:pPr marL="0" indent="0" algn="ctr">
               <a:buNone/>
             </a:pPr>
             <a:r>
@@ -11709,6 +11884,13 @@
             <a:tailEnd type="triangle"/>
           </a:ln>
         </p:spPr>
+        <p:txBody>
+          <a:bodyPr/>
+          <a:lstStyle/>
+          <a:p>
+            <a:endParaRPr lang="en-US"/>
+          </a:p>
+        </p:txBody>
       </p:sp>
       <p:sp>
         <p:nvSpPr>
@@ -11734,6 +11916,13 @@
             <a:prstDash val="solid"/>
           </a:ln>
         </p:spPr>
+        <p:txBody>
+          <a:bodyPr/>
+          <a:lstStyle/>
+          <a:p>
+            <a:endParaRPr lang="en-US"/>
+          </a:p>
+        </p:txBody>
       </p:sp>
       <p:sp>
         <p:nvSpPr>
@@ -11756,7 +11945,7 @@
           <a:bodyPr wrap="square" lIns="0" tIns="0" rIns="0" bIns="0" rtlCol="0" anchor="ctr"/>
           <a:lstStyle/>
           <a:p>
-            <a:pPr algn="ctr" indent="0" marL="0">
+            <a:pPr marL="0" indent="0" algn="ctr">
               <a:buNone/>
             </a:pPr>
             <a:r>
@@ -11792,7 +11981,7 @@
           <a:bodyPr wrap="square" lIns="0" tIns="0" rIns="0" bIns="0" rtlCol="0" anchor="ctr"/>
           <a:lstStyle/>
           <a:p>
-            <a:pPr algn="ctr" indent="0" marL="0">
+            <a:pPr marL="0" indent="0" algn="ctr">
               <a:buNone/>
             </a:pPr>
             <a:r>
@@ -11828,7 +12017,7 @@
           <a:bodyPr wrap="square" lIns="0" tIns="0" rIns="0" bIns="0" rtlCol="0" anchor="ctr"/>
           <a:lstStyle/>
           <a:p>
-            <a:pPr indent="0" marL="0">
+            <a:pPr marL="0" indent="0">
               <a:buNone/>
             </a:pPr>
             <a:r>
@@ -11866,7 +12055,7 @@
           </a:bodyPr>
           <a:lstStyle/>
           <a:p>
-            <a:pPr indent="0" marL="0">
+            <a:pPr marL="0" indent="0">
               <a:buNone/>
             </a:pPr>
             <a:r>
@@ -11904,7 +12093,7 @@
           </a:bodyPr>
           <a:lstStyle/>
           <a:p>
-            <a:pPr algn="ctr" indent="0" marL="0">
+            <a:pPr marL="0" indent="0" algn="ctr">
               <a:buNone/>
             </a:pPr>
             <a:r>
@@ -11939,7 +12128,7 @@
           </a:prstGeom>
           <a:extLst>
             <a:ext uri="{C572A759-6A51-4108-AA02-DFA0A04FC94B}">
-              <ma14:wrappingTextBoxFlag xmlns:ma14="http://schemas.microsoft.com/office/mac/drawingml/2011/main" val="0"/>
+              <ma14:wrappingTextBoxFlag xmlns:ma14="http://schemas.microsoft.com/office/mac/drawingml/2011/main" xmlns="" val="0"/>
             </a:ext>
           </a:extLst>
         </p:spPr>
@@ -11960,7 +12149,7 @@
           <a:p>
             <a:pPr algn="r"/>
             <a:fld id="{F7021451-1387-4CA6-816F-3879F97B5CBC}" type="slidenum">
-              <a:rPr b="0" lang="en-US"/>
+              <a:rPr lang="en-US" b="0"/>
               <a:t>3</a:t>
             </a:fld>
             <a:endParaRPr lang="en-US"/>
@@ -12013,7 +12202,7 @@
           <a:bodyPr wrap="square" lIns="0" tIns="0" rIns="0" bIns="0" rtlCol="0" anchor="ctr"/>
           <a:lstStyle/>
           <a:p>
-            <a:pPr indent="0" marL="0">
+            <a:pPr marL="0" indent="0">
               <a:buNone/>
             </a:pPr>
             <a:r>
@@ -12057,6 +12246,13 @@
             <a:prstDash val="solid"/>
           </a:ln>
         </p:spPr>
+        <p:txBody>
+          <a:bodyPr/>
+          <a:lstStyle/>
+          <a:p>
+            <a:endParaRPr lang="en-US"/>
+          </a:p>
+        </p:txBody>
       </p:sp>
       <p:sp>
         <p:nvSpPr>
@@ -12082,6 +12278,13 @@
             <a:prstDash val="solid"/>
           </a:ln>
         </p:spPr>
+        <p:txBody>
+          <a:bodyPr/>
+          <a:lstStyle/>
+          <a:p>
+            <a:endParaRPr lang="en-US"/>
+          </a:p>
+        </p:txBody>
       </p:sp>
       <p:sp>
         <p:nvSpPr>
@@ -12104,7 +12307,7 @@
           <a:bodyPr wrap="square" lIns="0" tIns="0" rIns="0" bIns="0" rtlCol="0" anchor="ctr"/>
           <a:lstStyle/>
           <a:p>
-            <a:pPr indent="0" marL="0">
+            <a:pPr marL="0" indent="0">
               <a:buNone/>
             </a:pPr>
             <a:r>
@@ -12142,7 +12345,7 @@
           </a:bodyPr>
           <a:lstStyle/>
           <a:p>
-            <a:pPr indent="0" marL="0">
+            <a:pPr marL="0" indent="0">
               <a:buNone/>
             </a:pPr>
             <a:r>
@@ -12183,6 +12386,13 @@
             <a:prstDash val="solid"/>
           </a:ln>
         </p:spPr>
+        <p:txBody>
+          <a:bodyPr/>
+          <a:lstStyle/>
+          <a:p>
+            <a:endParaRPr lang="en-US"/>
+          </a:p>
+        </p:txBody>
       </p:sp>
       <p:sp>
         <p:nvSpPr>
@@ -12208,6 +12418,13 @@
             <a:prstDash val="solid"/>
           </a:ln>
         </p:spPr>
+        <p:txBody>
+          <a:bodyPr/>
+          <a:lstStyle/>
+          <a:p>
+            <a:endParaRPr lang="en-US"/>
+          </a:p>
+        </p:txBody>
       </p:sp>
       <p:sp>
         <p:nvSpPr>
@@ -12230,7 +12447,7 @@
           <a:bodyPr wrap="square" lIns="0" tIns="0" rIns="0" bIns="0" rtlCol="0" anchor="ctr"/>
           <a:lstStyle/>
           <a:p>
-            <a:pPr indent="0" marL="0">
+            <a:pPr marL="0" indent="0">
               <a:buNone/>
             </a:pPr>
             <a:r>
@@ -12268,7 +12485,7 @@
           </a:bodyPr>
           <a:lstStyle/>
           <a:p>
-            <a:pPr indent="0" marL="0">
+            <a:pPr marL="0" indent="0">
               <a:buNone/>
             </a:pPr>
             <a:r>
@@ -12309,6 +12526,13 @@
             <a:prstDash val="solid"/>
           </a:ln>
         </p:spPr>
+        <p:txBody>
+          <a:bodyPr/>
+          <a:lstStyle/>
+          <a:p>
+            <a:endParaRPr lang="en-US"/>
+          </a:p>
+        </p:txBody>
       </p:sp>
       <p:sp>
         <p:nvSpPr>
@@ -12334,6 +12558,13 @@
             <a:prstDash val="solid"/>
           </a:ln>
         </p:spPr>
+        <p:txBody>
+          <a:bodyPr/>
+          <a:lstStyle/>
+          <a:p>
+            <a:endParaRPr lang="en-US"/>
+          </a:p>
+        </p:txBody>
       </p:sp>
       <p:sp>
         <p:nvSpPr>
@@ -12356,7 +12587,7 @@
           <a:bodyPr wrap="square" lIns="0" tIns="0" rIns="0" bIns="0" rtlCol="0" anchor="ctr"/>
           <a:lstStyle/>
           <a:p>
-            <a:pPr indent="0" marL="0">
+            <a:pPr marL="0" indent="0">
               <a:buNone/>
             </a:pPr>
             <a:r>
@@ -12394,7 +12625,7 @@
           </a:bodyPr>
           <a:lstStyle/>
           <a:p>
-            <a:pPr indent="0" marL="0">
+            <a:pPr marL="0" indent="0">
               <a:buNone/>
             </a:pPr>
             <a:r>
@@ -12430,7 +12661,7 @@
           <a:bodyPr wrap="square" lIns="0" tIns="0" rIns="0" bIns="0" rtlCol="0" anchor="ctr"/>
           <a:lstStyle/>
           <a:p>
-            <a:pPr algn="ctr" indent="0" marL="0">
+            <a:pPr marL="0" indent="0" algn="ctr">
               <a:buNone/>
             </a:pPr>
             <a:r>
@@ -12466,7 +12697,7 @@
           <a:bodyPr wrap="square" lIns="0" tIns="0" rIns="0" bIns="0" rtlCol="0" anchor="ctr"/>
           <a:lstStyle/>
           <a:p>
-            <a:pPr algn="ctr" indent="0" marL="0">
+            <a:pPr marL="0" indent="0" algn="ctr">
               <a:buNone/>
             </a:pPr>
             <a:r>
@@ -12501,7 +12732,7 @@
           </a:prstGeom>
           <a:extLst>
             <a:ext uri="{C572A759-6A51-4108-AA02-DFA0A04FC94B}">
-              <ma14:wrappingTextBoxFlag xmlns:ma14="http://schemas.microsoft.com/office/mac/drawingml/2011/main" val="0"/>
+              <ma14:wrappingTextBoxFlag xmlns:ma14="http://schemas.microsoft.com/office/mac/drawingml/2011/main" xmlns="" val="0"/>
             </a:ext>
           </a:extLst>
         </p:spPr>
@@ -12522,7 +12753,7 @@
           <a:p>
             <a:pPr algn="r"/>
             <a:fld id="{F7021451-1387-4CA6-816F-3879F97B5CBC}" type="slidenum">
-              <a:rPr b="0" lang="en-US"/>
+              <a:rPr lang="en-US" b="0"/>
               <a:t>4</a:t>
             </a:fld>
             <a:endParaRPr lang="en-US"/>
@@ -12575,7 +12806,7 @@
           <a:bodyPr wrap="square" lIns="0" tIns="0" rIns="0" bIns="0" rtlCol="0" anchor="ctr"/>
           <a:lstStyle/>
           <a:p>
-            <a:pPr indent="0" marL="0">
+            <a:pPr marL="0" indent="0">
               <a:buNone/>
             </a:pPr>
             <a:r>
@@ -12614,7 +12845,7 @@
           <a:bodyPr wrap="square" lIns="0" tIns="0" rIns="0" bIns="0" rtlCol="0" anchor="ctr"/>
           <a:lstStyle/>
           <a:p>
-            <a:pPr indent="0" marL="0">
+            <a:pPr marL="0" indent="0">
               <a:buNone/>
             </a:pPr>
             <a:r>
@@ -12645,17 +12876,41 @@
         </p:nvGraphicFramePr>
         <p:xfrm>
           <a:off x="594360" y="1481328"/>
-          <a:ext cx="5486400" cy="4160520"/>
+          <a:ext cx="5212080" cy="3822192"/>
         </p:xfrm>
         <a:graphic>
           <a:graphicData uri="http://schemas.openxmlformats.org/drawingml/2006/table">
             <a:tbl>
               <a:tblPr/>
               <a:tblGrid>
-                <a:gridCol w="914400"/>
-                <a:gridCol w="1600200"/>
-                <a:gridCol w="1691640"/>
-                <a:gridCol w="1005840"/>
+                <a:gridCol w="914400">
+                  <a:extLst>
+                    <a:ext uri="{9D8B030D-6E8A-4147-A177-3AD203B41FA5}">
+                      <a16:colId xmlns:a16="http://schemas.microsoft.com/office/drawing/2014/main" val="20000"/>
+                    </a:ext>
+                  </a:extLst>
+                </a:gridCol>
+                <a:gridCol w="1600200">
+                  <a:extLst>
+                    <a:ext uri="{9D8B030D-6E8A-4147-A177-3AD203B41FA5}">
+                      <a16:colId xmlns:a16="http://schemas.microsoft.com/office/drawing/2014/main" val="20001"/>
+                    </a:ext>
+                  </a:extLst>
+                </a:gridCol>
+                <a:gridCol w="1691640">
+                  <a:extLst>
+                    <a:ext uri="{9D8B030D-6E8A-4147-A177-3AD203B41FA5}">
+                      <a16:colId xmlns:a16="http://schemas.microsoft.com/office/drawing/2014/main" val="20002"/>
+                    </a:ext>
+                  </a:extLst>
+                </a:gridCol>
+                <a:gridCol w="1005840">
+                  <a:extLst>
+                    <a:ext uri="{9D8B030D-6E8A-4147-A177-3AD203B41FA5}">
+                      <a16:colId xmlns:a16="http://schemas.microsoft.com/office/drawing/2014/main" val="20003"/>
+                    </a:ext>
+                  </a:extLst>
+                </a:gridCol>
               </a:tblGrid>
               <a:tr h="347472">
                 <a:tc>
@@ -12663,7 +12918,7 @@
                     <a:bodyPr/>
                     <a:lstStyle/>
                     <a:p>
-                      <a:pPr algn="r" indent="0" marL="0">
+                      <a:pPr marL="0" indent="0" algn="r">
                         <a:buNone/>
                       </a:pPr>
                       <a:endParaRPr lang="en-US" sz="1400" dirty="0">
@@ -12673,7 +12928,7 @@
                       </a:endParaRPr>
                     </a:p>
                   </a:txBody>
-                  <a:tcPr marL="64008" marR="64008" marT="64008" marB="64008" anchor="mid">
+                  <a:tcPr marL="64008" marR="64008" marT="64008" marB="64008">
                     <a:lnL w="6350" cap="flat" cmpd="sng" algn="ctr">
                       <a:solidFill>
                         <a:srgbClr val="6C7D80"/>
@@ -12720,7 +12975,7 @@
                     <a:bodyPr/>
                     <a:lstStyle/>
                     <a:p>
-                      <a:pPr algn="r" indent="0" marL="0">
+                      <a:pPr marL="0" indent="0" algn="r">
                         <a:buNone/>
                       </a:pPr>
                       <a:r>
@@ -12741,7 +12996,7 @@
                       </a:endParaRPr>
                     </a:p>
                   </a:txBody>
-                  <a:tcPr marL="64008" marR="64008" marT="64008" marB="64008" anchor="mid">
+                  <a:tcPr marL="64008" marR="64008" marT="64008" marB="64008">
                     <a:lnL w="6350" cap="flat" cmpd="sng" algn="ctr">
                       <a:solidFill>
                         <a:srgbClr val="6C7D80"/>
@@ -12788,7 +13043,7 @@
                     <a:bodyPr/>
                     <a:lstStyle/>
                     <a:p>
-                      <a:pPr algn="r" indent="0" marL="0">
+                      <a:pPr marL="0" indent="0" algn="r">
                         <a:buNone/>
                       </a:pPr>
                       <a:r>
@@ -12809,7 +13064,7 @@
                       </a:endParaRPr>
                     </a:p>
                   </a:txBody>
-                  <a:tcPr marL="64008" marR="64008" marT="64008" marB="64008" anchor="mid">
+                  <a:tcPr marL="64008" marR="64008" marT="64008" marB="64008">
                     <a:lnL w="6350" cap="flat" cmpd="sng" algn="ctr">
                       <a:solidFill>
                         <a:srgbClr val="6C7D80"/>
@@ -12856,7 +13111,7 @@
                     <a:bodyPr/>
                     <a:lstStyle/>
                     <a:p>
-                      <a:pPr algn="r" indent="0" marL="0">
+                      <a:pPr marL="0" indent="0" algn="r">
                         <a:buNone/>
                       </a:pPr>
                       <a:r>
@@ -12877,7 +13132,7 @@
                       </a:endParaRPr>
                     </a:p>
                   </a:txBody>
-                  <a:tcPr marL="64008" marR="64008" marT="64008" marB="64008" anchor="mid">
+                  <a:tcPr marL="64008" marR="64008" marT="64008" marB="64008">
                     <a:lnL w="6350" cap="flat" cmpd="sng" algn="ctr">
                       <a:solidFill>
                         <a:srgbClr val="6C7D80"/>
@@ -12919,6 +13174,11 @@
                     </a:solidFill>
                   </a:tcPr>
                 </a:tc>
+                <a:extLst>
+                  <a:ext uri="{0D108BD9-81ED-4DB2-BD59-A6C34878D82A}">
+                    <a16:rowId xmlns:a16="http://schemas.microsoft.com/office/drawing/2014/main" val="10000"/>
+                  </a:ext>
+                </a:extLst>
               </a:tr>
               <a:tr h="347472">
                 <a:tc>
@@ -12926,7 +13186,7 @@
                     <a:bodyPr/>
                     <a:lstStyle/>
                     <a:p>
-                      <a:pPr algn="r" indent="0" marL="0">
+                      <a:pPr marL="0" indent="0" algn="r">
                         <a:buNone/>
                       </a:pPr>
                       <a:r>
@@ -12947,7 +13207,7 @@
                       </a:endParaRPr>
                     </a:p>
                   </a:txBody>
-                  <a:tcPr marL="64008" marR="64008" marT="64008" marB="64008" anchor="mid">
+                  <a:tcPr marL="64008" marR="64008" marT="64008" marB="64008">
                     <a:lnL w="6350" cap="flat" cmpd="sng" algn="ctr">
                       <a:solidFill>
                         <a:srgbClr val="6C7D80"/>
@@ -12994,7 +13254,7 @@
                     <a:bodyPr/>
                     <a:lstStyle/>
                     <a:p>
-                      <a:pPr algn="r" indent="0" marL="0">
+                      <a:pPr marL="0" indent="0" algn="r">
                         <a:buNone/>
                       </a:pPr>
                       <a:r>
@@ -13015,7 +13275,7 @@
                       </a:endParaRPr>
                     </a:p>
                   </a:txBody>
-                  <a:tcPr marL="64008" marR="64008" marT="64008" marB="64008" anchor="mid">
+                  <a:tcPr marL="64008" marR="64008" marT="64008" marB="64008">
                     <a:lnL w="6350" cap="flat" cmpd="sng" algn="ctr">
                       <a:solidFill>
                         <a:srgbClr val="6C7D80"/>
@@ -13062,7 +13322,7 @@
                     <a:bodyPr/>
                     <a:lstStyle/>
                     <a:p>
-                      <a:pPr algn="r" indent="0" marL="0">
+                      <a:pPr marL="0" indent="0" algn="r">
                         <a:buNone/>
                       </a:pPr>
                       <a:r>
@@ -13083,7 +13343,7 @@
                       </a:endParaRPr>
                     </a:p>
                   </a:txBody>
-                  <a:tcPr marL="64008" marR="64008" marT="64008" marB="64008" anchor="mid">
+                  <a:tcPr marL="64008" marR="64008" marT="64008" marB="64008">
                     <a:lnL w="6350" cap="flat" cmpd="sng" algn="ctr">
                       <a:solidFill>
                         <a:srgbClr val="6C7D80"/>
@@ -13130,7 +13390,7 @@
                     <a:bodyPr/>
                     <a:lstStyle/>
                     <a:p>
-                      <a:pPr algn="r" indent="0" marL="0">
+                      <a:pPr marL="0" indent="0" algn="r">
                         <a:buNone/>
                       </a:pPr>
                       <a:r>
@@ -13151,7 +13411,7 @@
                       </a:endParaRPr>
                     </a:p>
                   </a:txBody>
-                  <a:tcPr marL="64008" marR="64008" marT="64008" marB="64008" anchor="mid">
+                  <a:tcPr marL="64008" marR="64008" marT="64008" marB="64008">
                     <a:lnL w="6350" cap="flat" cmpd="sng" algn="ctr">
                       <a:solidFill>
                         <a:srgbClr val="6C7D80"/>
@@ -13193,6 +13453,11 @@
                     </a:solidFill>
                   </a:tcPr>
                 </a:tc>
+                <a:extLst>
+                  <a:ext uri="{0D108BD9-81ED-4DB2-BD59-A6C34878D82A}">
+                    <a16:rowId xmlns:a16="http://schemas.microsoft.com/office/drawing/2014/main" val="10001"/>
+                  </a:ext>
+                </a:extLst>
               </a:tr>
               <a:tr h="347472">
                 <a:tc>
@@ -13200,7 +13465,7 @@
                     <a:bodyPr/>
                     <a:lstStyle/>
                     <a:p>
-                      <a:pPr algn="r" indent="0" marL="0">
+                      <a:pPr marL="0" indent="0" algn="r">
                         <a:buNone/>
                       </a:pPr>
                       <a:r>
@@ -13221,7 +13486,7 @@
                       </a:endParaRPr>
                     </a:p>
                   </a:txBody>
-                  <a:tcPr marL="64008" marR="64008" marT="64008" marB="64008" anchor="mid">
+                  <a:tcPr marL="64008" marR="64008" marT="64008" marB="64008">
                     <a:lnL w="6350" cap="flat" cmpd="sng" algn="ctr">
                       <a:solidFill>
                         <a:srgbClr val="6C7D80"/>
@@ -13268,7 +13533,7 @@
                     <a:bodyPr/>
                     <a:lstStyle/>
                     <a:p>
-                      <a:pPr algn="r" indent="0" marL="0">
+                      <a:pPr marL="0" indent="0" algn="r">
                         <a:buNone/>
                       </a:pPr>
                       <a:r>
@@ -13289,7 +13554,7 @@
                       </a:endParaRPr>
                     </a:p>
                   </a:txBody>
-                  <a:tcPr marL="64008" marR="64008" marT="64008" marB="64008" anchor="mid">
+                  <a:tcPr marL="64008" marR="64008" marT="64008" marB="64008">
                     <a:lnL w="6350" cap="flat" cmpd="sng" algn="ctr">
                       <a:solidFill>
                         <a:srgbClr val="6C7D80"/>
@@ -13336,7 +13601,7 @@
                     <a:bodyPr/>
                     <a:lstStyle/>
                     <a:p>
-                      <a:pPr algn="r" indent="0" marL="0">
+                      <a:pPr marL="0" indent="0" algn="r">
                         <a:buNone/>
                       </a:pPr>
                       <a:r>
@@ -13357,7 +13622,7 @@
                       </a:endParaRPr>
                     </a:p>
                   </a:txBody>
-                  <a:tcPr marL="64008" marR="64008" marT="64008" marB="64008" anchor="mid">
+                  <a:tcPr marL="64008" marR="64008" marT="64008" marB="64008">
                     <a:lnL w="6350" cap="flat" cmpd="sng" algn="ctr">
                       <a:solidFill>
                         <a:srgbClr val="6C7D80"/>
@@ -13404,7 +13669,7 @@
                     <a:bodyPr/>
                     <a:lstStyle/>
                     <a:p>
-                      <a:pPr algn="r" indent="0" marL="0">
+                      <a:pPr marL="0" indent="0" algn="r">
                         <a:buNone/>
                       </a:pPr>
                       <a:r>
@@ -13425,7 +13690,7 @@
                       </a:endParaRPr>
                     </a:p>
                   </a:txBody>
-                  <a:tcPr marL="64008" marR="64008" marT="64008" marB="64008" anchor="mid">
+                  <a:tcPr marL="64008" marR="64008" marT="64008" marB="64008">
                     <a:lnL w="6350" cap="flat" cmpd="sng" algn="ctr">
                       <a:solidFill>
                         <a:srgbClr val="6C7D80"/>
@@ -13467,6 +13732,11 @@
                     </a:solidFill>
                   </a:tcPr>
                 </a:tc>
+                <a:extLst>
+                  <a:ext uri="{0D108BD9-81ED-4DB2-BD59-A6C34878D82A}">
+                    <a16:rowId xmlns:a16="http://schemas.microsoft.com/office/drawing/2014/main" val="10002"/>
+                  </a:ext>
+                </a:extLst>
               </a:tr>
               <a:tr h="347472">
                 <a:tc>
@@ -13474,7 +13744,7 @@
                     <a:bodyPr/>
                     <a:lstStyle/>
                     <a:p>
-                      <a:pPr algn="r" indent="0" marL="0">
+                      <a:pPr marL="0" indent="0" algn="r">
                         <a:buNone/>
                       </a:pPr>
                       <a:r>
@@ -13495,7 +13765,7 @@
                       </a:endParaRPr>
                     </a:p>
                   </a:txBody>
-                  <a:tcPr marL="64008" marR="64008" marT="64008" marB="64008" anchor="mid">
+                  <a:tcPr marL="64008" marR="64008" marT="64008" marB="64008">
                     <a:lnL w="6350" cap="flat" cmpd="sng" algn="ctr">
                       <a:solidFill>
                         <a:srgbClr val="6C7D80"/>
@@ -13542,7 +13812,7 @@
                     <a:bodyPr/>
                     <a:lstStyle/>
                     <a:p>
-                      <a:pPr algn="r" indent="0" marL="0">
+                      <a:pPr marL="0" indent="0" algn="r">
                         <a:buNone/>
                       </a:pPr>
                       <a:r>
@@ -13563,7 +13833,7 @@
                       </a:endParaRPr>
                     </a:p>
                   </a:txBody>
-                  <a:tcPr marL="64008" marR="64008" marT="64008" marB="64008" anchor="mid">
+                  <a:tcPr marL="64008" marR="64008" marT="64008" marB="64008">
                     <a:lnL w="6350" cap="flat" cmpd="sng" algn="ctr">
                       <a:solidFill>
                         <a:srgbClr val="6C7D80"/>
@@ -13610,7 +13880,7 @@
                     <a:bodyPr/>
                     <a:lstStyle/>
                     <a:p>
-                      <a:pPr algn="r" indent="0" marL="0">
+                      <a:pPr marL="0" indent="0" algn="r">
                         <a:buNone/>
                       </a:pPr>
                       <a:r>
@@ -13631,7 +13901,7 @@
                       </a:endParaRPr>
                     </a:p>
                   </a:txBody>
-                  <a:tcPr marL="64008" marR="64008" marT="64008" marB="64008" anchor="mid">
+                  <a:tcPr marL="64008" marR="64008" marT="64008" marB="64008">
                     <a:lnL w="6350" cap="flat" cmpd="sng" algn="ctr">
                       <a:solidFill>
                         <a:srgbClr val="6C7D80"/>
@@ -13678,7 +13948,7 @@
                     <a:bodyPr/>
                     <a:lstStyle/>
                     <a:p>
-                      <a:pPr algn="r" indent="0" marL="0">
+                      <a:pPr marL="0" indent="0" algn="r">
                         <a:buNone/>
                       </a:pPr>
                       <a:r>
@@ -13699,7 +13969,7 @@
                       </a:endParaRPr>
                     </a:p>
                   </a:txBody>
-                  <a:tcPr marL="64008" marR="64008" marT="64008" marB="64008" anchor="mid">
+                  <a:tcPr marL="64008" marR="64008" marT="64008" marB="64008">
                     <a:lnL w="6350" cap="flat" cmpd="sng" algn="ctr">
                       <a:solidFill>
                         <a:srgbClr val="6C7D80"/>
@@ -13741,6 +14011,11 @@
                     </a:solidFill>
                   </a:tcPr>
                 </a:tc>
+                <a:extLst>
+                  <a:ext uri="{0D108BD9-81ED-4DB2-BD59-A6C34878D82A}">
+                    <a16:rowId xmlns:a16="http://schemas.microsoft.com/office/drawing/2014/main" val="10003"/>
+                  </a:ext>
+                </a:extLst>
               </a:tr>
               <a:tr h="347472">
                 <a:tc>
@@ -13748,7 +14023,7 @@
                     <a:bodyPr/>
                     <a:lstStyle/>
                     <a:p>
-                      <a:pPr algn="r" indent="0" marL="0">
+                      <a:pPr marL="0" indent="0" algn="r">
                         <a:buNone/>
                       </a:pPr>
                       <a:r>
@@ -13769,7 +14044,7 @@
                       </a:endParaRPr>
                     </a:p>
                   </a:txBody>
-                  <a:tcPr marL="64008" marR="64008" marT="64008" marB="64008" anchor="mid">
+                  <a:tcPr marL="64008" marR="64008" marT="64008" marB="64008">
                     <a:lnL w="6350" cap="flat" cmpd="sng" algn="ctr">
                       <a:solidFill>
                         <a:srgbClr val="6C7D80"/>
@@ -13816,7 +14091,7 @@
                     <a:bodyPr/>
                     <a:lstStyle/>
                     <a:p>
-                      <a:pPr algn="r" indent="0" marL="0">
+                      <a:pPr marL="0" indent="0" algn="r">
                         <a:buNone/>
                       </a:pPr>
                       <a:r>
@@ -13837,7 +14112,7 @@
                       </a:endParaRPr>
                     </a:p>
                   </a:txBody>
-                  <a:tcPr marL="64008" marR="64008" marT="64008" marB="64008" anchor="mid">
+                  <a:tcPr marL="64008" marR="64008" marT="64008" marB="64008">
                     <a:lnL w="6350" cap="flat" cmpd="sng" algn="ctr">
                       <a:solidFill>
                         <a:srgbClr val="6C7D80"/>
@@ -13884,7 +14159,7 @@
                     <a:bodyPr/>
                     <a:lstStyle/>
                     <a:p>
-                      <a:pPr algn="r" indent="0" marL="0">
+                      <a:pPr marL="0" indent="0" algn="r">
                         <a:buNone/>
                       </a:pPr>
                       <a:r>
@@ -13905,7 +14180,7 @@
                       </a:endParaRPr>
                     </a:p>
                   </a:txBody>
-                  <a:tcPr marL="64008" marR="64008" marT="64008" marB="64008" anchor="mid">
+                  <a:tcPr marL="64008" marR="64008" marT="64008" marB="64008">
                     <a:lnL w="6350" cap="flat" cmpd="sng" algn="ctr">
                       <a:solidFill>
                         <a:srgbClr val="6C7D80"/>
@@ -13952,7 +14227,7 @@
                     <a:bodyPr/>
                     <a:lstStyle/>
                     <a:p>
-                      <a:pPr algn="r" indent="0" marL="0">
+                      <a:pPr marL="0" indent="0" algn="r">
                         <a:buNone/>
                       </a:pPr>
                       <a:r>
@@ -13973,7 +14248,7 @@
                       </a:endParaRPr>
                     </a:p>
                   </a:txBody>
-                  <a:tcPr marL="64008" marR="64008" marT="64008" marB="64008" anchor="mid">
+                  <a:tcPr marL="64008" marR="64008" marT="64008" marB="64008">
                     <a:lnL w="6350" cap="flat" cmpd="sng" algn="ctr">
                       <a:solidFill>
                         <a:srgbClr val="6C7D80"/>
@@ -14015,6 +14290,11 @@
                     </a:solidFill>
                   </a:tcPr>
                 </a:tc>
+                <a:extLst>
+                  <a:ext uri="{0D108BD9-81ED-4DB2-BD59-A6C34878D82A}">
+                    <a16:rowId xmlns:a16="http://schemas.microsoft.com/office/drawing/2014/main" val="10004"/>
+                  </a:ext>
+                </a:extLst>
               </a:tr>
               <a:tr h="347472">
                 <a:tc>
@@ -14022,7 +14302,7 @@
                     <a:bodyPr/>
                     <a:lstStyle/>
                     <a:p>
-                      <a:pPr algn="r" indent="0" marL="0">
+                      <a:pPr marL="0" indent="0" algn="r">
                         <a:buNone/>
                       </a:pPr>
                       <a:r>
@@ -14043,7 +14323,7 @@
                       </a:endParaRPr>
                     </a:p>
                   </a:txBody>
-                  <a:tcPr marL="64008" marR="64008" marT="64008" marB="64008" anchor="mid">
+                  <a:tcPr marL="64008" marR="64008" marT="64008" marB="64008">
                     <a:lnL w="6350" cap="flat" cmpd="sng" algn="ctr">
                       <a:solidFill>
                         <a:srgbClr val="6C7D80"/>
@@ -14090,7 +14370,7 @@
                     <a:bodyPr/>
                     <a:lstStyle/>
                     <a:p>
-                      <a:pPr algn="r" indent="0" marL="0">
+                      <a:pPr marL="0" indent="0" algn="r">
                         <a:buNone/>
                       </a:pPr>
                       <a:r>
@@ -14111,7 +14391,7 @@
                       </a:endParaRPr>
                     </a:p>
                   </a:txBody>
-                  <a:tcPr marL="64008" marR="64008" marT="64008" marB="64008" anchor="mid">
+                  <a:tcPr marL="64008" marR="64008" marT="64008" marB="64008">
                     <a:lnL w="6350" cap="flat" cmpd="sng" algn="ctr">
                       <a:solidFill>
                         <a:srgbClr val="6C7D80"/>
@@ -14158,7 +14438,7 @@
                     <a:bodyPr/>
                     <a:lstStyle/>
                     <a:p>
-                      <a:pPr algn="r" indent="0" marL="0">
+                      <a:pPr marL="0" indent="0" algn="r">
                         <a:buNone/>
                       </a:pPr>
                       <a:r>
@@ -14179,7 +14459,7 @@
                       </a:endParaRPr>
                     </a:p>
                   </a:txBody>
-                  <a:tcPr marL="64008" marR="64008" marT="64008" marB="64008" anchor="mid">
+                  <a:tcPr marL="64008" marR="64008" marT="64008" marB="64008">
                     <a:lnL w="6350" cap="flat" cmpd="sng" algn="ctr">
                       <a:solidFill>
                         <a:srgbClr val="6C7D80"/>
@@ -14226,7 +14506,7 @@
                     <a:bodyPr/>
                     <a:lstStyle/>
                     <a:p>
-                      <a:pPr algn="r" indent="0" marL="0">
+                      <a:pPr marL="0" indent="0" algn="r">
                         <a:buNone/>
                       </a:pPr>
                       <a:r>
@@ -14247,7 +14527,7 @@
                       </a:endParaRPr>
                     </a:p>
                   </a:txBody>
-                  <a:tcPr marL="64008" marR="64008" marT="64008" marB="64008" anchor="mid">
+                  <a:tcPr marL="64008" marR="64008" marT="64008" marB="64008">
                     <a:lnL w="6350" cap="flat" cmpd="sng" algn="ctr">
                       <a:solidFill>
                         <a:srgbClr val="6C7D80"/>
@@ -14289,6 +14569,11 @@
                     </a:solidFill>
                   </a:tcPr>
                 </a:tc>
+                <a:extLst>
+                  <a:ext uri="{0D108BD9-81ED-4DB2-BD59-A6C34878D82A}">
+                    <a16:rowId xmlns:a16="http://schemas.microsoft.com/office/drawing/2014/main" val="10005"/>
+                  </a:ext>
+                </a:extLst>
               </a:tr>
               <a:tr h="347472">
                 <a:tc>
@@ -14296,7 +14581,7 @@
                     <a:bodyPr/>
                     <a:lstStyle/>
                     <a:p>
-                      <a:pPr algn="r" indent="0" marL="0">
+                      <a:pPr marL="0" indent="0" algn="r">
                         <a:buNone/>
                       </a:pPr>
                       <a:r>
@@ -14317,7 +14602,7 @@
                       </a:endParaRPr>
                     </a:p>
                   </a:txBody>
-                  <a:tcPr marL="64008" marR="64008" marT="64008" marB="64008" anchor="mid">
+                  <a:tcPr marL="64008" marR="64008" marT="64008" marB="64008">
                     <a:lnL w="6350" cap="flat" cmpd="sng" algn="ctr">
                       <a:solidFill>
                         <a:srgbClr val="6C7D80"/>
@@ -14364,7 +14649,7 @@
                     <a:bodyPr/>
                     <a:lstStyle/>
                     <a:p>
-                      <a:pPr algn="r" indent="0" marL="0">
+                      <a:pPr marL="0" indent="0" algn="r">
                         <a:buNone/>
                       </a:pPr>
                       <a:r>
@@ -14385,7 +14670,7 @@
                       </a:endParaRPr>
                     </a:p>
                   </a:txBody>
-                  <a:tcPr marL="64008" marR="64008" marT="64008" marB="64008" anchor="mid">
+                  <a:tcPr marL="64008" marR="64008" marT="64008" marB="64008">
                     <a:lnL w="6350" cap="flat" cmpd="sng" algn="ctr">
                       <a:solidFill>
                         <a:srgbClr val="6C7D80"/>
@@ -14432,7 +14717,7 @@
                     <a:bodyPr/>
                     <a:lstStyle/>
                     <a:p>
-                      <a:pPr algn="r" indent="0" marL="0">
+                      <a:pPr marL="0" indent="0" algn="r">
                         <a:buNone/>
                       </a:pPr>
                       <a:r>
@@ -14453,7 +14738,7 @@
                       </a:endParaRPr>
                     </a:p>
                   </a:txBody>
-                  <a:tcPr marL="64008" marR="64008" marT="64008" marB="64008" anchor="mid">
+                  <a:tcPr marL="64008" marR="64008" marT="64008" marB="64008">
                     <a:lnL w="6350" cap="flat" cmpd="sng" algn="ctr">
                       <a:solidFill>
                         <a:srgbClr val="6C7D80"/>
@@ -14500,7 +14785,7 @@
                     <a:bodyPr/>
                     <a:lstStyle/>
                     <a:p>
-                      <a:pPr algn="r" indent="0" marL="0">
+                      <a:pPr marL="0" indent="0" algn="r">
                         <a:buNone/>
                       </a:pPr>
                       <a:r>
@@ -14521,7 +14806,7 @@
                       </a:endParaRPr>
                     </a:p>
                   </a:txBody>
-                  <a:tcPr marL="64008" marR="64008" marT="64008" marB="64008" anchor="mid">
+                  <a:tcPr marL="64008" marR="64008" marT="64008" marB="64008">
                     <a:lnL w="6350" cap="flat" cmpd="sng" algn="ctr">
                       <a:solidFill>
                         <a:srgbClr val="6C7D80"/>
@@ -14563,6 +14848,11 @@
                     </a:solidFill>
                   </a:tcPr>
                 </a:tc>
+                <a:extLst>
+                  <a:ext uri="{0D108BD9-81ED-4DB2-BD59-A6C34878D82A}">
+                    <a16:rowId xmlns:a16="http://schemas.microsoft.com/office/drawing/2014/main" val="10006"/>
+                  </a:ext>
+                </a:extLst>
               </a:tr>
               <a:tr h="347472">
                 <a:tc>
@@ -14570,7 +14860,7 @@
                     <a:bodyPr/>
                     <a:lstStyle/>
                     <a:p>
-                      <a:pPr algn="r" indent="0" marL="0">
+                      <a:pPr marL="0" indent="0" algn="r">
                         <a:buNone/>
                       </a:pPr>
                       <a:r>
@@ -14591,7 +14881,7 @@
                       </a:endParaRPr>
                     </a:p>
                   </a:txBody>
-                  <a:tcPr marL="64008" marR="64008" marT="64008" marB="64008" anchor="mid">
+                  <a:tcPr marL="64008" marR="64008" marT="64008" marB="64008">
                     <a:lnL w="6350" cap="flat" cmpd="sng" algn="ctr">
                       <a:solidFill>
                         <a:srgbClr val="6C7D80"/>
@@ -14638,7 +14928,7 @@
                     <a:bodyPr/>
                     <a:lstStyle/>
                     <a:p>
-                      <a:pPr algn="r" indent="0" marL="0">
+                      <a:pPr marL="0" indent="0" algn="r">
                         <a:buNone/>
                       </a:pPr>
                       <a:r>
@@ -14659,7 +14949,7 @@
                       </a:endParaRPr>
                     </a:p>
                   </a:txBody>
-                  <a:tcPr marL="64008" marR="64008" marT="64008" marB="64008" anchor="mid">
+                  <a:tcPr marL="64008" marR="64008" marT="64008" marB="64008">
                     <a:lnL w="6350" cap="flat" cmpd="sng" algn="ctr">
                       <a:solidFill>
                         <a:srgbClr val="6C7D80"/>
@@ -14706,7 +14996,7 @@
                     <a:bodyPr/>
                     <a:lstStyle/>
                     <a:p>
-                      <a:pPr algn="r" indent="0" marL="0">
+                      <a:pPr marL="0" indent="0" algn="r">
                         <a:buNone/>
                       </a:pPr>
                       <a:r>
@@ -14727,7 +15017,7 @@
                       </a:endParaRPr>
                     </a:p>
                   </a:txBody>
-                  <a:tcPr marL="64008" marR="64008" marT="64008" marB="64008" anchor="mid">
+                  <a:tcPr marL="64008" marR="64008" marT="64008" marB="64008">
                     <a:lnL w="6350" cap="flat" cmpd="sng" algn="ctr">
                       <a:solidFill>
                         <a:srgbClr val="6C7D80"/>
@@ -14774,7 +15064,7 @@
                     <a:bodyPr/>
                     <a:lstStyle/>
                     <a:p>
-                      <a:pPr algn="r" indent="0" marL="0">
+                      <a:pPr marL="0" indent="0" algn="r">
                         <a:buNone/>
                       </a:pPr>
                       <a:r>
@@ -14795,7 +15085,7 @@
                       </a:endParaRPr>
                     </a:p>
                   </a:txBody>
-                  <a:tcPr marL="64008" marR="64008" marT="64008" marB="64008" anchor="mid">
+                  <a:tcPr marL="64008" marR="64008" marT="64008" marB="64008">
                     <a:lnL w="6350" cap="flat" cmpd="sng" algn="ctr">
                       <a:solidFill>
                         <a:srgbClr val="6C7D80"/>
@@ -14837,6 +15127,11 @@
                     </a:solidFill>
                   </a:tcPr>
                 </a:tc>
+                <a:extLst>
+                  <a:ext uri="{0D108BD9-81ED-4DB2-BD59-A6C34878D82A}">
+                    <a16:rowId xmlns:a16="http://schemas.microsoft.com/office/drawing/2014/main" val="10007"/>
+                  </a:ext>
+                </a:extLst>
               </a:tr>
               <a:tr h="347472">
                 <a:tc>
@@ -14844,7 +15139,7 @@
                     <a:bodyPr/>
                     <a:lstStyle/>
                     <a:p>
-                      <a:pPr algn="r" indent="0" marL="0">
+                      <a:pPr marL="0" indent="0" algn="r">
                         <a:buNone/>
                       </a:pPr>
                       <a:r>
@@ -14865,7 +15160,7 @@
                       </a:endParaRPr>
                     </a:p>
                   </a:txBody>
-                  <a:tcPr marL="64008" marR="64008" marT="64008" marB="64008" anchor="mid">
+                  <a:tcPr marL="64008" marR="64008" marT="64008" marB="64008">
                     <a:lnL w="6350" cap="flat" cmpd="sng" algn="ctr">
                       <a:solidFill>
                         <a:srgbClr val="6C7D80"/>
@@ -14912,7 +15207,7 @@
                     <a:bodyPr/>
                     <a:lstStyle/>
                     <a:p>
-                      <a:pPr algn="r" indent="0" marL="0">
+                      <a:pPr marL="0" indent="0" algn="r">
                         <a:buNone/>
                       </a:pPr>
                       <a:r>
@@ -14933,7 +15228,7 @@
                       </a:endParaRPr>
                     </a:p>
                   </a:txBody>
-                  <a:tcPr marL="64008" marR="64008" marT="64008" marB="64008" anchor="mid">
+                  <a:tcPr marL="64008" marR="64008" marT="64008" marB="64008">
                     <a:lnL w="6350" cap="flat" cmpd="sng" algn="ctr">
                       <a:solidFill>
                         <a:srgbClr val="6C7D80"/>
@@ -14980,7 +15275,7 @@
                     <a:bodyPr/>
                     <a:lstStyle/>
                     <a:p>
-                      <a:pPr algn="r" indent="0" marL="0">
+                      <a:pPr marL="0" indent="0" algn="r">
                         <a:buNone/>
                       </a:pPr>
                       <a:r>
@@ -15001,7 +15296,7 @@
                       </a:endParaRPr>
                     </a:p>
                   </a:txBody>
-                  <a:tcPr marL="64008" marR="64008" marT="64008" marB="64008" anchor="mid">
+                  <a:tcPr marL="64008" marR="64008" marT="64008" marB="64008">
                     <a:lnL w="6350" cap="flat" cmpd="sng" algn="ctr">
                       <a:solidFill>
                         <a:srgbClr val="6C7D80"/>
@@ -15048,7 +15343,7 @@
                     <a:bodyPr/>
                     <a:lstStyle/>
                     <a:p>
-                      <a:pPr algn="r" indent="0" marL="0">
+                      <a:pPr marL="0" indent="0" algn="r">
                         <a:buNone/>
                       </a:pPr>
                       <a:r>
@@ -15069,7 +15364,7 @@
                       </a:endParaRPr>
                     </a:p>
                   </a:txBody>
-                  <a:tcPr marL="64008" marR="64008" marT="64008" marB="64008" anchor="mid">
+                  <a:tcPr marL="64008" marR="64008" marT="64008" marB="64008">
                     <a:lnL w="6350" cap="flat" cmpd="sng" algn="ctr">
                       <a:solidFill>
                         <a:srgbClr val="6C7D80"/>
@@ -15111,6 +15406,11 @@
                     </a:solidFill>
                   </a:tcPr>
                 </a:tc>
+                <a:extLst>
+                  <a:ext uri="{0D108BD9-81ED-4DB2-BD59-A6C34878D82A}">
+                    <a16:rowId xmlns:a16="http://schemas.microsoft.com/office/drawing/2014/main" val="10008"/>
+                  </a:ext>
+                </a:extLst>
               </a:tr>
               <a:tr h="347472">
                 <a:tc>
@@ -15118,7 +15418,7 @@
                     <a:bodyPr/>
                     <a:lstStyle/>
                     <a:p>
-                      <a:pPr algn="r" indent="0" marL="0">
+                      <a:pPr marL="0" indent="0" algn="r">
                         <a:buNone/>
                       </a:pPr>
                       <a:r>
@@ -15139,7 +15439,7 @@
                       </a:endParaRPr>
                     </a:p>
                   </a:txBody>
-                  <a:tcPr marL="64008" marR="64008" marT="64008" marB="64008" anchor="mid">
+                  <a:tcPr marL="64008" marR="64008" marT="64008" marB="64008">
                     <a:lnL w="6350" cap="flat" cmpd="sng" algn="ctr">
                       <a:solidFill>
                         <a:srgbClr val="6C7D80"/>
@@ -15186,7 +15486,7 @@
                     <a:bodyPr/>
                     <a:lstStyle/>
                     <a:p>
-                      <a:pPr algn="r" indent="0" marL="0">
+                      <a:pPr marL="0" indent="0" algn="r">
                         <a:buNone/>
                       </a:pPr>
                       <a:r>
@@ -15207,7 +15507,7 @@
                       </a:endParaRPr>
                     </a:p>
                   </a:txBody>
-                  <a:tcPr marL="64008" marR="64008" marT="64008" marB="64008" anchor="mid">
+                  <a:tcPr marL="64008" marR="64008" marT="64008" marB="64008">
                     <a:lnL w="6350" cap="flat" cmpd="sng" algn="ctr">
                       <a:solidFill>
                         <a:srgbClr val="6C7D80"/>
@@ -15254,7 +15554,7 @@
                     <a:bodyPr/>
                     <a:lstStyle/>
                     <a:p>
-                      <a:pPr algn="r" indent="0" marL="0">
+                      <a:pPr marL="0" indent="0" algn="r">
                         <a:buNone/>
                       </a:pPr>
                       <a:r>
@@ -15275,7 +15575,7 @@
                       </a:endParaRPr>
                     </a:p>
                   </a:txBody>
-                  <a:tcPr marL="64008" marR="64008" marT="64008" marB="64008" anchor="mid">
+                  <a:tcPr marL="64008" marR="64008" marT="64008" marB="64008">
                     <a:lnL w="6350" cap="flat" cmpd="sng" algn="ctr">
                       <a:solidFill>
                         <a:srgbClr val="6C7D80"/>
@@ -15322,7 +15622,7 @@
                     <a:bodyPr/>
                     <a:lstStyle/>
                     <a:p>
-                      <a:pPr algn="r" indent="0" marL="0">
+                      <a:pPr marL="0" indent="0" algn="r">
                         <a:buNone/>
                       </a:pPr>
                       <a:r>
@@ -15343,7 +15643,7 @@
                       </a:endParaRPr>
                     </a:p>
                   </a:txBody>
-                  <a:tcPr marL="64008" marR="64008" marT="64008" marB="64008" anchor="mid">
+                  <a:tcPr marL="64008" marR="64008" marT="64008" marB="64008">
                     <a:lnL w="6350" cap="flat" cmpd="sng" algn="ctr">
                       <a:solidFill>
                         <a:srgbClr val="6C7D80"/>
@@ -15385,6 +15685,11 @@
                     </a:solidFill>
                   </a:tcPr>
                 </a:tc>
+                <a:extLst>
+                  <a:ext uri="{0D108BD9-81ED-4DB2-BD59-A6C34878D82A}">
+                    <a16:rowId xmlns:a16="http://schemas.microsoft.com/office/drawing/2014/main" val="10009"/>
+                  </a:ext>
+                </a:extLst>
               </a:tr>
               <a:tr h="347472">
                 <a:tc>
@@ -15392,7 +15697,7 @@
                     <a:bodyPr/>
                     <a:lstStyle/>
                     <a:p>
-                      <a:pPr algn="r" indent="0" marL="0">
+                      <a:pPr marL="0" indent="0" algn="r">
                         <a:buNone/>
                       </a:pPr>
                       <a:r>
@@ -15413,7 +15718,7 @@
                       </a:endParaRPr>
                     </a:p>
                   </a:txBody>
-                  <a:tcPr marL="64008" marR="64008" marT="64008" marB="64008" anchor="mid">
+                  <a:tcPr marL="64008" marR="64008" marT="64008" marB="64008">
                     <a:lnL w="6350" cap="flat" cmpd="sng" algn="ctr">
                       <a:solidFill>
                         <a:srgbClr val="6C7D80"/>
@@ -15460,7 +15765,7 @@
                     <a:bodyPr/>
                     <a:lstStyle/>
                     <a:p>
-                      <a:pPr algn="r" indent="0" marL="0">
+                      <a:pPr marL="0" indent="0" algn="r">
                         <a:buNone/>
                       </a:pPr>
                       <a:r>
@@ -15481,7 +15786,7 @@
                       </a:endParaRPr>
                     </a:p>
                   </a:txBody>
-                  <a:tcPr marL="64008" marR="64008" marT="64008" marB="64008" anchor="mid">
+                  <a:tcPr marL="64008" marR="64008" marT="64008" marB="64008">
                     <a:lnL w="6350" cap="flat" cmpd="sng" algn="ctr">
                       <a:solidFill>
                         <a:srgbClr val="6C7D80"/>
@@ -15528,7 +15833,7 @@
                     <a:bodyPr/>
                     <a:lstStyle/>
                     <a:p>
-                      <a:pPr algn="r" indent="0" marL="0">
+                      <a:pPr marL="0" indent="0" algn="r">
                         <a:buNone/>
                       </a:pPr>
                       <a:r>
@@ -15549,7 +15854,7 @@
                       </a:endParaRPr>
                     </a:p>
                   </a:txBody>
-                  <a:tcPr marL="64008" marR="64008" marT="64008" marB="64008" anchor="mid">
+                  <a:tcPr marL="64008" marR="64008" marT="64008" marB="64008">
                     <a:lnL w="6350" cap="flat" cmpd="sng" algn="ctr">
                       <a:solidFill>
                         <a:srgbClr val="6C7D80"/>
@@ -15596,7 +15901,7 @@
                     <a:bodyPr/>
                     <a:lstStyle/>
                     <a:p>
-                      <a:pPr algn="r" indent="0" marL="0">
+                      <a:pPr marL="0" indent="0" algn="r">
                         <a:buNone/>
                       </a:pPr>
                       <a:r>
@@ -15617,7 +15922,7 @@
                       </a:endParaRPr>
                     </a:p>
                   </a:txBody>
-                  <a:tcPr marL="64008" marR="64008" marT="64008" marB="64008" anchor="mid">
+                  <a:tcPr marL="64008" marR="64008" marT="64008" marB="64008">
                     <a:lnL w="6350" cap="flat" cmpd="sng" algn="ctr">
                       <a:solidFill>
                         <a:srgbClr val="6C7D80"/>
@@ -15659,6 +15964,11 @@
                     </a:solidFill>
                   </a:tcPr>
                 </a:tc>
+                <a:extLst>
+                  <a:ext uri="{0D108BD9-81ED-4DB2-BD59-A6C34878D82A}">
+                    <a16:rowId xmlns:a16="http://schemas.microsoft.com/office/drawing/2014/main" val="10010"/>
+                  </a:ext>
+                </a:extLst>
               </a:tr>
             </a:tbl>
           </a:graphicData>
@@ -15685,7 +15995,7 @@
           <a:bodyPr wrap="square" lIns="0" tIns="0" rIns="0" bIns="0" rtlCol="0" anchor="ctr"/>
           <a:lstStyle/>
           <a:p>
-            <a:pPr indent="0" marL="0">
+            <a:pPr marL="0" indent="0">
               <a:buNone/>
             </a:pPr>
             <a:r>
@@ -15702,7 +16012,7 @@
       </p:sp>
       <p:sp>
         <p:nvSpPr>
-          <p:cNvPr id="6" name="Text 3"/>
+          <p:cNvPr id="4" name="Text 3"/>
           <p:cNvSpPr/>
           <p:nvPr/>
         </p:nvSpPr>
@@ -15815,7 +16125,7 @@
           <a:bodyPr wrap="square" lIns="0" tIns="0" rIns="0" bIns="0" rtlCol="0" anchor="ctr"/>
           <a:lstStyle/>
           <a:p>
-            <a:pPr indent="0" marL="0">
+            <a:pPr marL="0" indent="0">
               <a:buNone/>
             </a:pPr>
             <a:r>
@@ -15850,7 +16160,7 @@
           </a:prstGeom>
           <a:extLst>
             <a:ext uri="{C572A759-6A51-4108-AA02-DFA0A04FC94B}">
-              <ma14:wrappingTextBoxFlag xmlns:ma14="http://schemas.microsoft.com/office/mac/drawingml/2011/main" val="0"/>
+              <ma14:wrappingTextBoxFlag xmlns:ma14="http://schemas.microsoft.com/office/mac/drawingml/2011/main" xmlns="" val="0"/>
             </a:ext>
           </a:extLst>
         </p:spPr>
@@ -15871,7 +16181,7 @@
           <a:p>
             <a:pPr algn="r"/>
             <a:fld id="{F7021451-1387-4CA6-816F-3879F97B5CBC}" type="slidenum">
-              <a:rPr b="0" lang="en-US"/>
+              <a:rPr lang="en-US" b="0"/>
               <a:t>5</a:t>
             </a:fld>
             <a:endParaRPr lang="en-US"/>
@@ -15924,7 +16234,7 @@
           <a:bodyPr wrap="square" lIns="0" tIns="0" rIns="0" bIns="0" rtlCol="0" anchor="ctr"/>
           <a:lstStyle/>
           <a:p>
-            <a:pPr indent="0" marL="0">
+            <a:pPr marL="0" indent="0">
               <a:buNone/>
             </a:pPr>
             <a:r>
@@ -15963,7 +16273,7 @@
           <a:bodyPr wrap="square" lIns="0" tIns="0" rIns="0" bIns="0" rtlCol="0" anchor="ctr"/>
           <a:lstStyle/>
           <a:p>
-            <a:pPr algn="ctr" indent="0" marL="0">
+            <a:pPr marL="0" indent="0" algn="ctr">
               <a:buNone/>
             </a:pPr>
             <a:r>
@@ -15999,7 +16309,7 @@
           <a:bodyPr wrap="square" lIns="0" tIns="0" rIns="0" bIns="0" rtlCol="0" anchor="ctr"/>
           <a:lstStyle/>
           <a:p>
-            <a:pPr algn="ctr" indent="0" marL="0">
+            <a:pPr marL="0" indent="0" algn="ctr">
               <a:buNone/>
             </a:pPr>
             <a:r>
@@ -16040,6 +16350,13 @@
             <a:prstDash val="solid"/>
           </a:ln>
         </p:spPr>
+        <p:txBody>
+          <a:bodyPr/>
+          <a:lstStyle/>
+          <a:p>
+            <a:endParaRPr lang="en-US"/>
+          </a:p>
+        </p:txBody>
       </p:sp>
       <p:sp>
         <p:nvSpPr>
@@ -16065,6 +16382,13 @@
             <a:prstDash val="solid"/>
           </a:ln>
         </p:spPr>
+        <p:txBody>
+          <a:bodyPr/>
+          <a:lstStyle/>
+          <a:p>
+            <a:endParaRPr lang="en-US"/>
+          </a:p>
+        </p:txBody>
       </p:sp>
       <p:sp>
         <p:nvSpPr>
@@ -16087,7 +16411,7 @@
           <a:bodyPr wrap="square" lIns="0" tIns="0" rIns="0" bIns="0" rtlCol="0" anchor="ctr"/>
           <a:lstStyle/>
           <a:p>
-            <a:pPr indent="0" marL="0">
+            <a:pPr marL="0" indent="0">
               <a:buNone/>
             </a:pPr>
             <a:r>
@@ -16125,7 +16449,7 @@
           </a:bodyPr>
           <a:lstStyle/>
           <a:p>
-            <a:pPr indent="0" marL="0">
+            <a:pPr marL="0" indent="0">
               <a:buNone/>
             </a:pPr>
             <a:r>
@@ -16166,6 +16490,13 @@
             <a:prstDash val="solid"/>
           </a:ln>
         </p:spPr>
+        <p:txBody>
+          <a:bodyPr/>
+          <a:lstStyle/>
+          <a:p>
+            <a:endParaRPr lang="en-US"/>
+          </a:p>
+        </p:txBody>
       </p:sp>
       <p:sp>
         <p:nvSpPr>
@@ -16191,6 +16522,13 @@
             <a:prstDash val="solid"/>
           </a:ln>
         </p:spPr>
+        <p:txBody>
+          <a:bodyPr/>
+          <a:lstStyle/>
+          <a:p>
+            <a:endParaRPr lang="en-US"/>
+          </a:p>
+        </p:txBody>
       </p:sp>
       <p:sp>
         <p:nvSpPr>
@@ -16213,7 +16551,7 @@
           <a:bodyPr wrap="square" lIns="0" tIns="0" rIns="0" bIns="0" rtlCol="0" anchor="ctr"/>
           <a:lstStyle/>
           <a:p>
-            <a:pPr indent="0" marL="0">
+            <a:pPr marL="0" indent="0">
               <a:buNone/>
             </a:pPr>
             <a:r>
@@ -16251,7 +16589,7 @@
           </a:bodyPr>
           <a:lstStyle/>
           <a:p>
-            <a:pPr indent="0" marL="0">
+            <a:pPr marL="0" indent="0">
               <a:buNone/>
             </a:pPr>
             <a:r>
@@ -16292,6 +16630,13 @@
             <a:prstDash val="solid"/>
           </a:ln>
         </p:spPr>
+        <p:txBody>
+          <a:bodyPr/>
+          <a:lstStyle/>
+          <a:p>
+            <a:endParaRPr lang="en-US"/>
+          </a:p>
+        </p:txBody>
       </p:sp>
       <p:sp>
         <p:nvSpPr>
@@ -16317,6 +16662,13 @@
             <a:prstDash val="solid"/>
           </a:ln>
         </p:spPr>
+        <p:txBody>
+          <a:bodyPr/>
+          <a:lstStyle/>
+          <a:p>
+            <a:endParaRPr lang="en-US"/>
+          </a:p>
+        </p:txBody>
       </p:sp>
       <p:sp>
         <p:nvSpPr>
@@ -16339,7 +16691,7 @@
           <a:bodyPr wrap="square" lIns="0" tIns="0" rIns="0" bIns="0" rtlCol="0" anchor="ctr"/>
           <a:lstStyle/>
           <a:p>
-            <a:pPr indent="0" marL="0">
+            <a:pPr marL="0" indent="0">
               <a:buNone/>
             </a:pPr>
             <a:r>
@@ -16377,7 +16729,7 @@
           </a:bodyPr>
           <a:lstStyle/>
           <a:p>
-            <a:pPr indent="0" marL="0">
+            <a:pPr marL="0" indent="0">
               <a:buNone/>
             </a:pPr>
             <a:r>
@@ -16418,6 +16770,13 @@
             <a:prstDash val="solid"/>
           </a:ln>
         </p:spPr>
+        <p:txBody>
+          <a:bodyPr/>
+          <a:lstStyle/>
+          <a:p>
+            <a:endParaRPr lang="en-US"/>
+          </a:p>
+        </p:txBody>
       </p:sp>
       <p:sp>
         <p:nvSpPr>
@@ -16443,6 +16802,13 @@
             <a:prstDash val="solid"/>
           </a:ln>
         </p:spPr>
+        <p:txBody>
+          <a:bodyPr/>
+          <a:lstStyle/>
+          <a:p>
+            <a:endParaRPr lang="en-US"/>
+          </a:p>
+        </p:txBody>
       </p:sp>
       <p:sp>
         <p:nvSpPr>
@@ -16465,7 +16831,7 @@
           <a:bodyPr wrap="square" lIns="0" tIns="0" rIns="0" bIns="0" rtlCol="0" anchor="ctr"/>
           <a:lstStyle/>
           <a:p>
-            <a:pPr indent="0" marL="0">
+            <a:pPr marL="0" indent="0">
               <a:buNone/>
             </a:pPr>
             <a:r>
@@ -16503,7 +16869,7 @@
           </a:bodyPr>
           <a:lstStyle/>
           <a:p>
-            <a:pPr indent="0" marL="0">
+            <a:pPr marL="0" indent="0">
               <a:buNone/>
             </a:pPr>
             <a:r>
@@ -16544,6 +16910,13 @@
             <a:prstDash val="solid"/>
           </a:ln>
         </p:spPr>
+        <p:txBody>
+          <a:bodyPr/>
+          <a:lstStyle/>
+          <a:p>
+            <a:endParaRPr lang="en-US"/>
+          </a:p>
+        </p:txBody>
       </p:sp>
       <p:sp>
         <p:nvSpPr>
@@ -16569,6 +16942,13 @@
             <a:prstDash val="solid"/>
           </a:ln>
         </p:spPr>
+        <p:txBody>
+          <a:bodyPr/>
+          <a:lstStyle/>
+          <a:p>
+            <a:endParaRPr lang="en-US"/>
+          </a:p>
+        </p:txBody>
       </p:sp>
       <p:sp>
         <p:nvSpPr>
@@ -16591,7 +16971,7 @@
           <a:bodyPr wrap="square" lIns="0" tIns="0" rIns="0" bIns="0" rtlCol="0" anchor="ctr"/>
           <a:lstStyle/>
           <a:p>
-            <a:pPr indent="0" marL="0">
+            <a:pPr marL="0" indent="0">
               <a:buNone/>
             </a:pPr>
             <a:r>
@@ -16629,7 +17009,7 @@
           </a:bodyPr>
           <a:lstStyle/>
           <a:p>
-            <a:pPr indent="0" marL="0">
+            <a:pPr marL="0" indent="0">
               <a:buNone/>
             </a:pPr>
             <a:r>
@@ -16670,6 +17050,13 @@
             <a:prstDash val="solid"/>
           </a:ln>
         </p:spPr>
+        <p:txBody>
+          <a:bodyPr/>
+          <a:lstStyle/>
+          <a:p>
+            <a:endParaRPr lang="en-US"/>
+          </a:p>
+        </p:txBody>
       </p:sp>
       <p:sp>
         <p:nvSpPr>
@@ -16695,6 +17082,13 @@
             <a:prstDash val="solid"/>
           </a:ln>
         </p:spPr>
+        <p:txBody>
+          <a:bodyPr/>
+          <a:lstStyle/>
+          <a:p>
+            <a:endParaRPr lang="en-US"/>
+          </a:p>
+        </p:txBody>
       </p:sp>
       <p:sp>
         <p:nvSpPr>
@@ -16717,7 +17111,7 @@
           <a:bodyPr wrap="square" lIns="0" tIns="0" rIns="0" bIns="0" rtlCol="0" anchor="ctr"/>
           <a:lstStyle/>
           <a:p>
-            <a:pPr indent="0" marL="0">
+            <a:pPr marL="0" indent="0">
               <a:buNone/>
             </a:pPr>
             <a:r>
@@ -16755,7 +17149,7 @@
           </a:bodyPr>
           <a:lstStyle/>
           <a:p>
-            <a:pPr indent="0" marL="0">
+            <a:pPr marL="0" indent="0">
               <a:buNone/>
             </a:pPr>
             <a:r>
@@ -16794,6 +17188,13 @@
             <a:tailEnd type="triangle"/>
           </a:ln>
         </p:spPr>
+        <p:txBody>
+          <a:bodyPr/>
+          <a:lstStyle/>
+          <a:p>
+            <a:endParaRPr lang="en-US"/>
+          </a:p>
+        </p:txBody>
       </p:sp>
       <p:sp>
         <p:nvSpPr>
@@ -16816,7 +17217,7 @@
           <a:bodyPr wrap="square" lIns="0" tIns="0" rIns="0" bIns="0" rtlCol="0" anchor="ctr"/>
           <a:lstStyle/>
           <a:p>
-            <a:pPr algn="ctr" indent="0" marL="0">
+            <a:pPr marL="0" indent="0" algn="ctr">
               <a:buNone/>
             </a:pPr>
             <a:r>
@@ -16833,7 +17234,7 @@
       </p:sp>
       <p:sp>
         <p:nvSpPr>
-          <p:cNvPr id="25" name="Slide Number Placeholder 0"/>
+          <p:cNvPr id="31" name="Slide Number Placeholder 0"/>
           <p:cNvSpPr>
             <a:spLocks noGrp="1"/>
           </p:cNvSpPr>
@@ -16851,7 +17252,7 @@
           </a:prstGeom>
           <a:extLst>
             <a:ext uri="{C572A759-6A51-4108-AA02-DFA0A04FC94B}">
-              <ma14:wrappingTextBoxFlag xmlns:ma14="http://schemas.microsoft.com/office/mac/drawingml/2011/main" val="0"/>
+              <ma14:wrappingTextBoxFlag xmlns:ma14="http://schemas.microsoft.com/office/mac/drawingml/2011/main" xmlns="" val="0"/>
             </a:ext>
           </a:extLst>
         </p:spPr>
@@ -16872,7 +17273,7 @@
           <a:p>
             <a:pPr algn="r"/>
             <a:fld id="{F7021451-1387-4CA6-816F-3879F97B5CBC}" type="slidenum">
-              <a:rPr b="0" lang="en-US"/>
+              <a:rPr lang="en-US" b="0"/>
               <a:t>6</a:t>
             </a:fld>
             <a:endParaRPr lang="en-US"/>
@@ -16925,7 +17326,7 @@
           <a:bodyPr wrap="square" lIns="0" tIns="0" rIns="0" bIns="0" rtlCol="0" anchor="ctr"/>
           <a:lstStyle/>
           <a:p>
-            <a:pPr indent="0" marL="0">
+            <a:pPr marL="0" indent="0">
               <a:buNone/>
             </a:pPr>
             <a:r>
@@ -16964,11 +17365,11 @@
           <a:bodyPr wrap="square" lIns="0" tIns="0" rIns="0" bIns="0" rtlCol="0" anchor="ctr"/>
           <a:lstStyle/>
           <a:p>
-            <a:pPr indent="0" marL="0">
+            <a:pPr marL="0" indent="0">
               <a:buNone/>
             </a:pPr>
             <a:r>
-              <a:rPr lang="en-US" sz="1100" b="1" spc="120" kern="0" dirty="0">
+              <a:rPr lang="en-US" sz="1100" b="1" kern="0" spc="120" dirty="0">
                 <a:solidFill>
                   <a:srgbClr val="E5A823"/>
                 </a:solidFill>
@@ -17000,7 +17401,7 @@
           <a:bodyPr wrap="square" lIns="0" tIns="0" rIns="0" bIns="0" rtlCol="0" anchor="ctr"/>
           <a:lstStyle/>
           <a:p>
-            <a:pPr indent="0" marL="0">
+            <a:pPr marL="0" indent="0">
               <a:buNone/>
             </a:pPr>
             <a:r>
@@ -17036,7 +17437,7 @@
           <a:bodyPr wrap="square" lIns="0" tIns="0" rIns="0" bIns="0" rtlCol="0" anchor="ctr"/>
           <a:lstStyle/>
           <a:p>
-            <a:pPr indent="0" marL="0">
+            <a:pPr marL="0" indent="0">
               <a:buNone/>
             </a:pPr>
             <a:r>
@@ -17075,6 +17476,13 @@
             <a:tailEnd type="triangle"/>
           </a:ln>
         </p:spPr>
+        <p:txBody>
+          <a:bodyPr/>
+          <a:lstStyle/>
+          <a:p>
+            <a:endParaRPr lang="en-US"/>
+          </a:p>
+        </p:txBody>
       </p:sp>
       <p:sp>
         <p:nvSpPr>
@@ -17097,11 +17505,11 @@
           <a:bodyPr wrap="square" lIns="0" tIns="0" rIns="0" bIns="0" rtlCol="0" anchor="ctr"/>
           <a:lstStyle/>
           <a:p>
-            <a:pPr indent="0" marL="0">
+            <a:pPr marL="0" indent="0">
               <a:buNone/>
             </a:pPr>
             <a:r>
-              <a:rPr lang="en-US" sz="1100" b="1" spc="120" kern="0" dirty="0">
+              <a:rPr lang="en-US" sz="1100" b="1" kern="0" spc="120" dirty="0">
                 <a:solidFill>
                   <a:srgbClr val="E5A823"/>
                 </a:solidFill>
@@ -17135,7 +17543,7 @@
           </a:bodyPr>
           <a:lstStyle/>
           <a:p>
-            <a:pPr indent="0" marL="0">
+            <a:pPr marL="0" indent="0">
               <a:buNone/>
             </a:pPr>
             <a:r>
@@ -17173,7 +17581,7 @@
           </a:bodyPr>
           <a:lstStyle/>
           <a:p>
-            <a:pPr indent="0" marL="0">
+            <a:pPr marL="0" indent="0">
               <a:buNone/>
             </a:pPr>
             <a:r>
@@ -17210,6 +17618,13 @@
             <a:prstDash val="solid"/>
           </a:ln>
         </p:spPr>
+        <p:txBody>
+          <a:bodyPr/>
+          <a:lstStyle/>
+          <a:p>
+            <a:endParaRPr lang="en-US"/>
+          </a:p>
+        </p:txBody>
       </p:sp>
       <p:sp>
         <p:nvSpPr>
@@ -17232,7 +17647,7 @@
           <a:bodyPr wrap="square" lIns="0" tIns="0" rIns="0" bIns="0" rtlCol="0" anchor="ctr"/>
           <a:lstStyle/>
           <a:p>
-            <a:pPr indent="0" marL="0">
+            <a:pPr marL="0" indent="0">
               <a:buNone/>
             </a:pPr>
             <a:r>
@@ -17270,7 +17685,7 @@
           </a:bodyPr>
           <a:lstStyle/>
           <a:p>
-            <a:pPr indent="0" marL="0">
+            <a:pPr marL="0" indent="0">
               <a:buNone/>
             </a:pPr>
             <a:r>
@@ -17305,7 +17720,7 @@
           </a:prstGeom>
           <a:extLst>
             <a:ext uri="{C572A759-6A51-4108-AA02-DFA0A04FC94B}">
-              <ma14:wrappingTextBoxFlag xmlns:ma14="http://schemas.microsoft.com/office/mac/drawingml/2011/main" val="0"/>
+              <ma14:wrappingTextBoxFlag xmlns:ma14="http://schemas.microsoft.com/office/mac/drawingml/2011/main" xmlns="" val="0"/>
             </a:ext>
           </a:extLst>
         </p:spPr>
@@ -17326,7 +17741,7 @@
           <a:p>
             <a:pPr algn="r"/>
             <a:fld id="{F7021451-1387-4CA6-816F-3879F97B5CBC}" type="slidenum">
-              <a:rPr b="0" lang="en-US"/>
+              <a:rPr lang="en-US" b="0"/>
               <a:t>7</a:t>
             </a:fld>
             <a:endParaRPr lang="en-US"/>
@@ -17379,7 +17794,7 @@
           <a:bodyPr wrap="square" lIns="0" tIns="0" rIns="0" bIns="0" rtlCol="0" anchor="ctr"/>
           <a:lstStyle/>
           <a:p>
-            <a:pPr indent="0" marL="0">
+            <a:pPr marL="0" indent="0">
               <a:buNone/>
             </a:pPr>
             <a:r>
@@ -17418,7 +17833,7 @@
           <a:bodyPr wrap="square" lIns="0" tIns="0" rIns="0" bIns="0" rtlCol="0" anchor="ctr"/>
           <a:lstStyle/>
           <a:p>
-            <a:pPr algn="ctr" indent="0" marL="0">
+            <a:pPr marL="0" indent="0" algn="ctr">
               <a:buNone/>
             </a:pPr>
             <a:r>
@@ -17455,6 +17870,13 @@
             <a:prstDash val="solid"/>
           </a:ln>
         </p:spPr>
+        <p:txBody>
+          <a:bodyPr/>
+          <a:lstStyle/>
+          <a:p>
+            <a:endParaRPr lang="en-US"/>
+          </a:p>
+        </p:txBody>
       </p:sp>
       <p:sp>
         <p:nvSpPr>
@@ -17477,7 +17899,7 @@
           <a:bodyPr wrap="square" lIns="635" tIns="635" rIns="635" bIns="635" rtlCol="0" anchor="ctr"/>
           <a:lstStyle/>
           <a:p>
-            <a:pPr algn="ctr" indent="0" marL="0">
+            <a:pPr marL="0" indent="0" algn="ctr">
               <a:buNone/>
             </a:pPr>
             <a:r>
@@ -17513,11 +17935,11 @@
           <a:bodyPr wrap="square" lIns="0" tIns="0" rIns="0" bIns="0" rtlCol="0" anchor="ctr"/>
           <a:lstStyle/>
           <a:p>
-            <a:pPr algn="ctr" indent="0" marL="0">
+            <a:pPr marL="0" indent="0" algn="ctr">
               <a:buNone/>
             </a:pPr>
             <a:r>
-              <a:rPr lang="en-US" sz="1300" b="1" spc="130" kern="0" dirty="0">
+              <a:rPr lang="en-US" sz="1300" b="1" kern="0" spc="130" dirty="0">
                 <a:solidFill>
                   <a:srgbClr val="E5A823"/>
                 </a:solidFill>
@@ -17548,7 +17970,7 @@
           </a:prstGeom>
           <a:extLst>
             <a:ext uri="{C572A759-6A51-4108-AA02-DFA0A04FC94B}">
-              <ma14:wrappingTextBoxFlag xmlns:ma14="http://schemas.microsoft.com/office/mac/drawingml/2011/main" val="0"/>
+              <ma14:wrappingTextBoxFlag xmlns:ma14="http://schemas.microsoft.com/office/mac/drawingml/2011/main" xmlns="" val="0"/>
             </a:ext>
           </a:extLst>
         </p:spPr>
@@ -17569,7 +17991,7 @@
           <a:p>
             <a:pPr algn="r"/>
             <a:fld id="{F7021451-1387-4CA6-816F-3879F97B5CBC}" type="slidenum">
-              <a:rPr b="0" lang="en-US"/>
+              <a:rPr lang="en-US" b="0"/>
               <a:t>8</a:t>
             </a:fld>
             <a:endParaRPr lang="en-US"/>
@@ -17622,7 +18044,7 @@
           <a:bodyPr wrap="square" lIns="0" tIns="0" rIns="0" bIns="0" rtlCol="0" anchor="ctr"/>
           <a:lstStyle/>
           <a:p>
-            <a:pPr indent="0" marL="0">
+            <a:pPr marL="0" indent="0">
               <a:buNone/>
             </a:pPr>
             <a:r>
@@ -17661,11 +18083,11 @@
           <a:bodyPr wrap="square" lIns="0" tIns="0" rIns="0" bIns="0" rtlCol="0" anchor="ctr"/>
           <a:lstStyle/>
           <a:p>
-            <a:pPr indent="0" marL="0">
+            <a:pPr marL="0" indent="0">
               <a:buNone/>
             </a:pPr>
             <a:r>
-              <a:rPr lang="en-US" sz="1000" b="1" spc="120" kern="0" dirty="0">
+              <a:rPr lang="en-US" sz="1000" b="1" kern="0" spc="120" dirty="0">
                 <a:solidFill>
                   <a:srgbClr val="E5A823"/>
                 </a:solidFill>
@@ -17697,7 +18119,7 @@
           <a:bodyPr wrap="square" lIns="0" tIns="0" rIns="0" bIns="0" rtlCol="0" anchor="ctr"/>
           <a:lstStyle/>
           <a:p>
-            <a:pPr algn="ctr" indent="0" marL="0">
+            <a:pPr marL="0" indent="0" algn="ctr">
               <a:buNone/>
             </a:pPr>
             <a:r>
@@ -17735,7 +18157,7 @@
           </a:bodyPr>
           <a:lstStyle/>
           <a:p>
-            <a:pPr algn="ctr" indent="0" marL="0">
+            <a:pPr marL="0" indent="0" algn="ctr">
               <a:buNone/>
             </a:pPr>
             <a:r>
@@ -17771,7 +18193,7 @@
           <a:bodyPr wrap="square" lIns="0" tIns="0" rIns="0" bIns="0" rtlCol="0" anchor="ctr"/>
           <a:lstStyle/>
           <a:p>
-            <a:pPr algn="ctr" indent="0" marL="0">
+            <a:pPr marL="0" indent="0" algn="ctr">
               <a:buNone/>
             </a:pPr>
             <a:r>
@@ -17809,7 +18231,7 @@
           </a:bodyPr>
           <a:lstStyle/>
           <a:p>
-            <a:pPr algn="ctr" indent="0" marL="0">
+            <a:pPr marL="0" indent="0" algn="ctr">
               <a:buNone/>
             </a:pPr>
             <a:r>
@@ -17845,7 +18267,7 @@
           <a:bodyPr wrap="square" lIns="0" tIns="0" rIns="0" bIns="0" rtlCol="0" anchor="ctr"/>
           <a:lstStyle/>
           <a:p>
-            <a:pPr algn="ctr" indent="0" marL="0">
+            <a:pPr marL="0" indent="0" algn="ctr">
               <a:buNone/>
             </a:pPr>
             <a:r>
@@ -17883,7 +18305,7 @@
           </a:bodyPr>
           <a:lstStyle/>
           <a:p>
-            <a:pPr algn="ctr" indent="0" marL="0">
+            <a:pPr marL="0" indent="0" algn="ctr">
               <a:buNone/>
             </a:pPr>
             <a:r>
@@ -17919,7 +18341,7 @@
           <a:bodyPr wrap="square" lIns="0" tIns="0" rIns="0" bIns="0" rtlCol="0" anchor="ctr"/>
           <a:lstStyle/>
           <a:p>
-            <a:pPr algn="ctr" indent="0" marL="0">
+            <a:pPr marL="0" indent="0" algn="ctr">
               <a:buNone/>
             </a:pPr>
             <a:r>
@@ -17957,7 +18379,7 @@
           </a:bodyPr>
           <a:lstStyle/>
           <a:p>
-            <a:pPr algn="ctr" indent="0" marL="0">
+            <a:pPr marL="0" indent="0" algn="ctr">
               <a:buNone/>
             </a:pPr>
             <a:r>
@@ -17994,6 +18416,13 @@
             <a:prstDash val="solid"/>
           </a:ln>
         </p:spPr>
+        <p:txBody>
+          <a:bodyPr/>
+          <a:lstStyle/>
+          <a:p>
+            <a:endParaRPr lang="en-US"/>
+          </a:p>
+        </p:txBody>
       </p:sp>
       <p:sp>
         <p:nvSpPr>
@@ -18016,7 +18445,7 @@
           <a:bodyPr wrap="square" lIns="0" tIns="0" rIns="0" bIns="0" rtlCol="0" anchor="ctr"/>
           <a:lstStyle/>
           <a:p>
-            <a:pPr indent="0" marL="0">
+            <a:pPr marL="0" indent="0">
               <a:buNone/>
             </a:pPr>
             <a:r>
@@ -18054,7 +18483,7 @@
           </a:bodyPr>
           <a:lstStyle/>
           <a:p>
-            <a:pPr indent="0" marL="0">
+            <a:pPr marL="0" indent="0">
               <a:buNone/>
             </a:pPr>
             <a:r>
@@ -18090,7 +18519,7 @@
           <a:bodyPr wrap="square" lIns="0" tIns="0" rIns="0" bIns="0" rtlCol="0" anchor="ctr"/>
           <a:lstStyle/>
           <a:p>
-            <a:pPr algn="ctr" indent="0" marL="0">
+            <a:pPr marL="0" indent="0" algn="ctr">
               <a:buNone/>
             </a:pPr>
             <a:r>
@@ -18125,7 +18554,7 @@
           </a:prstGeom>
           <a:extLst>
             <a:ext uri="{C572A759-6A51-4108-AA02-DFA0A04FC94B}">
-              <ma14:wrappingTextBoxFlag xmlns:ma14="http://schemas.microsoft.com/office/mac/drawingml/2011/main" val="0"/>
+              <ma14:wrappingTextBoxFlag xmlns:ma14="http://schemas.microsoft.com/office/mac/drawingml/2011/main" xmlns="" val="0"/>
             </a:ext>
           </a:extLst>
         </p:spPr>
@@ -18146,7 +18575,7 @@
           <a:p>
             <a:pPr algn="r"/>
             <a:fld id="{F7021451-1387-4CA6-816F-3879F97B5CBC}" type="slidenum">
-              <a:rPr b="0" lang="en-US"/>
+              <a:rPr lang="en-US" b="0"/>
               <a:t>9</a:t>
             </a:fld>
             <a:endParaRPr lang="en-US"/>
@@ -18454,4 +18883,319 @@
     </a:ext>
   </a:extLst>
 </a:theme>
+</file>
+
+<file path=ppt/theme/theme2.xml><?xml version="1.0" encoding="utf-8"?>
+<a:theme xmlns:a="http://schemas.openxmlformats.org/drawingml/2006/main" name="Office Theme">
+  <a:themeElements>
+    <a:clrScheme name="Office">
+      <a:dk1>
+        <a:sysClr val="windowText" lastClr="000000"/>
+      </a:dk1>
+      <a:lt1>
+        <a:sysClr val="window" lastClr="FFFFFF"/>
+      </a:lt1>
+      <a:dk2>
+        <a:srgbClr val="0E2841"/>
+      </a:dk2>
+      <a:lt2>
+        <a:srgbClr val="E8E8E8"/>
+      </a:lt2>
+      <a:accent1>
+        <a:srgbClr val="156082"/>
+      </a:accent1>
+      <a:accent2>
+        <a:srgbClr val="E97132"/>
+      </a:accent2>
+      <a:accent3>
+        <a:srgbClr val="196B24"/>
+      </a:accent3>
+      <a:accent4>
+        <a:srgbClr val="0F9ED5"/>
+      </a:accent4>
+      <a:accent5>
+        <a:srgbClr val="A02B93"/>
+      </a:accent5>
+      <a:accent6>
+        <a:srgbClr val="4EA72E"/>
+      </a:accent6>
+      <a:hlink>
+        <a:srgbClr val="467886"/>
+      </a:hlink>
+      <a:folHlink>
+        <a:srgbClr val="96607D"/>
+      </a:folHlink>
+    </a:clrScheme>
+    <a:fontScheme name="Office">
+      <a:majorFont>
+        <a:latin typeface="Aptos Display" panose="02110004020202020204"/>
+        <a:ea typeface=""/>
+        <a:cs typeface=""/>
+        <a:font script="Jpan" typeface="游ゴシック Light"/>
+        <a:font script="Hang" typeface="맑은 고딕"/>
+        <a:font script="Hans" typeface="等线 Light"/>
+        <a:font script="Hant" typeface="新細明體"/>
+        <a:font script="Arab" typeface="Times New Roman"/>
+        <a:font script="Hebr" typeface="Times New Roman"/>
+        <a:font script="Thai" typeface="Angsana New"/>
+        <a:font script="Ethi" typeface="Nyala"/>
+        <a:font script="Beng" typeface="Vrinda"/>
+        <a:font script="Gujr" typeface="Shruti"/>
+        <a:font script="Khmr" typeface="MoolBoran"/>
+        <a:font script="Knda" typeface="Tunga"/>
+        <a:font script="Guru" typeface="Raavi"/>
+        <a:font script="Cans" typeface="Euphemia"/>
+        <a:font script="Cher" typeface="Plantagenet Cherokee"/>
+        <a:font script="Yiii" typeface="Microsoft Yi Baiti"/>
+        <a:font script="Tibt" typeface="Microsoft Himalaya"/>
+        <a:font script="Thaa" typeface="MV Boli"/>
+        <a:font script="Deva" typeface="Mangal"/>
+        <a:font script="Telu" typeface="Gautami"/>
+        <a:font script="Taml" typeface="Latha"/>
+        <a:font script="Syrc" typeface="Estrangelo Edessa"/>
+        <a:font script="Orya" typeface="Kalinga"/>
+        <a:font script="Mlym" typeface="Kartika"/>
+        <a:font script="Laoo" typeface="DokChampa"/>
+        <a:font script="Sinh" typeface="Iskoola Pota"/>
+        <a:font script="Mong" typeface="Mongolian Baiti"/>
+        <a:font script="Viet" typeface="Times New Roman"/>
+        <a:font script="Uigh" typeface="Microsoft Uighur"/>
+        <a:font script="Geor" typeface="Sylfaen"/>
+        <a:font script="Armn" typeface="Arial"/>
+        <a:font script="Bugi" typeface="Leelawadee UI"/>
+        <a:font script="Bopo" typeface="Microsoft JhengHei"/>
+        <a:font script="Java" typeface="Javanese Text"/>
+        <a:font script="Lisu" typeface="Segoe UI"/>
+        <a:font script="Mymr" typeface="Myanmar Text"/>
+        <a:font script="Nkoo" typeface="Ebrima"/>
+        <a:font script="Olck" typeface="Nirmala UI"/>
+        <a:font script="Osma" typeface="Ebrima"/>
+        <a:font script="Phag" typeface="Phagspa"/>
+        <a:font script="Syrn" typeface="Estrangelo Edessa"/>
+        <a:font script="Syrj" typeface="Estrangelo Edessa"/>
+        <a:font script="Syre" typeface="Estrangelo Edessa"/>
+        <a:font script="Sora" typeface="Nirmala UI"/>
+        <a:font script="Tale" typeface="Microsoft Tai Le"/>
+        <a:font script="Talu" typeface="Microsoft New Tai Lue"/>
+        <a:font script="Tfng" typeface="Ebrima"/>
+      </a:majorFont>
+      <a:minorFont>
+        <a:latin typeface="Aptos" panose="02110004020202020204"/>
+        <a:ea typeface=""/>
+        <a:cs typeface=""/>
+        <a:font script="Jpan" typeface="游ゴシック"/>
+        <a:font script="Hang" typeface="맑은 고딕"/>
+        <a:font script="Hans" typeface="等线"/>
+        <a:font script="Hant" typeface="新細明體"/>
+        <a:font script="Arab" typeface="Arial"/>
+        <a:font script="Hebr" typeface="Arial"/>
+        <a:font script="Thai" typeface="Cordia New"/>
+        <a:font script="Ethi" typeface="Nyala"/>
+        <a:font script="Beng" typeface="Vrinda"/>
+        <a:font script="Gujr" typeface="Shruti"/>
+        <a:font script="Khmr" typeface="DaunPenh"/>
+        <a:font script="Knda" typeface="Tunga"/>
+        <a:font script="Guru" typeface="Raavi"/>
+        <a:font script="Cans" typeface="Euphemia"/>
+        <a:font script="Cher" typeface="Plantagenet Cherokee"/>
+        <a:font script="Yiii" typeface="Microsoft Yi Baiti"/>
+        <a:font script="Tibt" typeface="Microsoft Himalaya"/>
+        <a:font script="Thaa" typeface="MV Boli"/>
+        <a:font script="Deva" typeface="Mangal"/>
+        <a:font script="Telu" typeface="Gautami"/>
+        <a:font script="Taml" typeface="Latha"/>
+        <a:font script="Syrc" typeface="Estrangelo Edessa"/>
+        <a:font script="Orya" typeface="Kalinga"/>
+        <a:font script="Mlym" typeface="Kartika"/>
+        <a:font script="Laoo" typeface="DokChampa"/>
+        <a:font script="Sinh" typeface="Iskoola Pota"/>
+        <a:font script="Mong" typeface="Mongolian Baiti"/>
+        <a:font script="Viet" typeface="Arial"/>
+        <a:font script="Uigh" typeface="Microsoft Uighur"/>
+        <a:font script="Geor" typeface="Sylfaen"/>
+        <a:font script="Armn" typeface="Arial"/>
+        <a:font script="Bugi" typeface="Leelawadee UI"/>
+        <a:font script="Bopo" typeface="Microsoft JhengHei"/>
+        <a:font script="Java" typeface="Javanese Text"/>
+        <a:font script="Lisu" typeface="Segoe UI"/>
+        <a:font script="Mymr" typeface="Myanmar Text"/>
+        <a:font script="Nkoo" typeface="Ebrima"/>
+        <a:font script="Olck" typeface="Nirmala UI"/>
+        <a:font script="Osma" typeface="Ebrima"/>
+        <a:font script="Phag" typeface="Phagspa"/>
+        <a:font script="Syrn" typeface="Estrangelo Edessa"/>
+        <a:font script="Syrj" typeface="Estrangelo Edessa"/>
+        <a:font script="Syre" typeface="Estrangelo Edessa"/>
+        <a:font script="Sora" typeface="Nirmala UI"/>
+        <a:font script="Tale" typeface="Microsoft Tai Le"/>
+        <a:font script="Talu" typeface="Microsoft New Tai Lue"/>
+        <a:font script="Tfng" typeface="Ebrima"/>
+      </a:minorFont>
+    </a:fontScheme>
+    <a:fmtScheme name="Office">
+      <a:fillStyleLst>
+        <a:solidFill>
+          <a:schemeClr val="phClr"/>
+        </a:solidFill>
+        <a:gradFill rotWithShape="1">
+          <a:gsLst>
+            <a:gs pos="0">
+              <a:schemeClr val="phClr">
+                <a:lumMod val="110000"/>
+                <a:satMod val="105000"/>
+                <a:tint val="67000"/>
+              </a:schemeClr>
+            </a:gs>
+            <a:gs pos="50000">
+              <a:schemeClr val="phClr">
+                <a:lumMod val="105000"/>
+                <a:satMod val="103000"/>
+                <a:tint val="73000"/>
+              </a:schemeClr>
+            </a:gs>
+            <a:gs pos="100000">
+              <a:schemeClr val="phClr">
+                <a:lumMod val="105000"/>
+                <a:satMod val="109000"/>
+                <a:tint val="81000"/>
+              </a:schemeClr>
+            </a:gs>
+          </a:gsLst>
+          <a:lin ang="5400000" scaled="0"/>
+        </a:gradFill>
+        <a:gradFill rotWithShape="1">
+          <a:gsLst>
+            <a:gs pos="0">
+              <a:schemeClr val="phClr">
+                <a:satMod val="103000"/>
+                <a:lumMod val="102000"/>
+                <a:tint val="94000"/>
+              </a:schemeClr>
+            </a:gs>
+            <a:gs pos="50000">
+              <a:schemeClr val="phClr">
+                <a:satMod val="110000"/>
+                <a:lumMod val="100000"/>
+                <a:shade val="100000"/>
+              </a:schemeClr>
+            </a:gs>
+            <a:gs pos="100000">
+              <a:schemeClr val="phClr">
+                <a:lumMod val="99000"/>
+                <a:satMod val="120000"/>
+                <a:shade val="78000"/>
+              </a:schemeClr>
+            </a:gs>
+          </a:gsLst>
+          <a:lin ang="5400000" scaled="0"/>
+        </a:gradFill>
+      </a:fillStyleLst>
+      <a:lnStyleLst>
+        <a:ln w="12700" cap="flat" cmpd="sng" algn="ctr">
+          <a:solidFill>
+            <a:schemeClr val="phClr"/>
+          </a:solidFill>
+          <a:prstDash val="solid"/>
+          <a:miter lim="800000"/>
+        </a:ln>
+        <a:ln w="19050" cap="flat" cmpd="sng" algn="ctr">
+          <a:solidFill>
+            <a:schemeClr val="phClr"/>
+          </a:solidFill>
+          <a:prstDash val="solid"/>
+          <a:miter lim="800000"/>
+        </a:ln>
+        <a:ln w="25400" cap="flat" cmpd="sng" algn="ctr">
+          <a:solidFill>
+            <a:schemeClr val="phClr"/>
+          </a:solidFill>
+          <a:prstDash val="solid"/>
+          <a:miter lim="800000"/>
+        </a:ln>
+      </a:lnStyleLst>
+      <a:effectStyleLst>
+        <a:effectStyle>
+          <a:effectLst/>
+        </a:effectStyle>
+        <a:effectStyle>
+          <a:effectLst/>
+        </a:effectStyle>
+        <a:effectStyle>
+          <a:effectLst>
+            <a:outerShdw blurRad="57150" dist="19050" dir="5400000" algn="ctr" rotWithShape="0">
+              <a:srgbClr val="000000">
+                <a:alpha val="63000"/>
+              </a:srgbClr>
+            </a:outerShdw>
+          </a:effectLst>
+        </a:effectStyle>
+      </a:effectStyleLst>
+      <a:bgFillStyleLst>
+        <a:solidFill>
+          <a:schemeClr val="phClr"/>
+        </a:solidFill>
+        <a:solidFill>
+          <a:schemeClr val="phClr">
+            <a:tint val="95000"/>
+            <a:satMod val="170000"/>
+          </a:schemeClr>
+        </a:solidFill>
+        <a:gradFill rotWithShape="1">
+          <a:gsLst>
+            <a:gs pos="0">
+              <a:schemeClr val="phClr">
+                <a:tint val="93000"/>
+                <a:satMod val="150000"/>
+                <a:shade val="98000"/>
+                <a:lumMod val="102000"/>
+              </a:schemeClr>
+            </a:gs>
+            <a:gs pos="50000">
+              <a:schemeClr val="phClr">
+                <a:tint val="98000"/>
+                <a:satMod val="130000"/>
+                <a:shade val="90000"/>
+                <a:lumMod val="103000"/>
+              </a:schemeClr>
+            </a:gs>
+            <a:gs pos="100000">
+              <a:schemeClr val="phClr">
+                <a:shade val="63000"/>
+                <a:satMod val="120000"/>
+              </a:schemeClr>
+            </a:gs>
+          </a:gsLst>
+          <a:lin ang="5400000" scaled="0"/>
+        </a:gradFill>
+      </a:bgFillStyleLst>
+    </a:fmtScheme>
+  </a:themeElements>
+  <a:objectDefaults>
+    <a:lnDef>
+      <a:spPr/>
+      <a:bodyPr/>
+      <a:lstStyle/>
+      <a:style>
+        <a:lnRef idx="2">
+          <a:schemeClr val="accent1"/>
+        </a:lnRef>
+        <a:fillRef idx="0">
+          <a:schemeClr val="accent1"/>
+        </a:fillRef>
+        <a:effectRef idx="1">
+          <a:schemeClr val="accent1"/>
+        </a:effectRef>
+        <a:fontRef idx="minor">
+          <a:schemeClr val="tx1"/>
+        </a:fontRef>
+      </a:style>
+    </a:lnDef>
+  </a:objectDefaults>
+  <a:extraClrSchemeLst/>
+  <a:extLst>
+    <a:ext uri="{05A4C25C-085E-4340-85A3-A5531E510DB2}">
+      <thm15:themeFamily xmlns:thm15="http://schemas.microsoft.com/office/thememl/2012/main" name="Office Theme" id="{2E142A2C-CD16-42D6-873A-C26D2A0506FA}" vid="{1BDDFF52-6CD6-40A5-AB3C-68EB2F1E4D0A}"/>
+    </a:ext>
+  </a:extLst>
+</a:theme>
 </file>